--- a/docs/presentation/BIET-Denovo-IBAB.pptx
+++ b/docs/presentation/BIET-Denovo-IBAB.pptx
@@ -604,7 +604,7 @@
           <a:p>
             <a:r>
               <a:rPr lang="en-US" dirty="0"/>
-              <a:t/>
+              <a:t>The reference case is the strongest thing on this slide: a reviewer can do the multiplication in their head and check our engine agrees.</a:t>
             </a:r>
             <a:endParaRPr lang="en-US" dirty="0"/>
           </a:p>
@@ -1572,7 +1572,7 @@
           <a:p>
             <a:r>
               <a:rPr lang="en-US" dirty="0"/>
-              <a:t/>
+              <a:t>The decision that matters: the engine is client-side, so there is no request between changing an input and seeing a new number. That is what makes live sensitivity possible on free hosting.</a:t>
             </a:r>
             <a:endParaRPr lang="en-US" dirty="0"/>
           </a:p>
@@ -2750,7 +2750,7 @@
         </p:nvSpPr>
         <p:spPr>
           <a:xfrm>
-            <a:off x="10378440" y="1481328"/>
+            <a:off x="10378440" y="1463040"/>
             <a:ext cx="1810512" cy="384048"/>
           </a:xfrm>
           <a:prstGeom prst="roundRect">
@@ -2777,7 +2777,7 @@
         </p:nvSpPr>
         <p:spPr>
           <a:xfrm>
-            <a:off x="9189720" y="2788920"/>
+            <a:off x="9189720" y="2697480"/>
             <a:ext cx="0" cy="1371600"/>
           </a:xfrm>
           <a:prstGeom prst="line">
@@ -2800,7 +2800,7 @@
         </p:nvSpPr>
         <p:spPr>
           <a:xfrm>
-            <a:off x="9261043" y="2788920"/>
+            <a:off x="9261043" y="2697480"/>
             <a:ext cx="0" cy="1371600"/>
           </a:xfrm>
           <a:prstGeom prst="line">
@@ -2823,7 +2823,7 @@
         </p:nvSpPr>
         <p:spPr>
           <a:xfrm>
-            <a:off x="9332366" y="2788920"/>
+            <a:off x="9332366" y="2697480"/>
             <a:ext cx="0" cy="1371600"/>
           </a:xfrm>
           <a:prstGeom prst="line">
@@ -2846,7 +2846,7 @@
         </p:nvSpPr>
         <p:spPr>
           <a:xfrm>
-            <a:off x="9403690" y="2788920"/>
+            <a:off x="9403690" y="2697480"/>
             <a:ext cx="0" cy="1371600"/>
           </a:xfrm>
           <a:prstGeom prst="line">
@@ -2869,7 +2869,7 @@
         </p:nvSpPr>
         <p:spPr>
           <a:xfrm>
-            <a:off x="9475013" y="2788920"/>
+            <a:off x="9475013" y="2697480"/>
             <a:ext cx="0" cy="1371600"/>
           </a:xfrm>
           <a:prstGeom prst="line">
@@ -2892,7 +2892,7 @@
         </p:nvSpPr>
         <p:spPr>
           <a:xfrm>
-            <a:off x="9546336" y="2788920"/>
+            <a:off x="9546336" y="2697480"/>
             <a:ext cx="0" cy="1371600"/>
           </a:xfrm>
           <a:prstGeom prst="line">
@@ -2915,7 +2915,7 @@
         </p:nvSpPr>
         <p:spPr>
           <a:xfrm>
-            <a:off x="9617659" y="2788920"/>
+            <a:off x="9617659" y="2697480"/>
             <a:ext cx="0" cy="1371600"/>
           </a:xfrm>
           <a:prstGeom prst="line">
@@ -2938,7 +2938,7 @@
         </p:nvSpPr>
         <p:spPr>
           <a:xfrm>
-            <a:off x="9688982" y="2788920"/>
+            <a:off x="9688982" y="2697480"/>
             <a:ext cx="0" cy="1371600"/>
           </a:xfrm>
           <a:prstGeom prst="line">
@@ -2961,7 +2961,7 @@
         </p:nvSpPr>
         <p:spPr>
           <a:xfrm>
-            <a:off x="9760306" y="2788920"/>
+            <a:off x="9760306" y="2697480"/>
             <a:ext cx="0" cy="1371600"/>
           </a:xfrm>
           <a:prstGeom prst="line">
@@ -2984,7 +2984,7 @@
         </p:nvSpPr>
         <p:spPr>
           <a:xfrm>
-            <a:off x="9831629" y="2788920"/>
+            <a:off x="9831629" y="2697480"/>
             <a:ext cx="0" cy="1371600"/>
           </a:xfrm>
           <a:prstGeom prst="line">
@@ -3007,7 +3007,7 @@
         </p:nvSpPr>
         <p:spPr>
           <a:xfrm>
-            <a:off x="9902952" y="2788920"/>
+            <a:off x="9902952" y="2697480"/>
             <a:ext cx="0" cy="1371600"/>
           </a:xfrm>
           <a:prstGeom prst="line">
@@ -3030,7 +3030,7 @@
         </p:nvSpPr>
         <p:spPr>
           <a:xfrm>
-            <a:off x="9974275" y="2788920"/>
+            <a:off x="9974275" y="2697480"/>
             <a:ext cx="0" cy="1371600"/>
           </a:xfrm>
           <a:prstGeom prst="line">
@@ -3053,7 +3053,7 @@
         </p:nvSpPr>
         <p:spPr>
           <a:xfrm>
-            <a:off x="10045598" y="2788920"/>
+            <a:off x="10045598" y="2697480"/>
             <a:ext cx="0" cy="1371600"/>
           </a:xfrm>
           <a:prstGeom prst="line">
@@ -3582,8 +3582,8 @@
         </p:nvSpPr>
         <p:spPr>
           <a:xfrm>
-            <a:off x="0" y="5138928"/>
-            <a:ext cx="2331720" cy="1719072"/>
+            <a:off x="0" y="6053328"/>
+            <a:ext cx="2331720" cy="804672"/>
           </a:xfrm>
           <a:prstGeom prst="rect">
             <a:avLst/>
@@ -3607,8 +3607,8 @@
         </p:nvSpPr>
         <p:spPr>
           <a:xfrm>
-            <a:off x="2331720" y="5742432"/>
-            <a:ext cx="3200400" cy="1115568"/>
+            <a:off x="2331720" y="6053328"/>
+            <a:ext cx="3200400" cy="804672"/>
           </a:xfrm>
           <a:prstGeom prst="rect">
             <a:avLst/>
@@ -3632,8 +3632,8 @@
         </p:nvSpPr>
         <p:spPr>
           <a:xfrm>
-            <a:off x="5532120" y="5742432"/>
-            <a:ext cx="1371600" cy="1115568"/>
+            <a:off x="5532120" y="6053328"/>
+            <a:ext cx="1371600" cy="804672"/>
           </a:xfrm>
           <a:prstGeom prst="rect">
             <a:avLst/>
@@ -3657,8 +3657,8 @@
         </p:nvSpPr>
         <p:spPr>
           <a:xfrm>
-            <a:off x="2331720" y="1481328"/>
-            <a:ext cx="7315200" cy="292608"/>
+            <a:off x="2331720" y="1463040"/>
+            <a:ext cx="3749040" cy="292608"/>
           </a:xfrm>
           <a:prstGeom prst="rect">
             <a:avLst/>
@@ -3696,8 +3696,47 @@
         </p:nvSpPr>
         <p:spPr>
           <a:xfrm>
-            <a:off x="2286000" y="1810512"/>
-            <a:ext cx="7315200" cy="1700784"/>
+            <a:off x="6263640" y="1463040"/>
+            <a:ext cx="4023360" cy="292608"/>
+          </a:xfrm>
+          <a:prstGeom prst="rect">
+            <a:avLst/>
+          </a:prstGeom>
+          <a:noFill/>
+          <a:ln/>
+        </p:spPr>
+        <p:txBody>
+          <a:bodyPr wrap="square" lIns="0" tIns="0" rIns="0" bIns="0" rtlCol="0" anchor="ctr"/>
+          <a:lstStyle/>
+          <a:p>
+            <a:pPr algn="r" indent="0" marL="0">
+              <a:buNone/>
+            </a:pPr>
+            <a:r>
+              <a:rPr lang="en-US" sz="1100" b="1" dirty="0">
+                <a:solidFill>
+                  <a:srgbClr val="4A63C8"/>
+                </a:solidFill>
+                <a:latin typeface="Calibri" pitchFamily="34" charset="0"/>
+                <a:ea typeface="Calibri" pitchFamily="34" charset="-122"/>
+                <a:cs typeface="Calibri" pitchFamily="34" charset="-120"/>
+              </a:rPr>
+              <a:t>early-stage-bia.onrender.com</a:t>
+            </a:r>
+            <a:endParaRPr lang="en-US" sz="1100" dirty="0"/>
+          </a:p>
+        </p:txBody>
+      </p:sp>
+      <p:sp>
+        <p:nvSpPr>
+          <p:cNvPr id="70" name="Text 68"/>
+          <p:cNvSpPr txBox="1"/>
+          <p:nvPr/>
+        </p:nvSpPr>
+        <p:spPr>
+          <a:xfrm>
+            <a:off x="2286000" y="1792224"/>
+            <a:ext cx="7315200" cy="1572768"/>
           </a:xfrm>
           <a:prstGeom prst="rect">
             <a:avLst/>
@@ -3713,7 +3752,7 @@
               <a:buNone/>
             </a:pPr>
             <a:r>
-              <a:rPr lang="en-US" sz="9600" b="1" dirty="0">
+              <a:rPr lang="en-US" sz="9200" b="1" dirty="0">
                 <a:solidFill>
                   <a:srgbClr val="12235B"/>
                 </a:solidFill>
@@ -3723,20 +3762,20 @@
               </a:rPr>
               <a:t>BIET</a:t>
             </a:r>
-            <a:endParaRPr lang="en-US" sz="9600" dirty="0"/>
-          </a:p>
-        </p:txBody>
-      </p:sp>
-      <p:sp>
-        <p:nvSpPr>
-          <p:cNvPr id="70" name="Text 68"/>
-          <p:cNvSpPr txBox="1"/>
-          <p:nvPr/>
-        </p:nvSpPr>
-        <p:spPr>
-          <a:xfrm>
-            <a:off x="2331720" y="3419856"/>
-            <a:ext cx="7498080" cy="512064"/>
+            <a:endParaRPr lang="en-US" sz="9200" dirty="0"/>
+          </a:p>
+        </p:txBody>
+      </p:sp>
+      <p:sp>
+        <p:nvSpPr>
+          <p:cNvPr id="71" name="Text 69"/>
+          <p:cNvSpPr txBox="1"/>
+          <p:nvPr/>
+        </p:nvSpPr>
+        <p:spPr>
+          <a:xfrm>
+            <a:off x="2331720" y="3291840"/>
+            <a:ext cx="7498080" cy="493776"/>
           </a:xfrm>
           <a:prstGeom prst="rect">
             <a:avLst/>
@@ -3752,7 +3791,7 @@
               <a:buNone/>
             </a:pPr>
             <a:r>
-              <a:rPr lang="en-US" sz="2700" dirty="0">
+              <a:rPr lang="en-US" sz="2600" dirty="0">
                 <a:solidFill>
                   <a:srgbClr val="1D3A82"/>
                 </a:solidFill>
@@ -3762,20 +3801,20 @@
               </a:rPr>
               <a:t>Budget Impact Estimation Tool</a:t>
             </a:r>
-            <a:endParaRPr lang="en-US" sz="2700" dirty="0"/>
-          </a:p>
-        </p:txBody>
-      </p:sp>
-      <p:sp>
-        <p:nvSpPr>
-          <p:cNvPr id="71" name="Text 69"/>
-          <p:cNvSpPr txBox="1"/>
-          <p:nvPr/>
-        </p:nvSpPr>
-        <p:spPr>
-          <a:xfrm>
-            <a:off x="2331720" y="4005072"/>
-            <a:ext cx="6949440" cy="329184"/>
+            <a:endParaRPr lang="en-US" sz="2600" dirty="0"/>
+          </a:p>
+        </p:txBody>
+      </p:sp>
+      <p:sp>
+        <p:nvSpPr>
+          <p:cNvPr id="72" name="Text 70"/>
+          <p:cNvSpPr txBox="1"/>
+          <p:nvPr/>
+        </p:nvSpPr>
+        <p:spPr>
+          <a:xfrm>
+            <a:off x="2331720" y="3822192"/>
+            <a:ext cx="7223760" cy="292608"/>
           </a:xfrm>
           <a:prstGeom prst="rect">
             <a:avLst/>
@@ -3791,7 +3830,7 @@
               <a:buNone/>
             </a:pPr>
             <a:r>
-              <a:rPr lang="en-US" sz="1350" dirty="0">
+              <a:rPr lang="en-US" sz="1300" dirty="0">
                 <a:solidFill>
                   <a:srgbClr val="6B7A90"/>
                 </a:solidFill>
@@ -3801,20 +3840,47 @@
               </a:rPr>
               <a:t>Early-stage budget impact analysis for pharmaceutical decision support</a:t>
             </a:r>
-            <a:endParaRPr lang="en-US" sz="1350" dirty="0"/>
-          </a:p>
-        </p:txBody>
-      </p:sp>
-      <p:sp>
-        <p:nvSpPr>
-          <p:cNvPr id="72" name="Text 70"/>
-          <p:cNvSpPr txBox="1"/>
-          <p:nvPr/>
-        </p:nvSpPr>
-        <p:spPr>
-          <a:xfrm>
-            <a:off x="2331720" y="4572000"/>
-            <a:ext cx="5486400" cy="274320"/>
+            <a:endParaRPr lang="en-US" sz="1300" dirty="0"/>
+          </a:p>
+        </p:txBody>
+      </p:sp>
+      <p:sp>
+        <p:nvSpPr>
+          <p:cNvPr id="73" name="Shape 71"/>
+          <p:cNvSpPr/>
+          <p:nvPr/>
+        </p:nvSpPr>
+        <p:spPr>
+          <a:xfrm>
+            <a:off x="2331720" y="4315968"/>
+            <a:ext cx="7973568" cy="1517904"/>
+          </a:xfrm>
+          <a:prstGeom prst="roundRect">
+            <a:avLst>
+              <a:gd name="adj" fmla="val 4819"/>
+            </a:avLst>
+          </a:prstGeom>
+          <a:solidFill>
+            <a:srgbClr val="F1F8FD"/>
+          </a:solidFill>
+          <a:ln w="12700">
+            <a:solidFill>
+              <a:srgbClr val="F1F8FD"/>
+            </a:solidFill>
+            <a:prstDash val="solid"/>
+          </a:ln>
+        </p:spPr>
+      </p:sp>
+      <p:sp>
+        <p:nvSpPr>
+          <p:cNvPr id="74" name="Text 72"/>
+          <p:cNvSpPr txBox="1"/>
+          <p:nvPr/>
+        </p:nvSpPr>
+        <p:spPr>
+          <a:xfrm>
+            <a:off x="2606040" y="4443984"/>
+            <a:ext cx="2743200" cy="201168"/>
           </a:xfrm>
           <a:prstGeom prst="rect">
             <a:avLst/>
@@ -3830,7 +3896,88 @@
               <a:buNone/>
             </a:pPr>
             <a:r>
-              <a:rPr lang="en-US" sz="1150" b="1" dirty="0">
+              <a:rPr lang="en-US" sz="940" b="1" spc="110" kern="0" dirty="0">
+                <a:solidFill>
+                  <a:srgbClr val="4FC3E8"/>
+                </a:solidFill>
+                <a:latin typeface="Calibri" pitchFamily="34" charset="0"/>
+                <a:ea typeface="Calibri" pitchFamily="34" charset="-122"/>
+                <a:cs typeface="Calibri" pitchFamily="34" charset="-120"/>
+              </a:rPr>
+              <a:t>THE PROBLEM</a:t>
+            </a:r>
+            <a:endParaRPr lang="en-US" sz="940" dirty="0"/>
+          </a:p>
+        </p:txBody>
+      </p:sp>
+      <p:sp>
+        <p:nvSpPr>
+          <p:cNvPr id="75" name="Text 73"/>
+          <p:cNvSpPr txBox="1"/>
+          <p:nvPr/>
+        </p:nvSpPr>
+        <p:spPr>
+          <a:xfrm>
+            <a:off x="2606040" y="4645152"/>
+            <a:ext cx="7443216" cy="420624"/>
+          </a:xfrm>
+          <a:prstGeom prst="rect">
+            <a:avLst/>
+          </a:prstGeom>
+          <a:noFill/>
+          <a:ln/>
+        </p:spPr>
+        <p:txBody>
+          <a:bodyPr wrap="square" lIns="0" tIns="0" rIns="0" bIns="0" rtlCol="0" anchor="ctr"/>
+          <a:lstStyle/>
+          <a:p>
+            <a:pPr indent="0" marL="0">
+              <a:lnSpc>
+                <a:spcPts val="1500"/>
+              </a:lnSpc>
+              <a:buNone/>
+            </a:pPr>
+            <a:r>
+              <a:rPr lang="en-US" sz="1180" dirty="0">
+                <a:solidFill>
+                  <a:srgbClr val="1B2431"/>
+                </a:solidFill>
+                <a:latin typeface="Calibri" pitchFamily="34" charset="0"/>
+                <a:ea typeface="Calibri" pitchFamily="34" charset="-122"/>
+                <a:cs typeface="Calibri" pitchFamily="34" charset="-120"/>
+              </a:rPr>
+              <a:t>Early-stage drug teams cannot answer a payer's first question — what will this cost my budget? — without weeks of bespoke spreadsheet work.</a:t>
+            </a:r>
+            <a:endParaRPr lang="en-US" sz="1180" dirty="0"/>
+          </a:p>
+        </p:txBody>
+      </p:sp>
+      <p:sp>
+        <p:nvSpPr>
+          <p:cNvPr id="76" name="Text 74"/>
+          <p:cNvSpPr txBox="1"/>
+          <p:nvPr/>
+        </p:nvSpPr>
+        <p:spPr>
+          <a:xfrm>
+            <a:off x="2606040" y="5120640"/>
+            <a:ext cx="2743200" cy="201168"/>
+          </a:xfrm>
+          <a:prstGeom prst="rect">
+            <a:avLst/>
+          </a:prstGeom>
+          <a:noFill/>
+          <a:ln/>
+        </p:spPr>
+        <p:txBody>
+          <a:bodyPr wrap="square" lIns="0" tIns="0" rIns="0" bIns="0" rtlCol="0" anchor="ctr"/>
+          <a:lstStyle/>
+          <a:p>
+            <a:pPr indent="0" marL="0">
+              <a:buNone/>
+            </a:pPr>
+            <a:r>
+              <a:rPr lang="en-US" sz="940" b="1" spc="110" kern="0" dirty="0">
                 <a:solidFill>
                   <a:srgbClr val="4A63C8"/>
                 </a:solidFill>
@@ -3838,9 +3985,51 @@
                 <a:ea typeface="Calibri" pitchFamily="34" charset="-122"/>
                 <a:cs typeface="Calibri" pitchFamily="34" charset="-120"/>
               </a:rPr>
-              <a:t>early-stage-bia.onrender.com</a:t>
-            </a:r>
-            <a:endParaRPr lang="en-US" sz="1150" dirty="0"/>
+              <a:t>HEADLINE OUTCOME</a:t>
+            </a:r>
+            <a:endParaRPr lang="en-US" sz="940" dirty="0"/>
+          </a:p>
+        </p:txBody>
+      </p:sp>
+      <p:sp>
+        <p:nvSpPr>
+          <p:cNvPr id="77" name="Text 75"/>
+          <p:cNvSpPr txBox="1"/>
+          <p:nvPr/>
+        </p:nvSpPr>
+        <p:spPr>
+          <a:xfrm>
+            <a:off x="2606040" y="5321808"/>
+            <a:ext cx="7443216" cy="420624"/>
+          </a:xfrm>
+          <a:prstGeom prst="rect">
+            <a:avLst/>
+          </a:prstGeom>
+          <a:noFill/>
+          <a:ln/>
+        </p:spPr>
+        <p:txBody>
+          <a:bodyPr wrap="square" lIns="0" tIns="0" rIns="0" bIns="0" rtlCol="0" anchor="ctr"/>
+          <a:lstStyle/>
+          <a:p>
+            <a:pPr indent="0" marL="0">
+              <a:lnSpc>
+                <a:spcPts val="1500"/>
+              </a:lnSpc>
+              <a:buNone/>
+            </a:pPr>
+            <a:r>
+              <a:rPr lang="en-US" sz="1180" b="1" dirty="0">
+                <a:solidFill>
+                  <a:srgbClr val="12235B"/>
+                </a:solidFill>
+                <a:latin typeface="Calibri" pitchFamily="34" charset="0"/>
+                <a:ea typeface="Calibri" pitchFamily="34" charset="-122"/>
+                <a:cs typeface="Calibri" pitchFamily="34" charset="-120"/>
+              </a:rPr>
+              <a:t>A five-year model in under 10 minutes instead of weeks, every figure traceable to the input behind it.</a:t>
+            </a:r>
+            <a:endParaRPr lang="en-US" sz="1180" dirty="0"/>
           </a:p>
         </p:txBody>
       </p:sp>
@@ -3990,15 +4179,572 @@
                 <a:ea typeface="Calibri" pitchFamily="34" charset="-122"/>
                 <a:cs typeface="Calibri" pitchFamily="34" charset="-120"/>
               </a:rPr>
-              <a:t>A budget impact tool that returns a confident wrong number is worse than one that refuses. We tested for that specifically.</a:t>
+              <a:t>A tool that returns a confident wrong number is worse than one that refuses. We check the arithmetic against a case anyone can verify by hand.</a:t>
             </a:r>
             <a:endParaRPr lang="en-US" sz="1400" dirty="0"/>
+          </a:p>
+        </p:txBody>
+      </p:sp>
+      <p:sp>
+        <p:nvSpPr>
+          <p:cNvPr id="5" name="Shape 3"/>
+          <p:cNvSpPr/>
+          <p:nvPr/>
+        </p:nvSpPr>
+        <p:spPr>
+          <a:xfrm>
+            <a:off x="713232" y="2249424"/>
+            <a:ext cx="5257800" cy="2395728"/>
+          </a:xfrm>
+          <a:prstGeom prst="roundRect">
+            <a:avLst>
+              <a:gd name="adj" fmla="val 3817"/>
+            </a:avLst>
+          </a:prstGeom>
+          <a:solidFill>
+            <a:srgbClr val="F1F8FD"/>
+          </a:solidFill>
+          <a:ln w="12700">
+            <a:solidFill>
+              <a:srgbClr val="F1F8FD"/>
+            </a:solidFill>
+            <a:prstDash val="solid"/>
+          </a:ln>
+        </p:spPr>
+      </p:sp>
+      <p:sp>
+        <p:nvSpPr>
+          <p:cNvPr id="6" name="Text 4"/>
+          <p:cNvSpPr txBox="1"/>
+          <p:nvPr/>
+        </p:nvSpPr>
+        <p:spPr>
+          <a:xfrm>
+            <a:off x="950976" y="2395728"/>
+            <a:ext cx="4846320" cy="219456"/>
+          </a:xfrm>
+          <a:prstGeom prst="rect">
+            <a:avLst/>
+          </a:prstGeom>
+          <a:noFill/>
+          <a:ln/>
+        </p:spPr>
+        <p:txBody>
+          <a:bodyPr wrap="square" lIns="0" tIns="0" rIns="0" bIns="0" rtlCol="0" anchor="ctr"/>
+          <a:lstStyle/>
+          <a:p>
+            <a:pPr indent="0" marL="0">
+              <a:buNone/>
+            </a:pPr>
+            <a:r>
+              <a:rPr lang="en-US" sz="960" b="1" spc="110" kern="0" dirty="0">
+                <a:solidFill>
+                  <a:srgbClr val="4FC3E8"/>
+                </a:solidFill>
+                <a:latin typeface="Calibri" pitchFamily="34" charset="0"/>
+                <a:ea typeface="Calibri" pitchFamily="34" charset="-122"/>
+                <a:cs typeface="Calibri" pitchFamily="34" charset="-120"/>
+              </a:rPr>
+              <a:t>VALIDATION AGAINST A REFERENCE CASE</a:t>
+            </a:r>
+            <a:endParaRPr lang="en-US" sz="960" dirty="0"/>
+          </a:p>
+        </p:txBody>
+      </p:sp>
+      <p:sp>
+        <p:nvSpPr>
+          <p:cNvPr id="7" name="Text 5"/>
+          <p:cNvSpPr txBox="1"/>
+          <p:nvPr/>
+        </p:nvSpPr>
+        <p:spPr>
+          <a:xfrm>
+            <a:off x="950976" y="2706624"/>
+            <a:ext cx="2834640" cy="237744"/>
+          </a:xfrm>
+          <a:prstGeom prst="rect">
+            <a:avLst/>
+          </a:prstGeom>
+          <a:noFill/>
+          <a:ln/>
+        </p:spPr>
+        <p:txBody>
+          <a:bodyPr wrap="square" lIns="0" tIns="0" rIns="0" bIns="0" rtlCol="0" anchor="ctr"/>
+          <a:lstStyle/>
+          <a:p>
+            <a:pPr indent="0" marL="0">
+              <a:buNone/>
+            </a:pPr>
+            <a:r>
+              <a:rPr lang="en-US" sz="1140" dirty="0">
+                <a:solidFill>
+                  <a:srgbClr val="1B2431"/>
+                </a:solidFill>
+                <a:latin typeface="Calibri" pitchFamily="34" charset="0"/>
+                <a:ea typeface="Calibri" pitchFamily="34" charset="-122"/>
+                <a:cs typeface="Calibri" pitchFamily="34" charset="-120"/>
+              </a:rPr>
+              <a:t>Covered lives</a:t>
+            </a:r>
+            <a:endParaRPr lang="en-US" sz="1140" dirty="0"/>
+          </a:p>
+        </p:txBody>
+      </p:sp>
+      <p:sp>
+        <p:nvSpPr>
+          <p:cNvPr id="8" name="Text 6"/>
+          <p:cNvSpPr txBox="1"/>
+          <p:nvPr/>
+        </p:nvSpPr>
+        <p:spPr>
+          <a:xfrm>
+            <a:off x="3840480" y="2706624"/>
+            <a:ext cx="1920240" cy="237744"/>
+          </a:xfrm>
+          <a:prstGeom prst="rect">
+            <a:avLst/>
+          </a:prstGeom>
+          <a:noFill/>
+          <a:ln/>
+        </p:spPr>
+        <p:txBody>
+          <a:bodyPr wrap="square" lIns="0" tIns="0" rIns="0" bIns="0" rtlCol="0" anchor="ctr"/>
+          <a:lstStyle/>
+          <a:p>
+            <a:pPr algn="r" indent="0" marL="0">
+              <a:buNone/>
+            </a:pPr>
+            <a:r>
+              <a:rPr lang="en-US" sz="1140" b="1" dirty="0">
+                <a:solidFill>
+                  <a:srgbClr val="12235B"/>
+                </a:solidFill>
+                <a:latin typeface="Calibri" pitchFamily="34" charset="0"/>
+                <a:ea typeface="Calibri" pitchFamily="34" charset="-122"/>
+                <a:cs typeface="Calibri" pitchFamily="34" charset="-120"/>
+              </a:rPr>
+              <a:t>1,000,000</a:t>
+            </a:r>
+            <a:endParaRPr lang="en-US" sz="1140" dirty="0"/>
+          </a:p>
+        </p:txBody>
+      </p:sp>
+      <p:sp>
+        <p:nvSpPr>
+          <p:cNvPr id="9" name="Text 7"/>
+          <p:cNvSpPr txBox="1"/>
+          <p:nvPr/>
+        </p:nvSpPr>
+        <p:spPr>
+          <a:xfrm>
+            <a:off x="950976" y="2999232"/>
+            <a:ext cx="2834640" cy="237744"/>
+          </a:xfrm>
+          <a:prstGeom prst="rect">
+            <a:avLst/>
+          </a:prstGeom>
+          <a:noFill/>
+          <a:ln/>
+        </p:spPr>
+        <p:txBody>
+          <a:bodyPr wrap="square" lIns="0" tIns="0" rIns="0" bIns="0" rtlCol="0" anchor="ctr"/>
+          <a:lstStyle/>
+          <a:p>
+            <a:pPr indent="0" marL="0">
+              <a:buNone/>
+            </a:pPr>
+            <a:r>
+              <a:rPr lang="en-US" sz="1140" dirty="0">
+                <a:solidFill>
+                  <a:srgbClr val="1B2431"/>
+                </a:solidFill>
+                <a:latin typeface="Calibri" pitchFamily="34" charset="0"/>
+                <a:ea typeface="Calibri" pitchFamily="34" charset="-122"/>
+                <a:cs typeface="Calibri" pitchFamily="34" charset="-120"/>
+              </a:rPr>
+              <a:t>× prevalence 10%</a:t>
+            </a:r>
+            <a:endParaRPr lang="en-US" sz="1140" dirty="0"/>
+          </a:p>
+        </p:txBody>
+      </p:sp>
+      <p:sp>
+        <p:nvSpPr>
+          <p:cNvPr id="10" name="Text 8"/>
+          <p:cNvSpPr txBox="1"/>
+          <p:nvPr/>
+        </p:nvSpPr>
+        <p:spPr>
+          <a:xfrm>
+            <a:off x="3840480" y="2999232"/>
+            <a:ext cx="1920240" cy="237744"/>
+          </a:xfrm>
+          <a:prstGeom prst="rect">
+            <a:avLst/>
+          </a:prstGeom>
+          <a:noFill/>
+          <a:ln/>
+        </p:spPr>
+        <p:txBody>
+          <a:bodyPr wrap="square" lIns="0" tIns="0" rIns="0" bIns="0" rtlCol="0" anchor="ctr"/>
+          <a:lstStyle/>
+          <a:p>
+            <a:pPr algn="r" indent="0" marL="0">
+              <a:buNone/>
+            </a:pPr>
+            <a:r>
+              <a:rPr lang="en-US" sz="1140" b="1" dirty="0">
+                <a:solidFill>
+                  <a:srgbClr val="12235B"/>
+                </a:solidFill>
+                <a:latin typeface="Calibri" pitchFamily="34" charset="0"/>
+                <a:ea typeface="Calibri" pitchFamily="34" charset="-122"/>
+                <a:cs typeface="Calibri" pitchFamily="34" charset="-120"/>
+              </a:rPr>
+              <a:t>100,000</a:t>
+            </a:r>
+            <a:endParaRPr lang="en-US" sz="1140" dirty="0"/>
+          </a:p>
+        </p:txBody>
+      </p:sp>
+      <p:sp>
+        <p:nvSpPr>
+          <p:cNvPr id="11" name="Text 9"/>
+          <p:cNvSpPr txBox="1"/>
+          <p:nvPr/>
+        </p:nvSpPr>
+        <p:spPr>
+          <a:xfrm>
+            <a:off x="950976" y="3291840"/>
+            <a:ext cx="2834640" cy="237744"/>
+          </a:xfrm>
+          <a:prstGeom prst="rect">
+            <a:avLst/>
+          </a:prstGeom>
+          <a:noFill/>
+          <a:ln/>
+        </p:spPr>
+        <p:txBody>
+          <a:bodyPr wrap="square" lIns="0" tIns="0" rIns="0" bIns="0" rtlCol="0" anchor="ctr"/>
+          <a:lstStyle/>
+          <a:p>
+            <a:pPr indent="0" marL="0">
+              <a:buNone/>
+            </a:pPr>
+            <a:r>
+              <a:rPr lang="en-US" sz="1140" dirty="0">
+                <a:solidFill>
+                  <a:srgbClr val="1B2431"/>
+                </a:solidFill>
+                <a:latin typeface="Calibri" pitchFamily="34" charset="0"/>
+                <a:ea typeface="Calibri" pitchFamily="34" charset="-122"/>
+                <a:cs typeface="Calibri" pitchFamily="34" charset="-120"/>
+              </a:rPr>
+              <a:t>× diagnosed 50%</a:t>
+            </a:r>
+            <a:endParaRPr lang="en-US" sz="1140" dirty="0"/>
+          </a:p>
+        </p:txBody>
+      </p:sp>
+      <p:sp>
+        <p:nvSpPr>
+          <p:cNvPr id="12" name="Text 10"/>
+          <p:cNvSpPr txBox="1"/>
+          <p:nvPr/>
+        </p:nvSpPr>
+        <p:spPr>
+          <a:xfrm>
+            <a:off x="3840480" y="3291840"/>
+            <a:ext cx="1920240" cy="237744"/>
+          </a:xfrm>
+          <a:prstGeom prst="rect">
+            <a:avLst/>
+          </a:prstGeom>
+          <a:noFill/>
+          <a:ln/>
+        </p:spPr>
+        <p:txBody>
+          <a:bodyPr wrap="square" lIns="0" tIns="0" rIns="0" bIns="0" rtlCol="0" anchor="ctr"/>
+          <a:lstStyle/>
+          <a:p>
+            <a:pPr algn="r" indent="0" marL="0">
+              <a:buNone/>
+            </a:pPr>
+            <a:r>
+              <a:rPr lang="en-US" sz="1140" b="1" dirty="0">
+                <a:solidFill>
+                  <a:srgbClr val="12235B"/>
+                </a:solidFill>
+                <a:latin typeface="Calibri" pitchFamily="34" charset="0"/>
+                <a:ea typeface="Calibri" pitchFamily="34" charset="-122"/>
+                <a:cs typeface="Calibri" pitchFamily="34" charset="-120"/>
+              </a:rPr>
+              <a:t>50,000 eligible</a:t>
+            </a:r>
+            <a:endParaRPr lang="en-US" sz="1140" dirty="0"/>
+          </a:p>
+        </p:txBody>
+      </p:sp>
+      <p:sp>
+        <p:nvSpPr>
+          <p:cNvPr id="13" name="Text 11"/>
+          <p:cNvSpPr txBox="1"/>
+          <p:nvPr/>
+        </p:nvSpPr>
+        <p:spPr>
+          <a:xfrm>
+            <a:off x="950976" y="3584448"/>
+            <a:ext cx="2834640" cy="237744"/>
+          </a:xfrm>
+          <a:prstGeom prst="rect">
+            <a:avLst/>
+          </a:prstGeom>
+          <a:noFill/>
+          <a:ln/>
+        </p:spPr>
+        <p:txBody>
+          <a:bodyPr wrap="square" lIns="0" tIns="0" rIns="0" bIns="0" rtlCol="0" anchor="ctr"/>
+          <a:lstStyle/>
+          <a:p>
+            <a:pPr indent="0" marL="0">
+              <a:buNone/>
+            </a:pPr>
+            <a:r>
+              <a:rPr lang="en-US" sz="1140" dirty="0">
+                <a:solidFill>
+                  <a:srgbClr val="1B2431"/>
+                </a:solidFill>
+                <a:latin typeface="Calibri" pitchFamily="34" charset="0"/>
+                <a:ea typeface="Calibri" pitchFamily="34" charset="-122"/>
+                <a:cs typeface="Calibri" pitchFamily="34" charset="-120"/>
+              </a:rPr>
+              <a:t>× uptake 100%, 1 year</a:t>
+            </a:r>
+            <a:endParaRPr lang="en-US" sz="1140" dirty="0"/>
+          </a:p>
+        </p:txBody>
+      </p:sp>
+      <p:sp>
+        <p:nvSpPr>
+          <p:cNvPr id="14" name="Text 12"/>
+          <p:cNvSpPr txBox="1"/>
+          <p:nvPr/>
+        </p:nvSpPr>
+        <p:spPr>
+          <a:xfrm>
+            <a:off x="3840480" y="3584448"/>
+            <a:ext cx="1920240" cy="237744"/>
+          </a:xfrm>
+          <a:prstGeom prst="rect">
+            <a:avLst/>
+          </a:prstGeom>
+          <a:noFill/>
+          <a:ln/>
+        </p:spPr>
+        <p:txBody>
+          <a:bodyPr wrap="square" lIns="0" tIns="0" rIns="0" bIns="0" rtlCol="0" anchor="ctr"/>
+          <a:lstStyle/>
+          <a:p>
+            <a:pPr algn="r" indent="0" marL="0">
+              <a:buNone/>
+            </a:pPr>
+            <a:r>
+              <a:rPr lang="en-US" sz="1140" b="1" dirty="0">
+                <a:solidFill>
+                  <a:srgbClr val="12235B"/>
+                </a:solidFill>
+                <a:latin typeface="Calibri" pitchFamily="34" charset="0"/>
+                <a:ea typeface="Calibri" pitchFamily="34" charset="-122"/>
+                <a:cs typeface="Calibri" pitchFamily="34" charset="-120"/>
+              </a:rPr>
+              <a:t>50,000 treated</a:t>
+            </a:r>
+            <a:endParaRPr lang="en-US" sz="1140" dirty="0"/>
+          </a:p>
+        </p:txBody>
+      </p:sp>
+      <p:sp>
+        <p:nvSpPr>
+          <p:cNvPr id="15" name="Text 13"/>
+          <p:cNvSpPr txBox="1"/>
+          <p:nvPr/>
+        </p:nvSpPr>
+        <p:spPr>
+          <a:xfrm>
+            <a:off x="950976" y="3877056"/>
+            <a:ext cx="2834640" cy="237744"/>
+          </a:xfrm>
+          <a:prstGeom prst="rect">
+            <a:avLst/>
+          </a:prstGeom>
+          <a:noFill/>
+          <a:ln/>
+        </p:spPr>
+        <p:txBody>
+          <a:bodyPr wrap="square" lIns="0" tIns="0" rIns="0" bIns="0" rtlCol="0" anchor="ctr"/>
+          <a:lstStyle/>
+          <a:p>
+            <a:pPr indent="0" marL="0">
+              <a:buNone/>
+            </a:pPr>
+            <a:r>
+              <a:rPr lang="en-US" sz="1140" dirty="0">
+                <a:solidFill>
+                  <a:srgbClr val="1B2431"/>
+                </a:solidFill>
+                <a:latin typeface="Calibri" pitchFamily="34" charset="0"/>
+                <a:ea typeface="Calibri" pitchFamily="34" charset="-122"/>
+                <a:cs typeface="Calibri" pitchFamily="34" charset="-120"/>
+              </a:rPr>
+              <a:t>× new drug ₹100/yr</a:t>
+            </a:r>
+            <a:endParaRPr lang="en-US" sz="1140" dirty="0"/>
+          </a:p>
+        </p:txBody>
+      </p:sp>
+      <p:sp>
+        <p:nvSpPr>
+          <p:cNvPr id="16" name="Text 14"/>
+          <p:cNvSpPr txBox="1"/>
+          <p:nvPr/>
+        </p:nvSpPr>
+        <p:spPr>
+          <a:xfrm>
+            <a:off x="3840480" y="3877056"/>
+            <a:ext cx="1920240" cy="237744"/>
+          </a:xfrm>
+          <a:prstGeom prst="rect">
+            <a:avLst/>
+          </a:prstGeom>
+          <a:noFill/>
+          <a:ln/>
+        </p:spPr>
+        <p:txBody>
+          <a:bodyPr wrap="square" lIns="0" tIns="0" rIns="0" bIns="0" rtlCol="0" anchor="ctr"/>
+          <a:lstStyle/>
+          <a:p>
+            <a:pPr algn="r" indent="0" marL="0">
+              <a:buNone/>
+            </a:pPr>
+            <a:r>
+              <a:rPr lang="en-US" sz="1140" b="1" dirty="0">
+                <a:solidFill>
+                  <a:srgbClr val="12235B"/>
+                </a:solidFill>
+                <a:latin typeface="Calibri" pitchFamily="34" charset="0"/>
+                <a:ea typeface="Calibri" pitchFamily="34" charset="-122"/>
+                <a:cs typeface="Calibri" pitchFamily="34" charset="-120"/>
+              </a:rPr>
+              <a:t>₹5,000,000</a:t>
+            </a:r>
+            <a:endParaRPr lang="en-US" sz="1140" dirty="0"/>
+          </a:p>
+        </p:txBody>
+      </p:sp>
+      <p:sp>
+        <p:nvSpPr>
+          <p:cNvPr id="17" name="Shape 15"/>
+          <p:cNvSpPr/>
+          <p:nvPr/>
+        </p:nvSpPr>
+        <p:spPr>
+          <a:xfrm>
+            <a:off x="950976" y="4224528"/>
+            <a:ext cx="4809744" cy="0"/>
+          </a:xfrm>
+          <a:prstGeom prst="line">
+            <a:avLst/>
+          </a:prstGeom>
+          <a:noFill/>
+          <a:ln w="15240">
+            <a:solidFill>
+              <a:srgbClr val="9FD9F0"/>
+            </a:solidFill>
+            <a:prstDash val="solid"/>
+          </a:ln>
+        </p:spPr>
+      </p:sp>
+      <p:sp>
+        <p:nvSpPr>
+          <p:cNvPr id="18" name="Text 16"/>
+          <p:cNvSpPr txBox="1"/>
+          <p:nvPr/>
+        </p:nvSpPr>
+        <p:spPr>
+          <a:xfrm>
+            <a:off x="950976" y="4315968"/>
+            <a:ext cx="2560320" cy="256032"/>
+          </a:xfrm>
+          <a:prstGeom prst="rect">
+            <a:avLst/>
+          </a:prstGeom>
+          <a:noFill/>
+          <a:ln/>
+        </p:spPr>
+        <p:txBody>
+          <a:bodyPr wrap="square" lIns="0" tIns="0" rIns="0" bIns="0" rtlCol="0" anchor="ctr"/>
+          <a:lstStyle/>
+          <a:p>
+            <a:pPr indent="0" marL="0">
+              <a:buNone/>
+            </a:pPr>
+            <a:r>
+              <a:rPr lang="en-US" sz="1180" b="1" dirty="0">
+                <a:solidFill>
+                  <a:srgbClr val="12235B"/>
+                </a:solidFill>
+                <a:latin typeface="Calibri" pitchFamily="34" charset="0"/>
+                <a:ea typeface="Calibri" pitchFamily="34" charset="-122"/>
+                <a:cs typeface="Calibri" pitchFamily="34" charset="-120"/>
+              </a:rPr>
+              <a:t>Engine returns</a:t>
+            </a:r>
+            <a:endParaRPr lang="en-US" sz="1180" dirty="0"/>
+          </a:p>
+        </p:txBody>
+      </p:sp>
+      <p:sp>
+        <p:nvSpPr>
+          <p:cNvPr id="19" name="Text 17"/>
+          <p:cNvSpPr txBox="1"/>
+          <p:nvPr/>
+        </p:nvSpPr>
+        <p:spPr>
+          <a:xfrm>
+            <a:off x="3657600" y="4315968"/>
+            <a:ext cx="2103120" cy="256032"/>
+          </a:xfrm>
+          <a:prstGeom prst="rect">
+            <a:avLst/>
+          </a:prstGeom>
+          <a:noFill/>
+          <a:ln/>
+        </p:spPr>
+        <p:txBody>
+          <a:bodyPr wrap="square" lIns="0" tIns="0" rIns="0" bIns="0" rtlCol="0" anchor="ctr"/>
+          <a:lstStyle/>
+          <a:p>
+            <a:pPr algn="r" indent="0" marL="0">
+              <a:buNone/>
+            </a:pPr>
+            <a:r>
+              <a:rPr lang="en-US" sz="1260" b="1" dirty="0">
+                <a:solidFill>
+                  <a:srgbClr val="0B7A5A"/>
+                </a:solidFill>
+                <a:latin typeface="Calibri" pitchFamily="34" charset="0"/>
+                <a:ea typeface="Calibri" pitchFamily="34" charset="-122"/>
+                <a:cs typeface="Calibri" pitchFamily="34" charset="-120"/>
+              </a:rPr>
+              <a:t>₹5,000,000  ✓</a:t>
+            </a:r>
+            <a:endParaRPr lang="en-US" sz="1260" dirty="0"/>
           </a:p>
         </p:txBody>
       </p:sp>
       <p:pic>
         <p:nvPicPr>
-          <p:cNvPr id="5" name="Image 0" descr="/tmp/claude-0/-home-user-early-stage-bia-react-node-postgres/3c107fb9-fcab-5237-a1e7-c2f6f328748c/scratchpad/slideimg/s-sensitivity.png">    </p:cNvPr>
+          <p:cNvPr id="20" name="Image 0" descr="/tmp/claude-0/-home-user-early-stage-bia-react-node-postgres/3c107fb9-fcab-5237-a1e7-c2f6f328748c/scratchpad/slideimg/s-sensitivity.png">    </p:cNvPr>
           <p:cNvPicPr>
             <a:picLocks noChangeAspect="1"/>
           </p:cNvPicPr>
@@ -4012,8 +4758,8 @@
         </p:blipFill>
         <p:spPr>
           <a:xfrm>
-            <a:off x="713232" y="2249424"/>
-            <a:ext cx="5257800" cy="3008376"/>
+            <a:off x="6309360" y="2249424"/>
+            <a:ext cx="5120640" cy="2926080"/>
           </a:xfrm>
           <a:prstGeom prst="rect">
             <a:avLst/>
@@ -4022,14 +4768,14 @@
       </p:pic>
       <p:sp>
         <p:nvSpPr>
-          <p:cNvPr id="6" name="Text 3"/>
-          <p:cNvSpPr txBox="1"/>
-          <p:nvPr/>
-        </p:nvSpPr>
-        <p:spPr>
-          <a:xfrm>
-            <a:off x="713232" y="5321808"/>
-            <a:ext cx="5257800" cy="365760"/>
+          <p:cNvPr id="21" name="Text 18"/>
+          <p:cNvSpPr txBox="1"/>
+          <p:nvPr/>
+        </p:nvSpPr>
+        <p:spPr>
+          <a:xfrm>
+            <a:off x="6309360" y="5248656"/>
+            <a:ext cx="5120640" cy="365760"/>
           </a:xfrm>
           <a:prstGeom prst="rect">
             <a:avLst/>
@@ -4056,46 +4802,22 @@
                 <a:ea typeface="Calibri" pitchFamily="34" charset="-122"/>
                 <a:cs typeface="Calibri" pitchFamily="34" charset="-120"/>
               </a:rPr>
-              <a:t>Sensitivity — each parameter moved ±20% alone, sorted by swing.</a:t>
+              <a:t>Sensitivity — each parameter moved ±20% alone, sorted by how far the answer swings.</a:t>
             </a:r>
             <a:endParaRPr lang="en-US" sz="1020" dirty="0"/>
           </a:p>
         </p:txBody>
       </p:sp>
-      <p:pic>
-        <p:nvPicPr>
-          <p:cNvPr id="7" name="Image 1" descr="/tmp/claude-0/-home-user-early-stage-bia-react-node-postgres/3c107fb9-fcab-5237-a1e7-c2f6f328748c/scratchpad/slideimg/s-validation.png">    </p:cNvPr>
-          <p:cNvPicPr>
-            <a:picLocks noChangeAspect="1"/>
-          </p:cNvPicPr>
-          <p:nvPr/>
-        </p:nvPicPr>
-        <p:blipFill>
-          <a:blip r:embed="rId2"/>
-          <a:stretch>
-            <a:fillRect/>
-          </a:stretch>
-        </p:blipFill>
-        <p:spPr>
-          <a:xfrm>
-            <a:off x="6172200" y="2249424"/>
-            <a:ext cx="5257800" cy="3008376"/>
-          </a:xfrm>
-          <a:prstGeom prst="rect">
-            <a:avLst/>
-          </a:prstGeom>
-        </p:spPr>
-      </p:pic>
-      <p:sp>
-        <p:nvSpPr>
-          <p:cNvPr id="8" name="Text 4"/>
-          <p:cNvSpPr txBox="1"/>
-          <p:nvPr/>
-        </p:nvSpPr>
-        <p:spPr>
-          <a:xfrm>
-            <a:off x="6172200" y="5321808"/>
-            <a:ext cx="5257800" cy="365760"/>
+      <p:sp>
+        <p:nvSpPr>
+          <p:cNvPr id="22" name="Text 19"/>
+          <p:cNvSpPr txBox="1"/>
+          <p:nvPr/>
+        </p:nvSpPr>
+        <p:spPr>
+          <a:xfrm>
+            <a:off x="713232" y="4846320"/>
+            <a:ext cx="5257800" cy="274320"/>
           </a:xfrm>
           <a:prstGeom prst="rect">
             <a:avLst/>
@@ -4108,36 +4830,127 @@
           <a:lstStyle/>
           <a:p>
             <a:pPr indent="0" marL="0">
+              <a:buNone/>
+            </a:pPr>
+            <a:r>
+              <a:rPr lang="en-US" sz="1400" b="1" dirty="0">
+                <a:solidFill>
+                  <a:srgbClr val="12235B"/>
+                </a:solidFill>
+                <a:latin typeface="Calibri" pitchFamily="34" charset="0"/>
+                <a:ea typeface="Calibri" pitchFamily="34" charset="-122"/>
+                <a:cs typeface="Calibri" pitchFamily="34" charset="-120"/>
+              </a:rPr>
+              <a:t>Robustness to changing assumptions</a:t>
+            </a:r>
+            <a:endParaRPr lang="en-US" sz="1400" dirty="0"/>
+          </a:p>
+        </p:txBody>
+      </p:sp>
+      <p:sp>
+        <p:nvSpPr>
+          <p:cNvPr id="23" name="Text 20"/>
+          <p:cNvSpPr txBox="1"/>
+          <p:nvPr/>
+        </p:nvSpPr>
+        <p:spPr>
+          <a:xfrm>
+            <a:off x="713232" y="5175504"/>
+            <a:ext cx="5257800" cy="1005840"/>
+          </a:xfrm>
+          <a:prstGeom prst="rect">
+            <a:avLst/>
+          </a:prstGeom>
+          <a:noFill/>
+          <a:ln/>
+        </p:spPr>
+        <p:txBody>
+          <a:bodyPr wrap="square" lIns="0" tIns="0" rIns="0" bIns="0" rtlCol="0" anchor="t"/>
+          <a:lstStyle/>
+          <a:p>
+            <a:pPr marL="177800" indent="-177800">
               <a:lnSpc>
-                <a:spcPts val="1300"/>
+                <a:spcPts val="1523"/>
               </a:lnSpc>
-              <a:buNone/>
-            </a:pPr>
-            <a:r>
-              <a:rPr lang="en-US" sz="1020" i="1" dirty="0">
-                <a:solidFill>
-                  <a:srgbClr val="6B7A90"/>
-                </a:solidFill>
-                <a:latin typeface="Calibri" pitchFamily="34" charset="0"/>
-                <a:ea typeface="Calibri" pitchFamily="34" charset="-122"/>
-                <a:cs typeface="Calibri" pitchFamily="34" charset="-120"/>
-              </a:rPr>
-              <a:t>Validation — a zeroed input is caught, not silently returned as €0.</a:t>
-            </a:r>
-            <a:endParaRPr lang="en-US" sz="1020" dirty="0"/>
-          </a:p>
-        </p:txBody>
-      </p:sp>
-      <p:sp>
-        <p:nvSpPr>
-          <p:cNvPr id="9" name="Shape 5"/>
-          <p:cNvSpPr/>
-          <p:nvPr/>
-        </p:nvSpPr>
-        <p:spPr>
-          <a:xfrm>
-            <a:off x="713232" y="5760720"/>
-            <a:ext cx="10716768" cy="566928"/>
+              <a:spcAft>
+                <a:spcPts val="600"/>
+              </a:spcAft>
+              <a:buSzPct val="100000"/>
+              <a:buChar char="•"/>
+            </a:pPr>
+            <a:r>
+              <a:rPr lang="en-US" sz="1120" dirty="0">
+                <a:solidFill>
+                  <a:srgbClr val="1B2431"/>
+                </a:solidFill>
+                <a:latin typeface="Calibri" pitchFamily="34" charset="0"/>
+                <a:ea typeface="Calibri" pitchFamily="34" charset="-122"/>
+                <a:cs typeface="Calibri" pitchFamily="34" charset="-120"/>
+              </a:rPr>
+              <a:t>28 invalid inputs probed — 12 blocked, 10 flagged, none produce NaN</a:t>
+            </a:r>
+            <a:endParaRPr lang="en-US" sz="1120" dirty="0"/>
+          </a:p>
+          <a:p>
+            <a:pPr marL="177800" indent="-177800">
+              <a:lnSpc>
+                <a:spcPts val="1523"/>
+              </a:lnSpc>
+              <a:spcAft>
+                <a:spcPts val="600"/>
+              </a:spcAft>
+              <a:buSzPct val="100000"/>
+              <a:buChar char="•"/>
+            </a:pPr>
+            <a:r>
+              <a:rPr lang="en-US" sz="1120" dirty="0">
+                <a:solidFill>
+                  <a:srgbClr val="1B2431"/>
+                </a:solidFill>
+                <a:latin typeface="Calibri" pitchFamily="34" charset="0"/>
+                <a:ea typeface="Calibri" pitchFamily="34" charset="-122"/>
+                <a:cs typeface="Calibri" pitchFamily="34" charset="-120"/>
+              </a:rPr>
+              <a:t>Cost components reconcile exactly to scenario totals</a:t>
+            </a:r>
+            <a:endParaRPr lang="en-US" sz="1120" dirty="0"/>
+          </a:p>
+          <a:p>
+            <a:pPr marL="177800" indent="-177800">
+              <a:lnSpc>
+                <a:spcPts val="1523"/>
+              </a:lnSpc>
+              <a:spcAft>
+                <a:spcPts val="600"/>
+              </a:spcAft>
+              <a:buSzPct val="100000"/>
+              <a:buChar char="•"/>
+            </a:pPr>
+            <a:r>
+              <a:rPr lang="en-US" sz="1120" dirty="0">
+                <a:solidFill>
+                  <a:srgbClr val="1B2431"/>
+                </a:solidFill>
+                <a:latin typeface="Calibri" pitchFamily="34" charset="0"/>
+                <a:ea typeface="Calibri" pitchFamily="34" charset="-122"/>
+                <a:cs typeface="Calibri" pitchFamily="34" charset="-120"/>
+              </a:rPr>
+              <a:t>Break-even price re-solves to a net impact of zero</a:t>
+            </a:r>
+            <a:endParaRPr lang="en-US" sz="1120" dirty="0"/>
+          </a:p>
+        </p:txBody>
+      </p:sp>
+      <p:sp>
+        <p:nvSpPr>
+          <p:cNvPr id="24" name="Shape 21"/>
+          <p:cNvSpPr/>
+          <p:nvPr/>
+        </p:nvSpPr>
+        <p:spPr>
+          <a:xfrm>
+            <a:off x="6309360" y="5687568"/>
+            <a:ext cx="5120640" cy="566928"/>
           </a:xfrm>
           <a:prstGeom prst="roundRect">
             <a:avLst>
@@ -4145,26 +4958,26 @@
             </a:avLst>
           </a:prstGeom>
           <a:solidFill>
-            <a:srgbClr val="F1F8FD"/>
+            <a:srgbClr val="12235B"/>
           </a:solidFill>
           <a:ln w="12700">
             <a:solidFill>
-              <a:srgbClr val="F1F8FD"/>
-            </a:solidFill>
-            <a:prstDash val="solid"/>
-          </a:ln>
-        </p:spPr>
-      </p:sp>
-      <p:sp>
-        <p:nvSpPr>
-          <p:cNvPr id="10" name="Text 6"/>
-          <p:cNvSpPr txBox="1"/>
-          <p:nvPr/>
-        </p:nvSpPr>
-        <p:spPr>
-          <a:xfrm>
-            <a:off x="1005840" y="5852160"/>
-            <a:ext cx="548640" cy="365760"/>
+              <a:srgbClr val="12235B"/>
+            </a:solidFill>
+            <a:prstDash val="solid"/>
+          </a:ln>
+        </p:spPr>
+      </p:sp>
+      <p:sp>
+        <p:nvSpPr>
+          <p:cNvPr id="25" name="Text 22"/>
+          <p:cNvSpPr txBox="1"/>
+          <p:nvPr/>
+        </p:nvSpPr>
+        <p:spPr>
+          <a:xfrm>
+            <a:off x="6510528" y="5760720"/>
+            <a:ext cx="1554480" cy="274320"/>
           </a:xfrm>
           <a:prstGeom prst="rect">
             <a:avLst/>
@@ -4180,30 +4993,30 @@
               <a:buNone/>
             </a:pPr>
             <a:r>
-              <a:rPr lang="en-US" sz="1700" b="1" dirty="0">
-                <a:solidFill>
-                  <a:srgbClr val="4A63C8"/>
+              <a:rPr lang="en-US" sz="1500" b="1" dirty="0">
+                <a:solidFill>
+                  <a:srgbClr val="4FC3E8"/>
                 </a:solidFill>
                 <a:latin typeface="Cambria" pitchFamily="34" charset="0"/>
                 <a:ea typeface="Cambria" pitchFamily="34" charset="-122"/>
                 <a:cs typeface="Cambria" pitchFamily="34" charset="-120"/>
               </a:rPr>
-              <a:t>28</a:t>
-            </a:r>
-            <a:endParaRPr lang="en-US" sz="1700" dirty="0"/>
-          </a:p>
-        </p:txBody>
-      </p:sp>
-      <p:sp>
-        <p:nvSpPr>
-          <p:cNvPr id="11" name="Text 7"/>
-          <p:cNvSpPr txBox="1"/>
-          <p:nvPr/>
-        </p:nvSpPr>
-        <p:spPr>
-          <a:xfrm>
-            <a:off x="1572768" y="5925312"/>
-            <a:ext cx="1508760" cy="292608"/>
+              <a:t>&lt;100ms</a:t>
+            </a:r>
+            <a:endParaRPr lang="en-US" sz="1500" dirty="0"/>
+          </a:p>
+        </p:txBody>
+      </p:sp>
+      <p:sp>
+        <p:nvSpPr>
+          <p:cNvPr id="26" name="Text 23"/>
+          <p:cNvSpPr txBox="1"/>
+          <p:nvPr/>
+        </p:nvSpPr>
+        <p:spPr>
+          <a:xfrm>
+            <a:off x="6510528" y="6016752"/>
+            <a:ext cx="1600200" cy="201168"/>
           </a:xfrm>
           <a:prstGeom prst="rect">
             <a:avLst/>
@@ -4216,36 +5029,33 @@
           <a:lstStyle/>
           <a:p>
             <a:pPr indent="0" marL="0">
-              <a:lnSpc>
-                <a:spcPts val="1200"/>
-              </a:lnSpc>
-              <a:buNone/>
-            </a:pPr>
-            <a:r>
-              <a:rPr lang="en-US" sz="1020" dirty="0">
-                <a:solidFill>
-                  <a:srgbClr val="6B7A90"/>
-                </a:solidFill>
-                <a:latin typeface="Calibri" pitchFamily="34" charset="0"/>
-                <a:ea typeface="Calibri" pitchFamily="34" charset="-122"/>
-                <a:cs typeface="Calibri" pitchFamily="34" charset="-120"/>
-              </a:rPr>
-              <a:t>invalid inputs probed</a:t>
-            </a:r>
-            <a:endParaRPr lang="en-US" sz="1020" dirty="0"/>
-          </a:p>
-        </p:txBody>
-      </p:sp>
-      <p:sp>
-        <p:nvSpPr>
-          <p:cNvPr id="12" name="Text 8"/>
-          <p:cNvSpPr txBox="1"/>
-          <p:nvPr/>
-        </p:nvSpPr>
-        <p:spPr>
-          <a:xfrm>
-            <a:off x="3108960" y="5852160"/>
-            <a:ext cx="548640" cy="365760"/>
+              <a:buNone/>
+            </a:pPr>
+            <a:r>
+              <a:rPr lang="en-US" sz="960" dirty="0">
+                <a:solidFill>
+                  <a:srgbClr val="AFC4E4"/>
+                </a:solidFill>
+                <a:latin typeface="Calibri" pitchFamily="34" charset="0"/>
+                <a:ea typeface="Calibri" pitchFamily="34" charset="-122"/>
+                <a:cs typeface="Calibri" pitchFamily="34" charset="-120"/>
+              </a:rPr>
+              <a:t>recalculation</a:t>
+            </a:r>
+            <a:endParaRPr lang="en-US" sz="960" dirty="0"/>
+          </a:p>
+        </p:txBody>
+      </p:sp>
+      <p:sp>
+        <p:nvSpPr>
+          <p:cNvPr id="27" name="Text 24"/>
+          <p:cNvSpPr txBox="1"/>
+          <p:nvPr/>
+        </p:nvSpPr>
+        <p:spPr>
+          <a:xfrm>
+            <a:off x="8202168" y="5760720"/>
+            <a:ext cx="1554480" cy="274320"/>
           </a:xfrm>
           <a:prstGeom prst="rect">
             <a:avLst/>
@@ -4261,30 +5071,30 @@
               <a:buNone/>
             </a:pPr>
             <a:r>
-              <a:rPr lang="en-US" sz="1700" b="1" dirty="0">
-                <a:solidFill>
-                  <a:srgbClr val="4A63C8"/>
+              <a:rPr lang="en-US" sz="1500" b="1" dirty="0">
+                <a:solidFill>
+                  <a:srgbClr val="4FC3E8"/>
                 </a:solidFill>
                 <a:latin typeface="Cambria" pitchFamily="34" charset="0"/>
                 <a:ea typeface="Cambria" pitchFamily="34" charset="-122"/>
                 <a:cs typeface="Cambria" pitchFamily="34" charset="-120"/>
               </a:rPr>
-              <a:t>12</a:t>
-            </a:r>
-            <a:endParaRPr lang="en-US" sz="1700" dirty="0"/>
-          </a:p>
-        </p:txBody>
-      </p:sp>
-      <p:sp>
-        <p:nvSpPr>
-          <p:cNvPr id="13" name="Text 9"/>
-          <p:cNvSpPr txBox="1"/>
-          <p:nvPr/>
-        </p:nvSpPr>
-        <p:spPr>
-          <a:xfrm>
-            <a:off x="3675888" y="5925312"/>
-            <a:ext cx="1508760" cy="292608"/>
+              <a:t>38</a:t>
+            </a:r>
+            <a:endParaRPr lang="en-US" sz="1500" dirty="0"/>
+          </a:p>
+        </p:txBody>
+      </p:sp>
+      <p:sp>
+        <p:nvSpPr>
+          <p:cNvPr id="28" name="Text 25"/>
+          <p:cNvSpPr txBox="1"/>
+          <p:nvPr/>
+        </p:nvSpPr>
+        <p:spPr>
+          <a:xfrm>
+            <a:off x="8202168" y="6016752"/>
+            <a:ext cx="1600200" cy="201168"/>
           </a:xfrm>
           <a:prstGeom prst="rect">
             <a:avLst/>
@@ -4297,36 +5107,33 @@
           <a:lstStyle/>
           <a:p>
             <a:pPr indent="0" marL="0">
-              <a:lnSpc>
-                <a:spcPts val="1200"/>
-              </a:lnSpc>
-              <a:buNone/>
-            </a:pPr>
-            <a:r>
-              <a:rPr lang="en-US" sz="1020" dirty="0">
-                <a:solidFill>
-                  <a:srgbClr val="6B7A90"/>
-                </a:solidFill>
-                <a:latin typeface="Calibri" pitchFamily="34" charset="0"/>
-                <a:ea typeface="Calibri" pitchFamily="34" charset="-122"/>
-                <a:cs typeface="Calibri" pitchFamily="34" charset="-120"/>
-              </a:rPr>
-              <a:t>blocked outright</a:t>
-            </a:r>
-            <a:endParaRPr lang="en-US" sz="1020" dirty="0"/>
-          </a:p>
-        </p:txBody>
-      </p:sp>
-      <p:sp>
-        <p:nvSpPr>
-          <p:cNvPr id="14" name="Text 10"/>
-          <p:cNvSpPr txBox="1"/>
-          <p:nvPr/>
-        </p:nvSpPr>
-        <p:spPr>
-          <a:xfrm>
-            <a:off x="5212080" y="5852160"/>
-            <a:ext cx="548640" cy="365760"/>
+              <a:buNone/>
+            </a:pPr>
+            <a:r>
+              <a:rPr lang="en-US" sz="960" dirty="0">
+                <a:solidFill>
+                  <a:srgbClr val="AFC4E4"/>
+                </a:solidFill>
+                <a:latin typeface="Calibri" pitchFamily="34" charset="0"/>
+                <a:ea typeface="Calibri" pitchFamily="34" charset="-122"/>
+                <a:cs typeface="Calibri" pitchFamily="34" charset="-120"/>
+              </a:rPr>
+              <a:t>automated tests</a:t>
+            </a:r>
+            <a:endParaRPr lang="en-US" sz="960" dirty="0"/>
+          </a:p>
+        </p:txBody>
+      </p:sp>
+      <p:sp>
+        <p:nvSpPr>
+          <p:cNvPr id="29" name="Text 26"/>
+          <p:cNvSpPr txBox="1"/>
+          <p:nvPr/>
+        </p:nvSpPr>
+        <p:spPr>
+          <a:xfrm>
+            <a:off x="9893808" y="5760720"/>
+            <a:ext cx="1554480" cy="274320"/>
           </a:xfrm>
           <a:prstGeom prst="rect">
             <a:avLst/>
@@ -4342,30 +5149,30 @@
               <a:buNone/>
             </a:pPr>
             <a:r>
-              <a:rPr lang="en-US" sz="1700" b="1" dirty="0">
-                <a:solidFill>
-                  <a:srgbClr val="4A63C8"/>
+              <a:rPr lang="en-US" sz="1500" b="1" dirty="0">
+                <a:solidFill>
+                  <a:srgbClr val="4FC3E8"/>
                 </a:solidFill>
                 <a:latin typeface="Cambria" pitchFamily="34" charset="0"/>
                 <a:ea typeface="Cambria" pitchFamily="34" charset="-122"/>
                 <a:cs typeface="Cambria" pitchFamily="34" charset="-120"/>
               </a:rPr>
-              <a:t>10</a:t>
-            </a:r>
-            <a:endParaRPr lang="en-US" sz="1700" dirty="0"/>
-          </a:p>
-        </p:txBody>
-      </p:sp>
-      <p:sp>
-        <p:nvSpPr>
-          <p:cNvPr id="15" name="Text 11"/>
-          <p:cNvSpPr txBox="1"/>
-          <p:nvPr/>
-        </p:nvSpPr>
-        <p:spPr>
-          <a:xfrm>
-            <a:off x="5779008" y="5925312"/>
-            <a:ext cx="1508760" cy="292608"/>
+              <a:t>0</a:t>
+            </a:r>
+            <a:endParaRPr lang="en-US" sz="1500" dirty="0"/>
+          </a:p>
+        </p:txBody>
+      </p:sp>
+      <p:sp>
+        <p:nvSpPr>
+          <p:cNvPr id="30" name="Text 27"/>
+          <p:cNvSpPr txBox="1"/>
+          <p:nvPr/>
+        </p:nvSpPr>
+        <p:spPr>
+          <a:xfrm>
+            <a:off x="9893808" y="6016752"/>
+            <a:ext cx="1600200" cy="201168"/>
           </a:xfrm>
           <a:prstGeom prst="rect">
             <a:avLst/>
@@ -4378,191 +5185,26 @@
           <a:lstStyle/>
           <a:p>
             <a:pPr indent="0" marL="0">
-              <a:lnSpc>
-                <a:spcPts val="1200"/>
-              </a:lnSpc>
-              <a:buNone/>
-            </a:pPr>
-            <a:r>
-              <a:rPr lang="en-US" sz="1020" dirty="0">
-                <a:solidFill>
-                  <a:srgbClr val="6B7A90"/>
-                </a:solidFill>
-                <a:latin typeface="Calibri" pitchFamily="34" charset="0"/>
-                <a:ea typeface="Calibri" pitchFamily="34" charset="-122"/>
-                <a:cs typeface="Calibri" pitchFamily="34" charset="-120"/>
-              </a:rPr>
-              <a:t>flagged as suspect</a:t>
-            </a:r>
-            <a:endParaRPr lang="en-US" sz="1020" dirty="0"/>
-          </a:p>
-        </p:txBody>
-      </p:sp>
-      <p:sp>
-        <p:nvSpPr>
-          <p:cNvPr id="16" name="Text 12"/>
-          <p:cNvSpPr txBox="1"/>
-          <p:nvPr/>
-        </p:nvSpPr>
-        <p:spPr>
-          <a:xfrm>
-            <a:off x="7315200" y="5852160"/>
-            <a:ext cx="548640" cy="365760"/>
-          </a:xfrm>
-          <a:prstGeom prst="rect">
-            <a:avLst/>
-          </a:prstGeom>
-          <a:noFill/>
-          <a:ln/>
-        </p:spPr>
-        <p:txBody>
-          <a:bodyPr wrap="square" lIns="0" tIns="0" rIns="0" bIns="0" rtlCol="0" anchor="ctr"/>
-          <a:lstStyle/>
-          <a:p>
-            <a:pPr indent="0" marL="0">
-              <a:buNone/>
-            </a:pPr>
-            <a:r>
-              <a:rPr lang="en-US" sz="1700" b="1" dirty="0">
-                <a:solidFill>
-                  <a:srgbClr val="4A63C8"/>
-                </a:solidFill>
-                <a:latin typeface="Cambria" pitchFamily="34" charset="0"/>
-                <a:ea typeface="Cambria" pitchFamily="34" charset="-122"/>
-                <a:cs typeface="Cambria" pitchFamily="34" charset="-120"/>
-              </a:rPr>
-              <a:t>0</a:t>
-            </a:r>
-            <a:endParaRPr lang="en-US" sz="1700" dirty="0"/>
-          </a:p>
-        </p:txBody>
-      </p:sp>
-      <p:sp>
-        <p:nvSpPr>
-          <p:cNvPr id="17" name="Text 13"/>
-          <p:cNvSpPr txBox="1"/>
-          <p:nvPr/>
-        </p:nvSpPr>
-        <p:spPr>
-          <a:xfrm>
-            <a:off x="7882128" y="5925312"/>
-            <a:ext cx="1508760" cy="292608"/>
-          </a:xfrm>
-          <a:prstGeom prst="rect">
-            <a:avLst/>
-          </a:prstGeom>
-          <a:noFill/>
-          <a:ln/>
-        </p:spPr>
-        <p:txBody>
-          <a:bodyPr wrap="square" lIns="0" tIns="0" rIns="0" bIns="0" rtlCol="0" anchor="ctr"/>
-          <a:lstStyle/>
-          <a:p>
-            <a:pPr indent="0" marL="0">
-              <a:lnSpc>
-                <a:spcPts val="1200"/>
-              </a:lnSpc>
-              <a:buNone/>
-            </a:pPr>
-            <a:r>
-              <a:rPr lang="en-US" sz="1020" dirty="0">
-                <a:solidFill>
-                  <a:srgbClr val="6B7A90"/>
-                </a:solidFill>
-                <a:latin typeface="Calibri" pitchFamily="34" charset="0"/>
-                <a:ea typeface="Calibri" pitchFamily="34" charset="-122"/>
-                <a:cs typeface="Calibri" pitchFamily="34" charset="-120"/>
-              </a:rPr>
-              <a:t>produce NaN or a crash</a:t>
-            </a:r>
-            <a:endParaRPr lang="en-US" sz="1020" dirty="0"/>
-          </a:p>
-        </p:txBody>
-      </p:sp>
-      <p:sp>
-        <p:nvSpPr>
-          <p:cNvPr id="18" name="Text 14"/>
-          <p:cNvSpPr txBox="1"/>
-          <p:nvPr/>
-        </p:nvSpPr>
-        <p:spPr>
-          <a:xfrm>
-            <a:off x="9418320" y="5852160"/>
-            <a:ext cx="548640" cy="365760"/>
-          </a:xfrm>
-          <a:prstGeom prst="rect">
-            <a:avLst/>
-          </a:prstGeom>
-          <a:noFill/>
-          <a:ln/>
-        </p:spPr>
-        <p:txBody>
-          <a:bodyPr wrap="square" lIns="0" tIns="0" rIns="0" bIns="0" rtlCol="0" anchor="ctr"/>
-          <a:lstStyle/>
-          <a:p>
-            <a:pPr indent="0" marL="0">
-              <a:buNone/>
-            </a:pPr>
-            <a:r>
-              <a:rPr lang="en-US" sz="1700" b="1" dirty="0">
-                <a:solidFill>
-                  <a:srgbClr val="4A63C8"/>
-                </a:solidFill>
-                <a:latin typeface="Cambria" pitchFamily="34" charset="0"/>
-                <a:ea typeface="Cambria" pitchFamily="34" charset="-122"/>
-                <a:cs typeface="Cambria" pitchFamily="34" charset="-120"/>
-              </a:rPr>
-              <a:t>38</a:t>
-            </a:r>
-            <a:endParaRPr lang="en-US" sz="1700" dirty="0"/>
-          </a:p>
-        </p:txBody>
-      </p:sp>
-      <p:sp>
-        <p:nvSpPr>
-          <p:cNvPr id="19" name="Text 15"/>
-          <p:cNvSpPr txBox="1"/>
-          <p:nvPr/>
-        </p:nvSpPr>
-        <p:spPr>
-          <a:xfrm>
-            <a:off x="9985248" y="5925312"/>
-            <a:ext cx="1508760" cy="292608"/>
-          </a:xfrm>
-          <a:prstGeom prst="rect">
-            <a:avLst/>
-          </a:prstGeom>
-          <a:noFill/>
-          <a:ln/>
-        </p:spPr>
-        <p:txBody>
-          <a:bodyPr wrap="square" lIns="0" tIns="0" rIns="0" bIns="0" rtlCol="0" anchor="ctr"/>
-          <a:lstStyle/>
-          <a:p>
-            <a:pPr indent="0" marL="0">
-              <a:lnSpc>
-                <a:spcPts val="1200"/>
-              </a:lnSpc>
-              <a:buNone/>
-            </a:pPr>
-            <a:r>
-              <a:rPr lang="en-US" sz="1020" dirty="0">
-                <a:solidFill>
-                  <a:srgbClr val="6B7A90"/>
-                </a:solidFill>
-                <a:latin typeface="Calibri" pitchFamily="34" charset="0"/>
-                <a:ea typeface="Calibri" pitchFamily="34" charset="-122"/>
-                <a:cs typeface="Calibri" pitchFamily="34" charset="-120"/>
-              </a:rPr>
-              <a:t>automated tests</a:t>
-            </a:r>
-            <a:endParaRPr lang="en-US" sz="1020" dirty="0"/>
-          </a:p>
-        </p:txBody>
-      </p:sp>
-      <p:sp>
-        <p:nvSpPr>
-          <p:cNvPr id="20" name="Text 16"/>
+              <a:buNone/>
+            </a:pPr>
+            <a:r>
+              <a:rPr lang="en-US" sz="960" dirty="0">
+                <a:solidFill>
+                  <a:srgbClr val="AFC4E4"/>
+                </a:solidFill>
+                <a:latin typeface="Calibri" pitchFamily="34" charset="0"/>
+                <a:ea typeface="Calibri" pitchFamily="34" charset="-122"/>
+                <a:cs typeface="Calibri" pitchFamily="34" charset="-120"/>
+              </a:rPr>
+              <a:t>network calls</a:t>
+            </a:r>
+            <a:endParaRPr lang="en-US" sz="960" dirty="0"/>
+          </a:p>
+        </p:txBody>
+      </p:sp>
+      <p:sp>
+        <p:nvSpPr>
+          <p:cNvPr id="31" name="Text 28"/>
           <p:cNvSpPr txBox="1"/>
           <p:nvPr/>
         </p:nvSpPr>
@@ -4601,7 +5243,7 @@
       </p:sp>
       <p:sp>
         <p:nvSpPr>
-          <p:cNvPr id="21" name="Shape 17"/>
+          <p:cNvPr id="32" name="Shape 29"/>
           <p:cNvSpPr/>
           <p:nvPr/>
         </p:nvSpPr>
@@ -4624,7 +5266,7 @@
       </p:sp>
       <p:sp>
         <p:nvSpPr>
-          <p:cNvPr id="22" name="Text 18"/>
+          <p:cNvPr id="33" name="Text 30"/>
           <p:cNvSpPr txBox="1"/>
           <p:nvPr/>
         </p:nvSpPr>
@@ -6361,7 +7003,7 @@
                 <a:ea typeface="Calibri" pitchFamily="34" charset="-122"/>
                 <a:cs typeface="Calibri" pitchFamily="34" charset="-120"/>
               </a:rPr>
-              <a:t>Known limits</a:t>
+              <a:t>Known limits &amp; data gaps</a:t>
             </a:r>
             <a:endParaRPr lang="en-US" sz="1400" dirty="0"/>
           </a:p>
@@ -6430,7 +7072,7 @@
                 <a:ea typeface="Calibri" pitchFamily="34" charset="-122"/>
                 <a:cs typeface="Calibri" pitchFamily="34" charset="-120"/>
               </a:rPr>
-              <a:t>Single country per model</a:t>
+              <a:t>Single country per model — no multi-market roll-up yet</a:t>
             </a:r>
             <a:endParaRPr lang="en-US" sz="1140" dirty="0"/>
           </a:p>
@@ -6454,7 +7096,7 @@
                 <a:ea typeface="Calibri" pitchFamily="34" charset="-122"/>
                 <a:cs typeface="Calibri" pitchFamily="34" charset="-120"/>
               </a:rPr>
-              <a:t>Subgroups inherit parent parameters</a:t>
+              <a:t>Subgroups inherit parent parameters rather than their own</a:t>
             </a:r>
             <a:endParaRPr lang="en-US" sz="1140" dirty="0"/>
           </a:p>
@@ -6478,7 +7120,7 @@
                 <a:ea typeface="Calibri" pitchFamily="34" charset="-122"/>
                 <a:cs typeface="Calibri" pitchFamily="34" charset="-120"/>
               </a:rPr>
-              <a:t>Market share redistributes proportionally</a:t>
+              <a:t>Market share redistributes proportionally, not by displacement</a:t>
             </a:r>
             <a:endParaRPr lang="en-US" sz="1140" dirty="0"/>
           </a:p>
@@ -6526,7 +7168,31 @@
                 <a:ea typeface="Calibri" pitchFamily="34" charset="-122"/>
                 <a:cs typeface="Calibri" pitchFamily="34" charset="-120"/>
               </a:rPr>
-              <a:t>Demo values are illustrative, not sourced estimates</a:t>
+              <a:t>Data gap: no validated country cost set — demo values are illustrative</a:t>
+            </a:r>
+            <a:endParaRPr lang="en-US" sz="1140" dirty="0"/>
+          </a:p>
+          <a:p>
+            <a:pPr marL="177800" indent="-177800">
+              <a:lnSpc>
+                <a:spcPts val="1550"/>
+              </a:lnSpc>
+              <a:spcAft>
+                <a:spcPts val="600"/>
+              </a:spcAft>
+              <a:buSzPct val="100000"/>
+              <a:buChar char="•"/>
+            </a:pPr>
+            <a:r>
+              <a:rPr lang="en-US" sz="1140" dirty="0">
+                <a:solidFill>
+                  <a:srgbClr val="1B2431"/>
+                </a:solidFill>
+                <a:latin typeface="Calibri" pitchFamily="34" charset="0"/>
+                <a:ea typeface="Calibri" pitchFamily="34" charset="-122"/>
+                <a:cs typeface="Calibri" pitchFamily="34" charset="-120"/>
+              </a:rPr>
+              <a:t>Data gap: clinical parameters not yet expert-reviewed</a:t>
             </a:r>
             <a:endParaRPr lang="en-US" sz="1140" dirty="0"/>
           </a:p>
@@ -17979,14 +18645,41 @@
       </p:sp>
       <p:sp>
         <p:nvSpPr>
-          <p:cNvPr id="4" name="Text 2"/>
-          <p:cNvSpPr txBox="1"/>
-          <p:nvPr/>
-        </p:nvSpPr>
-        <p:spPr>
-          <a:xfrm>
-            <a:off x="713232" y="1572768"/>
-            <a:ext cx="8778240" cy="402336"/>
+          <p:cNvPr id="4" name="Shape 2"/>
+          <p:cNvSpPr/>
+          <p:nvPr/>
+        </p:nvSpPr>
+        <p:spPr>
+          <a:xfrm>
+            <a:off x="713232" y="1664208"/>
+            <a:ext cx="10844784" cy="1572768"/>
+          </a:xfrm>
+          <a:prstGeom prst="roundRect">
+            <a:avLst>
+              <a:gd name="adj" fmla="val 4651"/>
+            </a:avLst>
+          </a:prstGeom>
+          <a:solidFill>
+            <a:srgbClr val="F1F8FD"/>
+          </a:solidFill>
+          <a:ln w="12700">
+            <a:solidFill>
+              <a:srgbClr val="DCEDF8"/>
+            </a:solidFill>
+            <a:prstDash val="solid"/>
+          </a:ln>
+        </p:spPr>
+      </p:sp>
+      <p:sp>
+        <p:nvSpPr>
+          <p:cNvPr id="5" name="Text 3"/>
+          <p:cNvSpPr txBox="1"/>
+          <p:nvPr/>
+        </p:nvSpPr>
+        <p:spPr>
+          <a:xfrm>
+            <a:off x="896112" y="1755648"/>
+            <a:ext cx="8229600" cy="219456"/>
           </a:xfrm>
           <a:prstGeom prst="rect">
             <a:avLst/>
@@ -17999,13 +18692,10 @@
           <a:lstStyle/>
           <a:p>
             <a:pPr indent="0" marL="0">
-              <a:lnSpc>
-                <a:spcPts val="1900"/>
-              </a:lnSpc>
-              <a:buNone/>
-            </a:pPr>
-            <a:r>
-              <a:rPr lang="en-US" sz="1400" dirty="0">
+              <a:buNone/>
+            </a:pPr>
+            <a:r>
+              <a:rPr lang="en-US" sz="960" b="1" spc="110" kern="0" dirty="0">
                 <a:solidFill>
                   <a:srgbClr val="6B7A90"/>
                 </a:solidFill>
@@ -18013,46 +18703,673 @@
                 <a:ea typeface="Calibri" pitchFamily="34" charset="-122"/>
                 <a:cs typeface="Calibri" pitchFamily="34" charset="-120"/>
               </a:rPr>
-              <a:t>The calculation runs entirely in the browser. The server exists for the things a browser cannot do: reach third-party APIs, hold a key, and persist.</a:t>
-            </a:r>
-            <a:endParaRPr lang="en-US" sz="1400" dirty="0"/>
-          </a:p>
-        </p:txBody>
-      </p:sp>
-      <p:pic>
-        <p:nvPicPr>
-          <p:cNvPr id="5" name="Image 0" descr="/tmp/claude-0/-home-user-early-stage-bia-react-node-postgres/3c107fb9-fcab-5237-a1e7-c2f6f328748c/scratchpad/dgm-01-system-architecture.png">    </p:cNvPr>
-          <p:cNvPicPr>
-            <a:picLocks noChangeAspect="1"/>
-          </p:cNvPicPr>
-          <p:nvPr/>
-        </p:nvPicPr>
-        <p:blipFill>
-          <a:blip r:embed="rId1"/>
-          <a:stretch>
-            <a:fillRect/>
-          </a:stretch>
-        </p:blipFill>
-        <p:spPr>
-          <a:xfrm>
-            <a:off x="713232" y="2194560"/>
-            <a:ext cx="7589520" cy="3033979"/>
-          </a:xfrm>
-          <a:prstGeom prst="rect">
-            <a:avLst/>
-          </a:prstGeom>
-        </p:spPr>
-      </p:pic>
-      <p:sp>
-        <p:nvSpPr>
-          <p:cNvPr id="6" name="Text 3"/>
-          <p:cNvSpPr txBox="1"/>
-          <p:nvPr/>
-        </p:nvSpPr>
-        <p:spPr>
-          <a:xfrm>
-            <a:off x="8686800" y="2231136"/>
-            <a:ext cx="2788920" cy="274320"/>
+              <a:t>BROWSER  ·  REACT SPA — THE MODEL RUNS HERE, WITH NO NETWORK CALL</a:t>
+            </a:r>
+            <a:endParaRPr lang="en-US" sz="960" dirty="0"/>
+          </a:p>
+        </p:txBody>
+      </p:sp>
+      <p:sp>
+        <p:nvSpPr>
+          <p:cNvPr id="6" name="Shape 4"/>
+          <p:cNvSpPr/>
+          <p:nvPr/>
+        </p:nvSpPr>
+        <p:spPr>
+          <a:xfrm>
+            <a:off x="804672" y="1956816"/>
+            <a:ext cx="2487168" cy="585216"/>
+          </a:xfrm>
+          <a:prstGeom prst="roundRect">
+            <a:avLst>
+              <a:gd name="adj" fmla="val 9375"/>
+            </a:avLst>
+          </a:prstGeom>
+          <a:solidFill>
+            <a:srgbClr val="DCEDF8"/>
+          </a:solidFill>
+          <a:ln w="13970">
+            <a:solidFill>
+              <a:srgbClr val="9FD9F0"/>
+            </a:solidFill>
+            <a:prstDash val="solid"/>
+          </a:ln>
+        </p:spPr>
+      </p:sp>
+      <p:sp>
+        <p:nvSpPr>
+          <p:cNvPr id="7" name="Text 5"/>
+          <p:cNvSpPr txBox="1"/>
+          <p:nvPr/>
+        </p:nvSpPr>
+        <p:spPr>
+          <a:xfrm>
+            <a:off x="914400" y="2048256"/>
+            <a:ext cx="2267712" cy="256032"/>
+          </a:xfrm>
+          <a:prstGeom prst="rect">
+            <a:avLst/>
+          </a:prstGeom>
+          <a:noFill/>
+          <a:ln/>
+        </p:spPr>
+        <p:txBody>
+          <a:bodyPr wrap="square" lIns="0" tIns="0" rIns="0" bIns="0" rtlCol="0" anchor="ctr"/>
+          <a:lstStyle/>
+          <a:p>
+            <a:pPr algn="ctr" indent="0" marL="0">
+              <a:buNone/>
+            </a:pPr>
+            <a:r>
+              <a:rPr lang="en-US" sz="1240" b="1" dirty="0">
+                <a:solidFill>
+                  <a:srgbClr val="12235B"/>
+                </a:solidFill>
+                <a:latin typeface="Calibri" pitchFamily="34" charset="0"/>
+                <a:ea typeface="Calibri" pitchFamily="34" charset="-122"/>
+                <a:cs typeface="Calibri" pitchFamily="34" charset="-120"/>
+              </a:rPr>
+              <a:t>Input tabs</a:t>
+            </a:r>
+            <a:endParaRPr lang="en-US" sz="1240" dirty="0"/>
+          </a:p>
+        </p:txBody>
+      </p:sp>
+      <p:sp>
+        <p:nvSpPr>
+          <p:cNvPr id="8" name="Text 6"/>
+          <p:cNvSpPr txBox="1"/>
+          <p:nvPr/>
+        </p:nvSpPr>
+        <p:spPr>
+          <a:xfrm>
+            <a:off x="896112" y="2286000"/>
+            <a:ext cx="2304288" cy="201168"/>
+          </a:xfrm>
+          <a:prstGeom prst="rect">
+            <a:avLst/>
+          </a:prstGeom>
+          <a:noFill/>
+          <a:ln/>
+        </p:spPr>
+        <p:txBody>
+          <a:bodyPr wrap="square" lIns="0" tIns="0" rIns="0" bIns="0" rtlCol="0" anchor="ctr"/>
+          <a:lstStyle/>
+          <a:p>
+            <a:pPr algn="ctr" indent="0" marL="0">
+              <a:buNone/>
+            </a:pPr>
+            <a:r>
+              <a:rPr lang="en-US" sz="940" dirty="0">
+                <a:solidFill>
+                  <a:srgbClr val="6B7A90"/>
+                </a:solidFill>
+                <a:latin typeface="Calibri" pitchFamily="34" charset="0"/>
+                <a:ea typeface="Calibri" pitchFamily="34" charset="-122"/>
+                <a:cs typeface="Calibri" pitchFamily="34" charset="-120"/>
+              </a:rPr>
+              <a:t>6 guided steps</a:t>
+            </a:r>
+            <a:endParaRPr lang="en-US" sz="940" dirty="0"/>
+          </a:p>
+        </p:txBody>
+      </p:sp>
+      <p:sp>
+        <p:nvSpPr>
+          <p:cNvPr id="9" name="Shape 7"/>
+          <p:cNvSpPr/>
+          <p:nvPr/>
+        </p:nvSpPr>
+        <p:spPr>
+          <a:xfrm>
+            <a:off x="3566160" y="1956816"/>
+            <a:ext cx="2487168" cy="585216"/>
+          </a:xfrm>
+          <a:prstGeom prst="roundRect">
+            <a:avLst>
+              <a:gd name="adj" fmla="val 9375"/>
+            </a:avLst>
+          </a:prstGeom>
+          <a:solidFill>
+            <a:srgbClr val="4FC3E8"/>
+          </a:solidFill>
+          <a:ln w="13970">
+            <a:solidFill>
+              <a:srgbClr val="4FC3E8"/>
+            </a:solidFill>
+            <a:prstDash val="solid"/>
+          </a:ln>
+        </p:spPr>
+      </p:sp>
+      <p:sp>
+        <p:nvSpPr>
+          <p:cNvPr id="10" name="Text 8"/>
+          <p:cNvSpPr txBox="1"/>
+          <p:nvPr/>
+        </p:nvSpPr>
+        <p:spPr>
+          <a:xfrm>
+            <a:off x="3675888" y="2048256"/>
+            <a:ext cx="2267712" cy="256032"/>
+          </a:xfrm>
+          <a:prstGeom prst="rect">
+            <a:avLst/>
+          </a:prstGeom>
+          <a:noFill/>
+          <a:ln/>
+        </p:spPr>
+        <p:txBody>
+          <a:bodyPr wrap="square" lIns="0" tIns="0" rIns="0" bIns="0" rtlCol="0" anchor="ctr"/>
+          <a:lstStyle/>
+          <a:p>
+            <a:pPr algn="ctr" indent="0" marL="0">
+              <a:buNone/>
+            </a:pPr>
+            <a:r>
+              <a:rPr lang="en-US" sz="1240" b="1" dirty="0">
+                <a:solidFill>
+                  <a:srgbClr val="FFFFFF"/>
+                </a:solidFill>
+                <a:latin typeface="Calibri" pitchFamily="34" charset="0"/>
+                <a:ea typeface="Calibri" pitchFamily="34" charset="-122"/>
+                <a:cs typeface="Calibri" pitchFamily="34" charset="-120"/>
+              </a:rPr>
+              <a:t>Calculation engine</a:t>
+            </a:r>
+            <a:endParaRPr lang="en-US" sz="1240" dirty="0"/>
+          </a:p>
+        </p:txBody>
+      </p:sp>
+      <p:sp>
+        <p:nvSpPr>
+          <p:cNvPr id="11" name="Text 9"/>
+          <p:cNvSpPr txBox="1"/>
+          <p:nvPr/>
+        </p:nvSpPr>
+        <p:spPr>
+          <a:xfrm>
+            <a:off x="3657600" y="2286000"/>
+            <a:ext cx="2304288" cy="201168"/>
+          </a:xfrm>
+          <a:prstGeom prst="rect">
+            <a:avLst/>
+          </a:prstGeom>
+          <a:noFill/>
+          <a:ln/>
+        </p:spPr>
+        <p:txBody>
+          <a:bodyPr wrap="square" lIns="0" tIns="0" rIns="0" bIns="0" rtlCol="0" anchor="ctr"/>
+          <a:lstStyle/>
+          <a:p>
+            <a:pPr algn="ctr" indent="0" marL="0">
+              <a:buNone/>
+            </a:pPr>
+            <a:r>
+              <a:rPr lang="en-US" sz="940" dirty="0">
+                <a:solidFill>
+                  <a:srgbClr val="6B7A90"/>
+                </a:solidFill>
+                <a:latin typeface="Calibri" pitchFamily="34" charset="0"/>
+                <a:ea typeface="Calibri" pitchFamily="34" charset="-122"/>
+                <a:cs typeface="Calibri" pitchFamily="34" charset="-120"/>
+              </a:rPr>
+              <a:t>biaEngine.js · 11 functions</a:t>
+            </a:r>
+            <a:endParaRPr lang="en-US" sz="940" dirty="0"/>
+          </a:p>
+        </p:txBody>
+      </p:sp>
+      <p:sp>
+        <p:nvSpPr>
+          <p:cNvPr id="12" name="Shape 10"/>
+          <p:cNvSpPr/>
+          <p:nvPr/>
+        </p:nvSpPr>
+        <p:spPr>
+          <a:xfrm>
+            <a:off x="6327648" y="1956816"/>
+            <a:ext cx="2487168" cy="585216"/>
+          </a:xfrm>
+          <a:prstGeom prst="roundRect">
+            <a:avLst>
+              <a:gd name="adj" fmla="val 9375"/>
+            </a:avLst>
+          </a:prstGeom>
+          <a:solidFill>
+            <a:srgbClr val="DCEDF8"/>
+          </a:solidFill>
+          <a:ln w="13970">
+            <a:solidFill>
+              <a:srgbClr val="9FD9F0"/>
+            </a:solidFill>
+            <a:prstDash val="solid"/>
+          </a:ln>
+        </p:spPr>
+      </p:sp>
+      <p:sp>
+        <p:nvSpPr>
+          <p:cNvPr id="13" name="Text 11"/>
+          <p:cNvSpPr txBox="1"/>
+          <p:nvPr/>
+        </p:nvSpPr>
+        <p:spPr>
+          <a:xfrm>
+            <a:off x="6437376" y="2048256"/>
+            <a:ext cx="2267712" cy="256032"/>
+          </a:xfrm>
+          <a:prstGeom prst="rect">
+            <a:avLst/>
+          </a:prstGeom>
+          <a:noFill/>
+          <a:ln/>
+        </p:spPr>
+        <p:txBody>
+          <a:bodyPr wrap="square" lIns="0" tIns="0" rIns="0" bIns="0" rtlCol="0" anchor="ctr"/>
+          <a:lstStyle/>
+          <a:p>
+            <a:pPr algn="ctr" indent="0" marL="0">
+              <a:buNone/>
+            </a:pPr>
+            <a:r>
+              <a:rPr lang="en-US" sz="1240" b="1" dirty="0">
+                <a:solidFill>
+                  <a:srgbClr val="12235B"/>
+                </a:solidFill>
+                <a:latin typeface="Calibri" pitchFamily="34" charset="0"/>
+                <a:ea typeface="Calibri" pitchFamily="34" charset="-122"/>
+                <a:cs typeface="Calibri" pitchFamily="34" charset="-120"/>
+              </a:rPr>
+              <a:t>Results</a:t>
+            </a:r>
+            <a:endParaRPr lang="en-US" sz="1240" dirty="0"/>
+          </a:p>
+        </p:txBody>
+      </p:sp>
+      <p:sp>
+        <p:nvSpPr>
+          <p:cNvPr id="14" name="Text 12"/>
+          <p:cNvSpPr txBox="1"/>
+          <p:nvPr/>
+        </p:nvSpPr>
+        <p:spPr>
+          <a:xfrm>
+            <a:off x="6419088" y="2286000"/>
+            <a:ext cx="2304288" cy="201168"/>
+          </a:xfrm>
+          <a:prstGeom prst="rect">
+            <a:avLst/>
+          </a:prstGeom>
+          <a:noFill/>
+          <a:ln/>
+        </p:spPr>
+        <p:txBody>
+          <a:bodyPr wrap="square" lIns="0" tIns="0" rIns="0" bIns="0" rtlCol="0" anchor="ctr"/>
+          <a:lstStyle/>
+          <a:p>
+            <a:pPr algn="ctr" indent="0" marL="0">
+              <a:buNone/>
+            </a:pPr>
+            <a:r>
+              <a:rPr lang="en-US" sz="940" dirty="0">
+                <a:solidFill>
+                  <a:srgbClr val="6B7A90"/>
+                </a:solidFill>
+                <a:latin typeface="Calibri" pitchFamily="34" charset="0"/>
+                <a:ea typeface="Calibri" pitchFamily="34" charset="-122"/>
+                <a:cs typeface="Calibri" pitchFamily="34" charset="-120"/>
+              </a:rPr>
+              <a:t>7 views</a:t>
+            </a:r>
+            <a:endParaRPr lang="en-US" sz="940" dirty="0"/>
+          </a:p>
+        </p:txBody>
+      </p:sp>
+      <p:sp>
+        <p:nvSpPr>
+          <p:cNvPr id="15" name="Shape 13"/>
+          <p:cNvSpPr/>
+          <p:nvPr/>
+        </p:nvSpPr>
+        <p:spPr>
+          <a:xfrm>
+            <a:off x="9089136" y="1956816"/>
+            <a:ext cx="2487168" cy="585216"/>
+          </a:xfrm>
+          <a:prstGeom prst="roundRect">
+            <a:avLst>
+              <a:gd name="adj" fmla="val 9375"/>
+            </a:avLst>
+          </a:prstGeom>
+          <a:solidFill>
+            <a:srgbClr val="DCEDF8"/>
+          </a:solidFill>
+          <a:ln w="13970">
+            <a:solidFill>
+              <a:srgbClr val="9FD9F0"/>
+            </a:solidFill>
+            <a:prstDash val="solid"/>
+          </a:ln>
+        </p:spPr>
+      </p:sp>
+      <p:sp>
+        <p:nvSpPr>
+          <p:cNvPr id="16" name="Text 14"/>
+          <p:cNvSpPr txBox="1"/>
+          <p:nvPr/>
+        </p:nvSpPr>
+        <p:spPr>
+          <a:xfrm>
+            <a:off x="9198864" y="2048256"/>
+            <a:ext cx="2267712" cy="256032"/>
+          </a:xfrm>
+          <a:prstGeom prst="rect">
+            <a:avLst/>
+          </a:prstGeom>
+          <a:noFill/>
+          <a:ln/>
+        </p:spPr>
+        <p:txBody>
+          <a:bodyPr wrap="square" lIns="0" tIns="0" rIns="0" bIns="0" rtlCol="0" anchor="ctr"/>
+          <a:lstStyle/>
+          <a:p>
+            <a:pPr algn="ctr" indent="0" marL="0">
+              <a:buNone/>
+            </a:pPr>
+            <a:r>
+              <a:rPr lang="en-US" sz="1240" b="1" dirty="0">
+                <a:solidFill>
+                  <a:srgbClr val="12235B"/>
+                </a:solidFill>
+                <a:latin typeface="Calibri" pitchFamily="34" charset="0"/>
+                <a:ea typeface="Calibri" pitchFamily="34" charset="-122"/>
+                <a:cs typeface="Calibri" pitchFamily="34" charset="-120"/>
+              </a:rPr>
+              <a:t>Exports</a:t>
+            </a:r>
+            <a:endParaRPr lang="en-US" sz="1240" dirty="0"/>
+          </a:p>
+        </p:txBody>
+      </p:sp>
+      <p:sp>
+        <p:nvSpPr>
+          <p:cNvPr id="17" name="Text 15"/>
+          <p:cNvSpPr txBox="1"/>
+          <p:nvPr/>
+        </p:nvSpPr>
+        <p:spPr>
+          <a:xfrm>
+            <a:off x="9180576" y="2286000"/>
+            <a:ext cx="2304288" cy="201168"/>
+          </a:xfrm>
+          <a:prstGeom prst="rect">
+            <a:avLst/>
+          </a:prstGeom>
+          <a:noFill/>
+          <a:ln/>
+        </p:spPr>
+        <p:txBody>
+          <a:bodyPr wrap="square" lIns="0" tIns="0" rIns="0" bIns="0" rtlCol="0" anchor="ctr"/>
+          <a:lstStyle/>
+          <a:p>
+            <a:pPr algn="ctr" indent="0" marL="0">
+              <a:buNone/>
+            </a:pPr>
+            <a:r>
+              <a:rPr lang="en-US" sz="940" dirty="0">
+                <a:solidFill>
+                  <a:srgbClr val="6B7A90"/>
+                </a:solidFill>
+                <a:latin typeface="Calibri" pitchFamily="34" charset="0"/>
+                <a:ea typeface="Calibri" pitchFamily="34" charset="-122"/>
+                <a:cs typeface="Calibri" pitchFamily="34" charset="-120"/>
+              </a:rPr>
+              <a:t>PDF · Excel</a:t>
+            </a:r>
+            <a:endParaRPr lang="en-US" sz="940" dirty="0"/>
+          </a:p>
+        </p:txBody>
+      </p:sp>
+      <p:sp>
+        <p:nvSpPr>
+          <p:cNvPr id="18" name="Shape 16"/>
+          <p:cNvSpPr/>
+          <p:nvPr/>
+        </p:nvSpPr>
+        <p:spPr>
+          <a:xfrm>
+            <a:off x="3291840" y="2249424"/>
+            <a:ext cx="274320" cy="0"/>
+          </a:xfrm>
+          <a:prstGeom prst="line">
+            <a:avLst/>
+          </a:prstGeom>
+          <a:noFill/>
+          <a:ln w="19050">
+            <a:solidFill>
+              <a:srgbClr val="4A63C8"/>
+            </a:solidFill>
+            <a:prstDash val="solid"/>
+            <a:tailEnd type="triangle"/>
+          </a:ln>
+        </p:spPr>
+      </p:sp>
+      <p:sp>
+        <p:nvSpPr>
+          <p:cNvPr id="19" name="Shape 17"/>
+          <p:cNvSpPr/>
+          <p:nvPr/>
+        </p:nvSpPr>
+        <p:spPr>
+          <a:xfrm>
+            <a:off x="6053328" y="2249424"/>
+            <a:ext cx="274320" cy="0"/>
+          </a:xfrm>
+          <a:prstGeom prst="line">
+            <a:avLst/>
+          </a:prstGeom>
+          <a:noFill/>
+          <a:ln w="19050">
+            <a:solidFill>
+              <a:srgbClr val="4A63C8"/>
+            </a:solidFill>
+            <a:prstDash val="solid"/>
+            <a:tailEnd type="triangle"/>
+          </a:ln>
+        </p:spPr>
+      </p:sp>
+      <p:sp>
+        <p:nvSpPr>
+          <p:cNvPr id="20" name="Shape 18"/>
+          <p:cNvSpPr/>
+          <p:nvPr/>
+        </p:nvSpPr>
+        <p:spPr>
+          <a:xfrm>
+            <a:off x="8814816" y="2249424"/>
+            <a:ext cx="274320" cy="0"/>
+          </a:xfrm>
+          <a:prstGeom prst="line">
+            <a:avLst/>
+          </a:prstGeom>
+          <a:noFill/>
+          <a:ln w="19050">
+            <a:solidFill>
+              <a:srgbClr val="4A63C8"/>
+            </a:solidFill>
+            <a:prstDash val="solid"/>
+            <a:tailEnd type="triangle"/>
+          </a:ln>
+        </p:spPr>
+      </p:sp>
+      <p:sp>
+        <p:nvSpPr>
+          <p:cNvPr id="21" name="Shape 19"/>
+          <p:cNvSpPr/>
+          <p:nvPr/>
+        </p:nvSpPr>
+        <p:spPr>
+          <a:xfrm>
+            <a:off x="804672" y="2670048"/>
+            <a:ext cx="2487168" cy="585216"/>
+          </a:xfrm>
+          <a:prstGeom prst="roundRect">
+            <a:avLst>
+              <a:gd name="adj" fmla="val 9375"/>
+            </a:avLst>
+          </a:prstGeom>
+          <a:solidFill>
+            <a:srgbClr val="FFFFFF"/>
+          </a:solidFill>
+          <a:ln w="13970">
+            <a:solidFill>
+              <a:srgbClr val="DCEDF8"/>
+            </a:solidFill>
+            <a:prstDash val="solid"/>
+          </a:ln>
+        </p:spPr>
+      </p:sp>
+      <p:sp>
+        <p:nvSpPr>
+          <p:cNvPr id="22" name="Text 20"/>
+          <p:cNvSpPr txBox="1"/>
+          <p:nvPr/>
+        </p:nvSpPr>
+        <p:spPr>
+          <a:xfrm>
+            <a:off x="914400" y="2843784"/>
+            <a:ext cx="2267712" cy="256032"/>
+          </a:xfrm>
+          <a:prstGeom prst="rect">
+            <a:avLst/>
+          </a:prstGeom>
+          <a:noFill/>
+          <a:ln/>
+        </p:spPr>
+        <p:txBody>
+          <a:bodyPr wrap="square" lIns="0" tIns="0" rIns="0" bIns="0" rtlCol="0" anchor="ctr"/>
+          <a:lstStyle/>
+          <a:p>
+            <a:pPr algn="ctr" indent="0" marL="0">
+              <a:buNone/>
+            </a:pPr>
+            <a:r>
+              <a:rPr lang="en-US" sz="1240" b="1" dirty="0">
+                <a:solidFill>
+                  <a:srgbClr val="12235B"/>
+                </a:solidFill>
+                <a:latin typeface="Calibri" pitchFamily="34" charset="0"/>
+                <a:ea typeface="Calibri" pitchFamily="34" charset="-122"/>
+                <a:cs typeface="Calibri" pitchFamily="34" charset="-120"/>
+              </a:rPr>
+              <a:t>sessionStorage</a:t>
+            </a:r>
+            <a:endParaRPr lang="en-US" sz="1240" dirty="0"/>
+          </a:p>
+        </p:txBody>
+      </p:sp>
+      <p:sp>
+        <p:nvSpPr>
+          <p:cNvPr id="23" name="Shape 21"/>
+          <p:cNvSpPr/>
+          <p:nvPr/>
+        </p:nvSpPr>
+        <p:spPr>
+          <a:xfrm>
+            <a:off x="9089136" y="2670048"/>
+            <a:ext cx="2487168" cy="585216"/>
+          </a:xfrm>
+          <a:prstGeom prst="roundRect">
+            <a:avLst>
+              <a:gd name="adj" fmla="val 9375"/>
+            </a:avLst>
+          </a:prstGeom>
+          <a:solidFill>
+            <a:srgbClr val="FFFFFF"/>
+          </a:solidFill>
+          <a:ln w="13970">
+            <a:solidFill>
+              <a:srgbClr val="DCEDF8"/>
+            </a:solidFill>
+            <a:prstDash val="solid"/>
+          </a:ln>
+        </p:spPr>
+      </p:sp>
+      <p:sp>
+        <p:nvSpPr>
+          <p:cNvPr id="24" name="Text 22"/>
+          <p:cNvSpPr txBox="1"/>
+          <p:nvPr/>
+        </p:nvSpPr>
+        <p:spPr>
+          <a:xfrm>
+            <a:off x="9198864" y="2843784"/>
+            <a:ext cx="2267712" cy="256032"/>
+          </a:xfrm>
+          <a:prstGeom prst="rect">
+            <a:avLst/>
+          </a:prstGeom>
+          <a:noFill/>
+          <a:ln/>
+        </p:spPr>
+        <p:txBody>
+          <a:bodyPr wrap="square" lIns="0" tIns="0" rIns="0" bIns="0" rtlCol="0" anchor="ctr"/>
+          <a:lstStyle/>
+          <a:p>
+            <a:pPr algn="ctr" indent="0" marL="0">
+              <a:buNone/>
+            </a:pPr>
+            <a:r>
+              <a:rPr lang="en-US" sz="1240" b="1" dirty="0">
+                <a:solidFill>
+                  <a:srgbClr val="12235B"/>
+                </a:solidFill>
+                <a:latin typeface="Calibri" pitchFamily="34" charset="0"/>
+                <a:ea typeface="Calibri" pitchFamily="34" charset="-122"/>
+                <a:cs typeface="Calibri" pitchFamily="34" charset="-120"/>
+              </a:rPr>
+              <a:t>EviTrack UI</a:t>
+            </a:r>
+            <a:endParaRPr lang="en-US" sz="1240" dirty="0"/>
+          </a:p>
+        </p:txBody>
+      </p:sp>
+      <p:sp>
+        <p:nvSpPr>
+          <p:cNvPr id="25" name="Shape 23"/>
+          <p:cNvSpPr/>
+          <p:nvPr/>
+        </p:nvSpPr>
+        <p:spPr>
+          <a:xfrm>
+            <a:off x="713232" y="3584448"/>
+            <a:ext cx="10844784" cy="1170432"/>
+          </a:xfrm>
+          <a:prstGeom prst="roundRect">
+            <a:avLst>
+              <a:gd name="adj" fmla="val 6250"/>
+            </a:avLst>
+          </a:prstGeom>
+          <a:solidFill>
+            <a:srgbClr val="F1F8FD"/>
+          </a:solidFill>
+          <a:ln w="12700">
+            <a:solidFill>
+              <a:srgbClr val="DCEDF8"/>
+            </a:solidFill>
+            <a:prstDash val="solid"/>
+          </a:ln>
+        </p:spPr>
+      </p:sp>
+      <p:sp>
+        <p:nvSpPr>
+          <p:cNvPr id="26" name="Text 24"/>
+          <p:cNvSpPr txBox="1"/>
+          <p:nvPr/>
+        </p:nvSpPr>
+        <p:spPr>
+          <a:xfrm>
+            <a:off x="896112" y="3675888"/>
+            <a:ext cx="8229600" cy="219456"/>
           </a:xfrm>
           <a:prstGeom prst="rect">
             <a:avLst/>
@@ -18068,7 +19385,73 @@
               <a:buNone/>
             </a:pPr>
             <a:r>
-              <a:rPr lang="en-US" sz="1400" b="1" dirty="0">
+              <a:rPr lang="en-US" sz="960" b="1" spc="110" kern="0" dirty="0">
+                <a:solidFill>
+                  <a:srgbClr val="6B7A90"/>
+                </a:solidFill>
+                <a:latin typeface="Calibri" pitchFamily="34" charset="0"/>
+                <a:ea typeface="Calibri" pitchFamily="34" charset="-122"/>
+                <a:cs typeface="Calibri" pitchFamily="34" charset="-120"/>
+              </a:rPr>
+              <a:t>RENDER WEB SERVICE  ·  EXPRESS — ONE ORIGIN, NO CALCULATION</a:t>
+            </a:r>
+            <a:endParaRPr lang="en-US" sz="960" dirty="0"/>
+          </a:p>
+        </p:txBody>
+      </p:sp>
+      <p:sp>
+        <p:nvSpPr>
+          <p:cNvPr id="27" name="Shape 25"/>
+          <p:cNvSpPr/>
+          <p:nvPr/>
+        </p:nvSpPr>
+        <p:spPr>
+          <a:xfrm>
+            <a:off x="804672" y="3895344"/>
+            <a:ext cx="2487168" cy="585216"/>
+          </a:xfrm>
+          <a:prstGeom prst="roundRect">
+            <a:avLst>
+              <a:gd name="adj" fmla="val 9375"/>
+            </a:avLst>
+          </a:prstGeom>
+          <a:solidFill>
+            <a:srgbClr val="FFFFFF"/>
+          </a:solidFill>
+          <a:ln w="13970">
+            <a:solidFill>
+              <a:srgbClr val="DCEDF8"/>
+            </a:solidFill>
+            <a:prstDash val="solid"/>
+          </a:ln>
+        </p:spPr>
+      </p:sp>
+      <p:sp>
+        <p:nvSpPr>
+          <p:cNvPr id="28" name="Text 26"/>
+          <p:cNvSpPr txBox="1"/>
+          <p:nvPr/>
+        </p:nvSpPr>
+        <p:spPr>
+          <a:xfrm>
+            <a:off x="914400" y="3986784"/>
+            <a:ext cx="2267712" cy="256032"/>
+          </a:xfrm>
+          <a:prstGeom prst="rect">
+            <a:avLst/>
+          </a:prstGeom>
+          <a:noFill/>
+          <a:ln/>
+        </p:spPr>
+        <p:txBody>
+          <a:bodyPr wrap="square" lIns="0" tIns="0" rIns="0" bIns="0" rtlCol="0" anchor="ctr"/>
+          <a:lstStyle/>
+          <a:p>
+            <a:pPr algn="ctr" indent="0" marL="0">
+              <a:buNone/>
+            </a:pPr>
+            <a:r>
+              <a:rPr lang="en-US" sz="1240" b="1" dirty="0">
                 <a:solidFill>
                   <a:srgbClr val="12235B"/>
                 </a:solidFill>
@@ -18076,140 +19459,400 @@
                 <a:ea typeface="Calibri" pitchFamily="34" charset="-122"/>
                 <a:cs typeface="Calibri" pitchFamily="34" charset="-120"/>
               </a:rPr>
-              <a:t>Core components</a:t>
-            </a:r>
-            <a:endParaRPr lang="en-US" sz="1400" dirty="0"/>
-          </a:p>
-        </p:txBody>
-      </p:sp>
-      <p:sp>
-        <p:nvSpPr>
-          <p:cNvPr id="7" name="Text 4"/>
-          <p:cNvSpPr txBox="1"/>
-          <p:nvPr/>
-        </p:nvSpPr>
-        <p:spPr>
-          <a:xfrm>
-            <a:off x="8686800" y="2578608"/>
-            <a:ext cx="2788920" cy="1417320"/>
-          </a:xfrm>
-          <a:prstGeom prst="rect">
-            <a:avLst/>
-          </a:prstGeom>
-          <a:noFill/>
-          <a:ln/>
-        </p:spPr>
-        <p:txBody>
-          <a:bodyPr wrap="square" lIns="0" tIns="0" rIns="0" bIns="0" rtlCol="0" anchor="t"/>
-          <a:lstStyle/>
-          <a:p>
-            <a:pPr marL="177800" indent="-177800">
-              <a:lnSpc>
-                <a:spcPts val="1523"/>
-              </a:lnSpc>
-              <a:spcAft>
-                <a:spcPts val="600"/>
-              </a:spcAft>
-              <a:buSzPct val="100000"/>
-              <a:buChar char="•"/>
-            </a:pPr>
-            <a:r>
-              <a:rPr lang="en-US" sz="1120" dirty="0">
-                <a:solidFill>
-                  <a:srgbClr val="1B2431"/>
-                </a:solidFill>
-                <a:latin typeface="Calibri" pitchFamily="34" charset="0"/>
-                <a:ea typeface="Calibri" pitchFamily="34" charset="-122"/>
-                <a:cs typeface="Calibri" pitchFamily="34" charset="-120"/>
-              </a:rPr>
-              <a:t>Calculation engine — one module, 11 pure functions</a:t>
-            </a:r>
-            <a:endParaRPr lang="en-US" sz="1120" dirty="0"/>
-          </a:p>
-          <a:p>
-            <a:pPr marL="177800" indent="-177800">
-              <a:lnSpc>
-                <a:spcPts val="1523"/>
-              </a:lnSpc>
-              <a:spcAft>
-                <a:spcPts val="600"/>
-              </a:spcAft>
-              <a:buSzPct val="100000"/>
-              <a:buChar char="•"/>
-            </a:pPr>
-            <a:r>
-              <a:rPr lang="en-US" sz="1120" dirty="0">
-                <a:solidFill>
-                  <a:srgbClr val="1B2431"/>
-                </a:solidFill>
-                <a:latin typeface="Calibri" pitchFamily="34" charset="0"/>
-                <a:ea typeface="Calibri" pitchFamily="34" charset="-122"/>
-                <a:cs typeface="Calibri" pitchFamily="34" charset="-120"/>
-              </a:rPr>
-              <a:t>React SPA — 6 input tabs, 7 result views</a:t>
-            </a:r>
-            <a:endParaRPr lang="en-US" sz="1120" dirty="0"/>
-          </a:p>
-          <a:p>
-            <a:pPr marL="177800" indent="-177800">
-              <a:lnSpc>
-                <a:spcPts val="1523"/>
-              </a:lnSpc>
-              <a:spcAft>
-                <a:spcPts val="600"/>
-              </a:spcAft>
-              <a:buSzPct val="100000"/>
-              <a:buChar char="•"/>
-            </a:pPr>
-            <a:r>
-              <a:rPr lang="en-US" sz="1120" dirty="0">
-                <a:solidFill>
-                  <a:srgbClr val="1B2431"/>
-                </a:solidFill>
-                <a:latin typeface="Calibri" pitchFamily="34" charset="0"/>
-                <a:ea typeface="Calibri" pitchFamily="34" charset="-122"/>
-                <a:cs typeface="Calibri" pitchFamily="34" charset="-120"/>
-              </a:rPr>
-              <a:t>Express API — evidence, LLM proxy, persistence</a:t>
-            </a:r>
-            <a:endParaRPr lang="en-US" sz="1120" dirty="0"/>
-          </a:p>
-          <a:p>
-            <a:pPr marL="177800" indent="-177800">
-              <a:lnSpc>
-                <a:spcPts val="1523"/>
-              </a:lnSpc>
-              <a:spcAft>
-                <a:spcPts val="600"/>
-              </a:spcAft>
-              <a:buSzPct val="100000"/>
-              <a:buChar char="•"/>
-            </a:pPr>
-            <a:r>
-              <a:rPr lang="en-US" sz="1120" dirty="0">
-                <a:solidFill>
-                  <a:srgbClr val="1B2431"/>
-                </a:solidFill>
-                <a:latin typeface="Calibri" pitchFamily="34" charset="0"/>
-                <a:ea typeface="Calibri" pitchFamily="34" charset="-122"/>
-                <a:cs typeface="Calibri" pitchFamily="34" charset="-120"/>
-              </a:rPr>
-              <a:t>EviTrack — 5 source adapters behind one registry</a:t>
-            </a:r>
-            <a:endParaRPr lang="en-US" sz="1120" dirty="0"/>
-          </a:p>
-        </p:txBody>
-      </p:sp>
-      <p:sp>
-        <p:nvSpPr>
-          <p:cNvPr id="8" name="Text 5"/>
-          <p:cNvSpPr txBox="1"/>
-          <p:nvPr/>
-        </p:nvSpPr>
-        <p:spPr>
-          <a:xfrm>
-            <a:off x="8686800" y="4114800"/>
-            <a:ext cx="2788920" cy="274320"/>
+              <a:t>Static host</a:t>
+            </a:r>
+            <a:endParaRPr lang="en-US" sz="1240" dirty="0"/>
+          </a:p>
+        </p:txBody>
+      </p:sp>
+      <p:sp>
+        <p:nvSpPr>
+          <p:cNvPr id="29" name="Text 27"/>
+          <p:cNvSpPr txBox="1"/>
+          <p:nvPr/>
+        </p:nvSpPr>
+        <p:spPr>
+          <a:xfrm>
+            <a:off x="896112" y="4224528"/>
+            <a:ext cx="2304288" cy="201168"/>
+          </a:xfrm>
+          <a:prstGeom prst="rect">
+            <a:avLst/>
+          </a:prstGeom>
+          <a:noFill/>
+          <a:ln/>
+        </p:spPr>
+        <p:txBody>
+          <a:bodyPr wrap="square" lIns="0" tIns="0" rIns="0" bIns="0" rtlCol="0" anchor="ctr"/>
+          <a:lstStyle/>
+          <a:p>
+            <a:pPr algn="ctr" indent="0" marL="0">
+              <a:buNone/>
+            </a:pPr>
+            <a:r>
+              <a:rPr lang="en-US" sz="940" dirty="0">
+                <a:solidFill>
+                  <a:srgbClr val="6B7A90"/>
+                </a:solidFill>
+                <a:latin typeface="Calibri" pitchFamily="34" charset="0"/>
+                <a:ea typeface="Calibri" pitchFamily="34" charset="-122"/>
+                <a:cs typeface="Calibri" pitchFamily="34" charset="-120"/>
+              </a:rPr>
+              <a:t>serves the built app</a:t>
+            </a:r>
+            <a:endParaRPr lang="en-US" sz="940" dirty="0"/>
+          </a:p>
+        </p:txBody>
+      </p:sp>
+      <p:sp>
+        <p:nvSpPr>
+          <p:cNvPr id="30" name="Shape 28"/>
+          <p:cNvSpPr/>
+          <p:nvPr/>
+        </p:nvSpPr>
+        <p:spPr>
+          <a:xfrm>
+            <a:off x="3566160" y="3895344"/>
+            <a:ext cx="2487168" cy="585216"/>
+          </a:xfrm>
+          <a:prstGeom prst="roundRect">
+            <a:avLst>
+              <a:gd name="adj" fmla="val 9375"/>
+            </a:avLst>
+          </a:prstGeom>
+          <a:solidFill>
+            <a:srgbClr val="FFFFFF"/>
+          </a:solidFill>
+          <a:ln w="13970">
+            <a:solidFill>
+              <a:srgbClr val="DCEDF8"/>
+            </a:solidFill>
+            <a:prstDash val="solid"/>
+          </a:ln>
+        </p:spPr>
+      </p:sp>
+      <p:sp>
+        <p:nvSpPr>
+          <p:cNvPr id="31" name="Text 29"/>
+          <p:cNvSpPr txBox="1"/>
+          <p:nvPr/>
+        </p:nvSpPr>
+        <p:spPr>
+          <a:xfrm>
+            <a:off x="3675888" y="3986784"/>
+            <a:ext cx="2267712" cy="256032"/>
+          </a:xfrm>
+          <a:prstGeom prst="rect">
+            <a:avLst/>
+          </a:prstGeom>
+          <a:noFill/>
+          <a:ln/>
+        </p:spPr>
+        <p:txBody>
+          <a:bodyPr wrap="square" lIns="0" tIns="0" rIns="0" bIns="0" rtlCol="0" anchor="ctr"/>
+          <a:lstStyle/>
+          <a:p>
+            <a:pPr algn="ctr" indent="0" marL="0">
+              <a:buNone/>
+            </a:pPr>
+            <a:r>
+              <a:rPr lang="en-US" sz="1240" b="1" dirty="0">
+                <a:solidFill>
+                  <a:srgbClr val="12235B"/>
+                </a:solidFill>
+                <a:latin typeface="Calibri" pitchFamily="34" charset="0"/>
+                <a:ea typeface="Calibri" pitchFamily="34" charset="-122"/>
+                <a:cs typeface="Calibri" pitchFamily="34" charset="-120"/>
+              </a:rPr>
+              <a:t>REST API</a:t>
+            </a:r>
+            <a:endParaRPr lang="en-US" sz="1240" dirty="0"/>
+          </a:p>
+        </p:txBody>
+      </p:sp>
+      <p:sp>
+        <p:nvSpPr>
+          <p:cNvPr id="32" name="Text 30"/>
+          <p:cNvSpPr txBox="1"/>
+          <p:nvPr/>
+        </p:nvSpPr>
+        <p:spPr>
+          <a:xfrm>
+            <a:off x="3657600" y="4224528"/>
+            <a:ext cx="2304288" cy="201168"/>
+          </a:xfrm>
+          <a:prstGeom prst="rect">
+            <a:avLst/>
+          </a:prstGeom>
+          <a:noFill/>
+          <a:ln/>
+        </p:spPr>
+        <p:txBody>
+          <a:bodyPr wrap="square" lIns="0" tIns="0" rIns="0" bIns="0" rtlCol="0" anchor="ctr"/>
+          <a:lstStyle/>
+          <a:p>
+            <a:pPr algn="ctr" indent="0" marL="0">
+              <a:buNone/>
+            </a:pPr>
+            <a:r>
+              <a:rPr lang="en-US" sz="940" dirty="0">
+                <a:solidFill>
+                  <a:srgbClr val="6B7A90"/>
+                </a:solidFill>
+                <a:latin typeface="Calibri" pitchFamily="34" charset="0"/>
+                <a:ea typeface="Calibri" pitchFamily="34" charset="-122"/>
+                <a:cs typeface="Calibri" pitchFamily="34" charset="-120"/>
+              </a:rPr>
+              <a:t>/api/model/runs</a:t>
+            </a:r>
+            <a:endParaRPr lang="en-US" sz="940" dirty="0"/>
+          </a:p>
+        </p:txBody>
+      </p:sp>
+      <p:sp>
+        <p:nvSpPr>
+          <p:cNvPr id="33" name="Shape 31"/>
+          <p:cNvSpPr/>
+          <p:nvPr/>
+        </p:nvSpPr>
+        <p:spPr>
+          <a:xfrm>
+            <a:off x="6327648" y="3895344"/>
+            <a:ext cx="2487168" cy="585216"/>
+          </a:xfrm>
+          <a:prstGeom prst="roundRect">
+            <a:avLst>
+              <a:gd name="adj" fmla="val 9375"/>
+            </a:avLst>
+          </a:prstGeom>
+          <a:solidFill>
+            <a:srgbClr val="FFFFFF"/>
+          </a:solidFill>
+          <a:ln w="13970">
+            <a:solidFill>
+              <a:srgbClr val="DCEDF8"/>
+            </a:solidFill>
+            <a:prstDash val="solid"/>
+          </a:ln>
+        </p:spPr>
+      </p:sp>
+      <p:sp>
+        <p:nvSpPr>
+          <p:cNvPr id="34" name="Text 32"/>
+          <p:cNvSpPr txBox="1"/>
+          <p:nvPr/>
+        </p:nvSpPr>
+        <p:spPr>
+          <a:xfrm>
+            <a:off x="6437376" y="3986784"/>
+            <a:ext cx="2267712" cy="256032"/>
+          </a:xfrm>
+          <a:prstGeom prst="rect">
+            <a:avLst/>
+          </a:prstGeom>
+          <a:noFill/>
+          <a:ln/>
+        </p:spPr>
+        <p:txBody>
+          <a:bodyPr wrap="square" lIns="0" tIns="0" rIns="0" bIns="0" rtlCol="0" anchor="ctr"/>
+          <a:lstStyle/>
+          <a:p>
+            <a:pPr algn="ctr" indent="0" marL="0">
+              <a:buNone/>
+            </a:pPr>
+            <a:r>
+              <a:rPr lang="en-US" sz="1240" b="1" dirty="0">
+                <a:solidFill>
+                  <a:srgbClr val="12235B"/>
+                </a:solidFill>
+                <a:latin typeface="Calibri" pitchFamily="34" charset="0"/>
+                <a:ea typeface="Calibri" pitchFamily="34" charset="-122"/>
+                <a:cs typeface="Calibri" pitchFamily="34" charset="-120"/>
+              </a:rPr>
+              <a:t>Evidence API</a:t>
+            </a:r>
+            <a:endParaRPr lang="en-US" sz="1240" dirty="0"/>
+          </a:p>
+        </p:txBody>
+      </p:sp>
+      <p:sp>
+        <p:nvSpPr>
+          <p:cNvPr id="35" name="Text 33"/>
+          <p:cNvSpPr txBox="1"/>
+          <p:nvPr/>
+        </p:nvSpPr>
+        <p:spPr>
+          <a:xfrm>
+            <a:off x="6419088" y="4224528"/>
+            <a:ext cx="2304288" cy="201168"/>
+          </a:xfrm>
+          <a:prstGeom prst="rect">
+            <a:avLst/>
+          </a:prstGeom>
+          <a:noFill/>
+          <a:ln/>
+        </p:spPr>
+        <p:txBody>
+          <a:bodyPr wrap="square" lIns="0" tIns="0" rIns="0" bIns="0" rtlCol="0" anchor="ctr"/>
+          <a:lstStyle/>
+          <a:p>
+            <a:pPr algn="ctr" indent="0" marL="0">
+              <a:buNone/>
+            </a:pPr>
+            <a:r>
+              <a:rPr lang="en-US" sz="940" dirty="0">
+                <a:solidFill>
+                  <a:srgbClr val="6B7A90"/>
+                </a:solidFill>
+                <a:latin typeface="Calibri" pitchFamily="34" charset="0"/>
+                <a:ea typeface="Calibri" pitchFamily="34" charset="-122"/>
+                <a:cs typeface="Calibri" pitchFamily="34" charset="-120"/>
+              </a:rPr>
+              <a:t>/api/v1/evitrack</a:t>
+            </a:r>
+            <a:endParaRPr lang="en-US" sz="940" dirty="0"/>
+          </a:p>
+        </p:txBody>
+      </p:sp>
+      <p:sp>
+        <p:nvSpPr>
+          <p:cNvPr id="36" name="Shape 34"/>
+          <p:cNvSpPr/>
+          <p:nvPr/>
+        </p:nvSpPr>
+        <p:spPr>
+          <a:xfrm>
+            <a:off x="9089136" y="3895344"/>
+            <a:ext cx="2487168" cy="585216"/>
+          </a:xfrm>
+          <a:prstGeom prst="roundRect">
+            <a:avLst>
+              <a:gd name="adj" fmla="val 9375"/>
+            </a:avLst>
+          </a:prstGeom>
+          <a:solidFill>
+            <a:srgbClr val="FFFFFF"/>
+          </a:solidFill>
+          <a:ln w="13970">
+            <a:solidFill>
+              <a:srgbClr val="DCEDF8"/>
+            </a:solidFill>
+            <a:prstDash val="solid"/>
+          </a:ln>
+        </p:spPr>
+      </p:sp>
+      <p:sp>
+        <p:nvSpPr>
+          <p:cNvPr id="37" name="Text 35"/>
+          <p:cNvSpPr txBox="1"/>
+          <p:nvPr/>
+        </p:nvSpPr>
+        <p:spPr>
+          <a:xfrm>
+            <a:off x="9198864" y="3986784"/>
+            <a:ext cx="2267712" cy="256032"/>
+          </a:xfrm>
+          <a:prstGeom prst="rect">
+            <a:avLst/>
+          </a:prstGeom>
+          <a:noFill/>
+          <a:ln/>
+        </p:spPr>
+        <p:txBody>
+          <a:bodyPr wrap="square" lIns="0" tIns="0" rIns="0" bIns="0" rtlCol="0" anchor="ctr"/>
+          <a:lstStyle/>
+          <a:p>
+            <a:pPr algn="ctr" indent="0" marL="0">
+              <a:buNone/>
+            </a:pPr>
+            <a:r>
+              <a:rPr lang="en-US" sz="1240" b="1" dirty="0">
+                <a:solidFill>
+                  <a:srgbClr val="12235B"/>
+                </a:solidFill>
+                <a:latin typeface="Calibri" pitchFamily="34" charset="0"/>
+                <a:ea typeface="Calibri" pitchFamily="34" charset="-122"/>
+                <a:cs typeface="Calibri" pitchFamily="34" charset="-120"/>
+              </a:rPr>
+              <a:t>LLM proxy</a:t>
+            </a:r>
+            <a:endParaRPr lang="en-US" sz="1240" dirty="0"/>
+          </a:p>
+        </p:txBody>
+      </p:sp>
+      <p:sp>
+        <p:nvSpPr>
+          <p:cNvPr id="38" name="Text 36"/>
+          <p:cNvSpPr txBox="1"/>
+          <p:nvPr/>
+        </p:nvSpPr>
+        <p:spPr>
+          <a:xfrm>
+            <a:off x="9180576" y="4224528"/>
+            <a:ext cx="2304288" cy="201168"/>
+          </a:xfrm>
+          <a:prstGeom prst="rect">
+            <a:avLst/>
+          </a:prstGeom>
+          <a:noFill/>
+          <a:ln/>
+        </p:spPr>
+        <p:txBody>
+          <a:bodyPr wrap="square" lIns="0" tIns="0" rIns="0" bIns="0" rtlCol="0" anchor="ctr"/>
+          <a:lstStyle/>
+          <a:p>
+            <a:pPr algn="ctr" indent="0" marL="0">
+              <a:buNone/>
+            </a:pPr>
+            <a:r>
+              <a:rPr lang="en-US" sz="940" dirty="0">
+                <a:solidFill>
+                  <a:srgbClr val="6B7A90"/>
+                </a:solidFill>
+                <a:latin typeface="Calibri" pitchFamily="34" charset="0"/>
+                <a:ea typeface="Calibri" pitchFamily="34" charset="-122"/>
+                <a:cs typeface="Calibri" pitchFamily="34" charset="-120"/>
+              </a:rPr>
+              <a:t>/api/chat · /api/v1/llm</a:t>
+            </a:r>
+            <a:endParaRPr lang="en-US" sz="940" dirty="0"/>
+          </a:p>
+        </p:txBody>
+      </p:sp>
+      <p:sp>
+        <p:nvSpPr>
+          <p:cNvPr id="39" name="Shape 37"/>
+          <p:cNvSpPr/>
+          <p:nvPr/>
+        </p:nvSpPr>
+        <p:spPr>
+          <a:xfrm>
+            <a:off x="6190488" y="3236976"/>
+            <a:ext cx="0" cy="347472"/>
+          </a:xfrm>
+          <a:prstGeom prst="line">
+            <a:avLst/>
+          </a:prstGeom>
+          <a:noFill/>
+          <a:ln w="19050">
+            <a:solidFill>
+              <a:srgbClr val="4A63C8"/>
+            </a:solidFill>
+            <a:prstDash val="solid"/>
+            <a:tailEnd type="triangle"/>
+          </a:ln>
+        </p:spPr>
+      </p:sp>
+      <p:sp>
+        <p:nvSpPr>
+          <p:cNvPr id="40" name="Text 38"/>
+          <p:cNvSpPr txBox="1"/>
+          <p:nvPr/>
+        </p:nvSpPr>
+        <p:spPr>
+          <a:xfrm>
+            <a:off x="6318504" y="3291840"/>
+            <a:ext cx="2377440" cy="237744"/>
           </a:xfrm>
           <a:prstGeom prst="rect">
             <a:avLst/>
@@ -18225,7 +19868,139 @@
               <a:buNone/>
             </a:pPr>
             <a:r>
-              <a:rPr lang="en-US" sz="1400" b="1" dirty="0">
+              <a:rPr lang="en-US" sz="960" dirty="0">
+                <a:solidFill>
+                  <a:srgbClr val="6B7A90"/>
+                </a:solidFill>
+                <a:latin typeface="Calibri" pitchFamily="34" charset="0"/>
+                <a:ea typeface="Calibri" pitchFamily="34" charset="-122"/>
+                <a:cs typeface="Calibri" pitchFamily="34" charset="-120"/>
+              </a:rPr>
+              <a:t>HTTPS · same origin</a:t>
+            </a:r>
+            <a:endParaRPr lang="en-US" sz="960" dirty="0"/>
+          </a:p>
+        </p:txBody>
+      </p:sp>
+      <p:sp>
+        <p:nvSpPr>
+          <p:cNvPr id="41" name="Shape 39"/>
+          <p:cNvSpPr/>
+          <p:nvPr/>
+        </p:nvSpPr>
+        <p:spPr>
+          <a:xfrm>
+            <a:off x="713232" y="5138928"/>
+            <a:ext cx="10844784" cy="1170432"/>
+          </a:xfrm>
+          <a:prstGeom prst="roundRect">
+            <a:avLst>
+              <a:gd name="adj" fmla="val 6250"/>
+            </a:avLst>
+          </a:prstGeom>
+          <a:solidFill>
+            <a:srgbClr val="F1F8FD"/>
+          </a:solidFill>
+          <a:ln w="12700">
+            <a:solidFill>
+              <a:srgbClr val="DCEDF8"/>
+            </a:solidFill>
+            <a:prstDash val="solid"/>
+          </a:ln>
+        </p:spPr>
+      </p:sp>
+      <p:sp>
+        <p:nvSpPr>
+          <p:cNvPr id="42" name="Text 40"/>
+          <p:cNvSpPr txBox="1"/>
+          <p:nvPr/>
+        </p:nvSpPr>
+        <p:spPr>
+          <a:xfrm>
+            <a:off x="896112" y="5230368"/>
+            <a:ext cx="8229600" cy="219456"/>
+          </a:xfrm>
+          <a:prstGeom prst="rect">
+            <a:avLst/>
+          </a:prstGeom>
+          <a:noFill/>
+          <a:ln/>
+        </p:spPr>
+        <p:txBody>
+          <a:bodyPr wrap="square" lIns="0" tIns="0" rIns="0" bIns="0" rtlCol="0" anchor="ctr"/>
+          <a:lstStyle/>
+          <a:p>
+            <a:pPr indent="0" marL="0">
+              <a:buNone/>
+            </a:pPr>
+            <a:r>
+              <a:rPr lang="en-US" sz="960" b="1" spc="110" kern="0" dirty="0">
+                <a:solidFill>
+                  <a:srgbClr val="6B7A90"/>
+                </a:solidFill>
+                <a:latin typeface="Calibri" pitchFamily="34" charset="0"/>
+                <a:ea typeface="Calibri" pitchFamily="34" charset="-122"/>
+                <a:cs typeface="Calibri" pitchFamily="34" charset="-120"/>
+              </a:rPr>
+              <a:t>EXTERNAL  ·  OPTIONAL STORE</a:t>
+            </a:r>
+            <a:endParaRPr lang="en-US" sz="960" dirty="0"/>
+          </a:p>
+        </p:txBody>
+      </p:sp>
+      <p:sp>
+        <p:nvSpPr>
+          <p:cNvPr id="43" name="Shape 41"/>
+          <p:cNvSpPr/>
+          <p:nvPr/>
+        </p:nvSpPr>
+        <p:spPr>
+          <a:xfrm>
+            <a:off x="3566160" y="5449824"/>
+            <a:ext cx="2487168" cy="585216"/>
+          </a:xfrm>
+          <a:prstGeom prst="roundRect">
+            <a:avLst>
+              <a:gd name="adj" fmla="val 9375"/>
+            </a:avLst>
+          </a:prstGeom>
+          <a:solidFill>
+            <a:srgbClr val="FFFFFF"/>
+          </a:solidFill>
+          <a:ln w="13970">
+            <a:solidFill>
+              <a:srgbClr val="6B7A90"/>
+            </a:solidFill>
+            <a:prstDash val="solid"/>
+          </a:ln>
+        </p:spPr>
+      </p:sp>
+      <p:sp>
+        <p:nvSpPr>
+          <p:cNvPr id="44" name="Text 42"/>
+          <p:cNvSpPr txBox="1"/>
+          <p:nvPr/>
+        </p:nvSpPr>
+        <p:spPr>
+          <a:xfrm>
+            <a:off x="3675888" y="5541264"/>
+            <a:ext cx="2267712" cy="256032"/>
+          </a:xfrm>
+          <a:prstGeom prst="rect">
+            <a:avLst/>
+          </a:prstGeom>
+          <a:noFill/>
+          <a:ln/>
+        </p:spPr>
+        <p:txBody>
+          <a:bodyPr wrap="square" lIns="0" tIns="0" rIns="0" bIns="0" rtlCol="0" anchor="ctr"/>
+          <a:lstStyle/>
+          <a:p>
+            <a:pPr algn="ctr" indent="0" marL="0">
+              <a:buNone/>
+            </a:pPr>
+            <a:r>
+              <a:rPr lang="en-US" sz="1240" b="1" dirty="0">
                 <a:solidFill>
                   <a:srgbClr val="12235B"/>
                 </a:solidFill>
@@ -18233,109 +20008,375 @@
                 <a:ea typeface="Calibri" pitchFamily="34" charset="-122"/>
                 <a:cs typeface="Calibri" pitchFamily="34" charset="-120"/>
               </a:rPr>
-              <a:t>Why client-side</a:t>
-            </a:r>
-            <a:endParaRPr lang="en-US" sz="1400" dirty="0"/>
-          </a:p>
-        </p:txBody>
-      </p:sp>
-      <p:sp>
-        <p:nvSpPr>
-          <p:cNvPr id="9" name="Text 6"/>
-          <p:cNvSpPr txBox="1"/>
-          <p:nvPr/>
-        </p:nvSpPr>
-        <p:spPr>
-          <a:xfrm>
-            <a:off x="8686800" y="4462272"/>
-            <a:ext cx="2788920" cy="1371600"/>
-          </a:xfrm>
-          <a:prstGeom prst="rect">
-            <a:avLst/>
-          </a:prstGeom>
-          <a:noFill/>
-          <a:ln/>
-        </p:spPr>
-        <p:txBody>
-          <a:bodyPr wrap="square" lIns="0" tIns="0" rIns="0" bIns="0" rtlCol="0" anchor="t"/>
-          <a:lstStyle/>
-          <a:p>
-            <a:pPr marL="177800" indent="-177800">
-              <a:lnSpc>
-                <a:spcPts val="1523"/>
-              </a:lnSpc>
-              <a:spcAft>
-                <a:spcPts val="600"/>
-              </a:spcAft>
-              <a:buSzPct val="100000"/>
-              <a:buChar char="•"/>
-            </a:pPr>
-            <a:r>
-              <a:rPr lang="en-US" sz="1120" dirty="0">
-                <a:solidFill>
-                  <a:srgbClr val="1B2431"/>
-                </a:solidFill>
-                <a:latin typeface="Calibri" pitchFamily="34" charset="0"/>
-                <a:ea typeface="Calibri" pitchFamily="34" charset="-122"/>
-                <a:cs typeface="Calibri" pitchFamily="34" charset="-120"/>
-              </a:rPr>
-              <a:t>No request between an edit and a new number</a:t>
-            </a:r>
-            <a:endParaRPr lang="en-US" sz="1120" dirty="0"/>
-          </a:p>
-          <a:p>
-            <a:pPr marL="177800" indent="-177800">
-              <a:lnSpc>
-                <a:spcPts val="1523"/>
-              </a:lnSpc>
-              <a:spcAft>
-                <a:spcPts val="600"/>
-              </a:spcAft>
-              <a:buSzPct val="100000"/>
-              <a:buChar char="•"/>
-            </a:pPr>
-            <a:r>
-              <a:rPr lang="en-US" sz="1120" dirty="0">
-                <a:solidFill>
-                  <a:srgbClr val="1B2431"/>
-                </a:solidFill>
-                <a:latin typeface="Calibri" pitchFamily="34" charset="0"/>
-                <a:ea typeface="Calibri" pitchFamily="34" charset="-122"/>
-                <a:cs typeface="Calibri" pitchFamily="34" charset="-120"/>
-              </a:rPr>
-              <a:t>Free-tier instances sleep; a demo cannot stall</a:t>
-            </a:r>
-            <a:endParaRPr lang="en-US" sz="1120" dirty="0"/>
-          </a:p>
-          <a:p>
-            <a:pPr marL="177800" indent="-177800">
-              <a:lnSpc>
-                <a:spcPts val="1523"/>
-              </a:lnSpc>
-              <a:spcAft>
-                <a:spcPts val="600"/>
-              </a:spcAft>
-              <a:buSzPct val="100000"/>
-              <a:buChar char="•"/>
-            </a:pPr>
-            <a:r>
-              <a:rPr lang="en-US" sz="1120" dirty="0">
-                <a:solidFill>
-                  <a:srgbClr val="1B2431"/>
-                </a:solidFill>
-                <a:latin typeface="Calibri" pitchFamily="34" charset="0"/>
-                <a:ea typeface="Calibri" pitchFamily="34" charset="-122"/>
-                <a:cs typeface="Calibri" pitchFamily="34" charset="-120"/>
-              </a:rPr>
-              <a:t>Database stays off the critical path</a:t>
-            </a:r>
-            <a:endParaRPr lang="en-US" sz="1120" dirty="0"/>
-          </a:p>
-        </p:txBody>
-      </p:sp>
-      <p:sp>
-        <p:nvSpPr>
-          <p:cNvPr id="10" name="Text 7"/>
+              <a:t>PostgreSQL 16</a:t>
+            </a:r>
+            <a:endParaRPr lang="en-US" sz="1240" dirty="0"/>
+          </a:p>
+        </p:txBody>
+      </p:sp>
+      <p:sp>
+        <p:nvSpPr>
+          <p:cNvPr id="45" name="Text 43"/>
+          <p:cNvSpPr txBox="1"/>
+          <p:nvPr/>
+        </p:nvSpPr>
+        <p:spPr>
+          <a:xfrm>
+            <a:off x="3657600" y="5779008"/>
+            <a:ext cx="2304288" cy="201168"/>
+          </a:xfrm>
+          <a:prstGeom prst="rect">
+            <a:avLst/>
+          </a:prstGeom>
+          <a:noFill/>
+          <a:ln/>
+        </p:spPr>
+        <p:txBody>
+          <a:bodyPr wrap="square" lIns="0" tIns="0" rIns="0" bIns="0" rtlCol="0" anchor="ctr"/>
+          <a:lstStyle/>
+          <a:p>
+            <a:pPr algn="ctr" indent="0" marL="0">
+              <a:buNone/>
+            </a:pPr>
+            <a:r>
+              <a:rPr lang="en-US" sz="940" dirty="0">
+                <a:solidFill>
+                  <a:srgbClr val="6B7A90"/>
+                </a:solidFill>
+                <a:latin typeface="Calibri" pitchFamily="34" charset="0"/>
+                <a:ea typeface="Calibri" pitchFamily="34" charset="-122"/>
+                <a:cs typeface="Calibri" pitchFamily="34" charset="-120"/>
+              </a:rPr>
+              <a:t>optional — run history</a:t>
+            </a:r>
+            <a:endParaRPr lang="en-US" sz="940" dirty="0"/>
+          </a:p>
+        </p:txBody>
+      </p:sp>
+      <p:sp>
+        <p:nvSpPr>
+          <p:cNvPr id="46" name="Shape 44"/>
+          <p:cNvSpPr/>
+          <p:nvPr/>
+        </p:nvSpPr>
+        <p:spPr>
+          <a:xfrm>
+            <a:off x="6327648" y="5449824"/>
+            <a:ext cx="2487168" cy="585216"/>
+          </a:xfrm>
+          <a:prstGeom prst="roundRect">
+            <a:avLst>
+              <a:gd name="adj" fmla="val 9375"/>
+            </a:avLst>
+          </a:prstGeom>
+          <a:solidFill>
+            <a:srgbClr val="E6F9EF"/>
+          </a:solidFill>
+          <a:ln w="13970">
+            <a:solidFill>
+              <a:srgbClr val="9FDCBB"/>
+            </a:solidFill>
+            <a:prstDash val="solid"/>
+          </a:ln>
+        </p:spPr>
+      </p:sp>
+      <p:sp>
+        <p:nvSpPr>
+          <p:cNvPr id="47" name="Text 45"/>
+          <p:cNvSpPr txBox="1"/>
+          <p:nvPr/>
+        </p:nvSpPr>
+        <p:spPr>
+          <a:xfrm>
+            <a:off x="6437376" y="5541264"/>
+            <a:ext cx="2267712" cy="256032"/>
+          </a:xfrm>
+          <a:prstGeom prst="rect">
+            <a:avLst/>
+          </a:prstGeom>
+          <a:noFill/>
+          <a:ln/>
+        </p:spPr>
+        <p:txBody>
+          <a:bodyPr wrap="square" lIns="0" tIns="0" rIns="0" bIns="0" rtlCol="0" anchor="ctr"/>
+          <a:lstStyle/>
+          <a:p>
+            <a:pPr algn="ctr" indent="0" marL="0">
+              <a:buNone/>
+            </a:pPr>
+            <a:r>
+              <a:rPr lang="en-US" sz="1240" b="1" dirty="0">
+                <a:solidFill>
+                  <a:srgbClr val="12235B"/>
+                </a:solidFill>
+                <a:latin typeface="Calibri" pitchFamily="34" charset="0"/>
+                <a:ea typeface="Calibri" pitchFamily="34" charset="-122"/>
+                <a:cs typeface="Calibri" pitchFamily="34" charset="-120"/>
+              </a:rPr>
+              <a:t>Evidence sources</a:t>
+            </a:r>
+            <a:endParaRPr lang="en-US" sz="1240" dirty="0"/>
+          </a:p>
+        </p:txBody>
+      </p:sp>
+      <p:sp>
+        <p:nvSpPr>
+          <p:cNvPr id="48" name="Text 46"/>
+          <p:cNvSpPr txBox="1"/>
+          <p:nvPr/>
+        </p:nvSpPr>
+        <p:spPr>
+          <a:xfrm>
+            <a:off x="6419088" y="5779008"/>
+            <a:ext cx="2304288" cy="201168"/>
+          </a:xfrm>
+          <a:prstGeom prst="rect">
+            <a:avLst/>
+          </a:prstGeom>
+          <a:noFill/>
+          <a:ln/>
+        </p:spPr>
+        <p:txBody>
+          <a:bodyPr wrap="square" lIns="0" tIns="0" rIns="0" bIns="0" rtlCol="0" anchor="ctr"/>
+          <a:lstStyle/>
+          <a:p>
+            <a:pPr algn="ctr" indent="0" marL="0">
+              <a:buNone/>
+            </a:pPr>
+            <a:r>
+              <a:rPr lang="en-US" sz="940" dirty="0">
+                <a:solidFill>
+                  <a:srgbClr val="6B7A90"/>
+                </a:solidFill>
+                <a:latin typeface="Calibri" pitchFamily="34" charset="0"/>
+                <a:ea typeface="Calibri" pitchFamily="34" charset="-122"/>
+                <a:cs typeface="Calibri" pitchFamily="34" charset="-120"/>
+              </a:rPr>
+              <a:t>PubMed · trials · FDA · WHO</a:t>
+            </a:r>
+            <a:endParaRPr lang="en-US" sz="940" dirty="0"/>
+          </a:p>
+        </p:txBody>
+      </p:sp>
+      <p:sp>
+        <p:nvSpPr>
+          <p:cNvPr id="49" name="Shape 47"/>
+          <p:cNvSpPr/>
+          <p:nvPr/>
+        </p:nvSpPr>
+        <p:spPr>
+          <a:xfrm>
+            <a:off x="9089136" y="5449824"/>
+            <a:ext cx="2487168" cy="585216"/>
+          </a:xfrm>
+          <a:prstGeom prst="roundRect">
+            <a:avLst>
+              <a:gd name="adj" fmla="val 9375"/>
+            </a:avLst>
+          </a:prstGeom>
+          <a:solidFill>
+            <a:srgbClr val="E6F9EF"/>
+          </a:solidFill>
+          <a:ln w="13970">
+            <a:solidFill>
+              <a:srgbClr val="9FDCBB"/>
+            </a:solidFill>
+            <a:prstDash val="solid"/>
+          </a:ln>
+        </p:spPr>
+      </p:sp>
+      <p:sp>
+        <p:nvSpPr>
+          <p:cNvPr id="50" name="Text 48"/>
+          <p:cNvSpPr txBox="1"/>
+          <p:nvPr/>
+        </p:nvSpPr>
+        <p:spPr>
+          <a:xfrm>
+            <a:off x="9198864" y="5541264"/>
+            <a:ext cx="2267712" cy="256032"/>
+          </a:xfrm>
+          <a:prstGeom prst="rect">
+            <a:avLst/>
+          </a:prstGeom>
+          <a:noFill/>
+          <a:ln/>
+        </p:spPr>
+        <p:txBody>
+          <a:bodyPr wrap="square" lIns="0" tIns="0" rIns="0" bIns="0" rtlCol="0" anchor="ctr"/>
+          <a:lstStyle/>
+          <a:p>
+            <a:pPr algn="ctr" indent="0" marL="0">
+              <a:buNone/>
+            </a:pPr>
+            <a:r>
+              <a:rPr lang="en-US" sz="1240" b="1" dirty="0">
+                <a:solidFill>
+                  <a:srgbClr val="12235B"/>
+                </a:solidFill>
+                <a:latin typeface="Calibri" pitchFamily="34" charset="0"/>
+                <a:ea typeface="Calibri" pitchFamily="34" charset="-122"/>
+                <a:cs typeface="Calibri" pitchFamily="34" charset="-120"/>
+              </a:rPr>
+              <a:t>LLM providers</a:t>
+            </a:r>
+            <a:endParaRPr lang="en-US" sz="1240" dirty="0"/>
+          </a:p>
+        </p:txBody>
+      </p:sp>
+      <p:sp>
+        <p:nvSpPr>
+          <p:cNvPr id="51" name="Text 49"/>
+          <p:cNvSpPr txBox="1"/>
+          <p:nvPr/>
+        </p:nvSpPr>
+        <p:spPr>
+          <a:xfrm>
+            <a:off x="9180576" y="5779008"/>
+            <a:ext cx="2304288" cy="201168"/>
+          </a:xfrm>
+          <a:prstGeom prst="rect">
+            <a:avLst/>
+          </a:prstGeom>
+          <a:noFill/>
+          <a:ln/>
+        </p:spPr>
+        <p:txBody>
+          <a:bodyPr wrap="square" lIns="0" tIns="0" rIns="0" bIns="0" rtlCol="0" anchor="ctr"/>
+          <a:lstStyle/>
+          <a:p>
+            <a:pPr algn="ctr" indent="0" marL="0">
+              <a:buNone/>
+            </a:pPr>
+            <a:r>
+              <a:rPr lang="en-US" sz="940" dirty="0">
+                <a:solidFill>
+                  <a:srgbClr val="6B7A90"/>
+                </a:solidFill>
+                <a:latin typeface="Calibri" pitchFamily="34" charset="0"/>
+                <a:ea typeface="Calibri" pitchFamily="34" charset="-122"/>
+                <a:cs typeface="Calibri" pitchFamily="34" charset="-120"/>
+              </a:rPr>
+              <a:t>Groq · Gemini</a:t>
+            </a:r>
+            <a:endParaRPr lang="en-US" sz="940" dirty="0"/>
+          </a:p>
+        </p:txBody>
+      </p:sp>
+      <p:sp>
+        <p:nvSpPr>
+          <p:cNvPr id="52" name="Shape 50"/>
+          <p:cNvSpPr/>
+          <p:nvPr/>
+        </p:nvSpPr>
+        <p:spPr>
+          <a:xfrm>
+            <a:off x="4809744" y="4480560"/>
+            <a:ext cx="0" cy="969264"/>
+          </a:xfrm>
+          <a:prstGeom prst="line">
+            <a:avLst/>
+          </a:prstGeom>
+          <a:noFill/>
+          <a:ln w="19050">
+            <a:solidFill>
+              <a:srgbClr val="6B7A90"/>
+            </a:solidFill>
+            <a:prstDash val="dash"/>
+            <a:tailEnd type="triangle"/>
+          </a:ln>
+        </p:spPr>
+      </p:sp>
+      <p:sp>
+        <p:nvSpPr>
+          <p:cNvPr id="53" name="Shape 51"/>
+          <p:cNvSpPr/>
+          <p:nvPr/>
+        </p:nvSpPr>
+        <p:spPr>
+          <a:xfrm>
+            <a:off x="7571232" y="4480560"/>
+            <a:ext cx="0" cy="969264"/>
+          </a:xfrm>
+          <a:prstGeom prst="line">
+            <a:avLst/>
+          </a:prstGeom>
+          <a:noFill/>
+          <a:ln w="19050">
+            <a:solidFill>
+              <a:srgbClr val="4A63C8"/>
+            </a:solidFill>
+            <a:prstDash val="solid"/>
+            <a:tailEnd type="triangle"/>
+          </a:ln>
+        </p:spPr>
+      </p:sp>
+      <p:sp>
+        <p:nvSpPr>
+          <p:cNvPr id="54" name="Shape 52"/>
+          <p:cNvSpPr/>
+          <p:nvPr/>
+        </p:nvSpPr>
+        <p:spPr>
+          <a:xfrm>
+            <a:off x="10332720" y="4480560"/>
+            <a:ext cx="0" cy="969264"/>
+          </a:xfrm>
+          <a:prstGeom prst="line">
+            <a:avLst/>
+          </a:prstGeom>
+          <a:noFill/>
+          <a:ln w="19050">
+            <a:solidFill>
+              <a:srgbClr val="4A63C8"/>
+            </a:solidFill>
+            <a:prstDash val="solid"/>
+            <a:tailEnd type="triangle"/>
+          </a:ln>
+        </p:spPr>
+      </p:sp>
+      <p:sp>
+        <p:nvSpPr>
+          <p:cNvPr id="55" name="Text 53"/>
+          <p:cNvSpPr txBox="1"/>
+          <p:nvPr/>
+        </p:nvSpPr>
+        <p:spPr>
+          <a:xfrm>
+            <a:off x="6035040" y="6144768"/>
+            <a:ext cx="4754880" cy="237744"/>
+          </a:xfrm>
+          <a:prstGeom prst="rect">
+            <a:avLst/>
+          </a:prstGeom>
+          <a:noFill/>
+          <a:ln/>
+        </p:spPr>
+        <p:txBody>
+          <a:bodyPr wrap="square" lIns="0" tIns="0" rIns="0" bIns="0" rtlCol="0" anchor="ctr"/>
+          <a:lstStyle/>
+          <a:p>
+            <a:pPr algn="r" indent="0" marL="0">
+              <a:buNone/>
+            </a:pPr>
+            <a:r>
+              <a:rPr lang="en-US" sz="960" i="1" dirty="0">
+                <a:solidFill>
+                  <a:srgbClr val="6B7A90"/>
+                </a:solidFill>
+                <a:latin typeface="Calibri" pitchFamily="34" charset="0"/>
+                <a:ea typeface="Calibri" pitchFamily="34" charset="-122"/>
+                <a:cs typeface="Calibri" pitchFamily="34" charset="-120"/>
+              </a:rPr>
+              <a:t>Dashed = optional: with no database the app still runs.</a:t>
+            </a:r>
+            <a:endParaRPr lang="en-US" sz="960" dirty="0"/>
+          </a:p>
+        </p:txBody>
+      </p:sp>
+      <p:sp>
+        <p:nvSpPr>
+          <p:cNvPr id="56" name="Text 54"/>
           <p:cNvSpPr txBox="1"/>
           <p:nvPr/>
         </p:nvSpPr>
@@ -18374,7 +20415,7 @@
       </p:sp>
       <p:sp>
         <p:nvSpPr>
-          <p:cNvPr id="11" name="Shape 8"/>
+          <p:cNvPr id="57" name="Shape 55"/>
           <p:cNvSpPr/>
           <p:nvPr/>
         </p:nvSpPr>
@@ -18397,7 +20438,7 @@
       </p:sp>
       <p:sp>
         <p:nvSpPr>
-          <p:cNvPr id="12" name="Text 9"/>
+          <p:cNvPr id="58" name="Text 56"/>
           <p:cNvSpPr txBox="1"/>
           <p:nvPr/>
         </p:nvSpPr>

--- a/docs/presentation/BIET-Denovo-IBAB.pptx
+++ b/docs/presentation/BIET-Denovo-IBAB.pptx
@@ -604,7 +604,7 @@
           <a:p>
             <a:r>
               <a:rPr lang="en-US" dirty="0"/>
-              <a:t/>
+              <a:t>The reference case is the strongest thing on this slide: a reviewer can do the multiplication in their head and check our engine agrees.</a:t>
             </a:r>
             <a:endParaRPr lang="en-US" dirty="0"/>
           </a:p>
@@ -1572,7 +1572,7 @@
           <a:p>
             <a:r>
               <a:rPr lang="en-US" dirty="0"/>
-              <a:t/>
+              <a:t>The decision that matters: the engine is client-side, so there is no request between changing an input and seeing a new number. That is what makes live sensitivity possible on free hosting.</a:t>
             </a:r>
             <a:endParaRPr lang="en-US" dirty="0"/>
           </a:p>
@@ -2750,7 +2750,7 @@
         </p:nvSpPr>
         <p:spPr>
           <a:xfrm>
-            <a:off x="10378440" y="1481328"/>
+            <a:off x="10378440" y="1463040"/>
             <a:ext cx="1810512" cy="384048"/>
           </a:xfrm>
           <a:prstGeom prst="roundRect">
@@ -2777,7 +2777,7 @@
         </p:nvSpPr>
         <p:spPr>
           <a:xfrm>
-            <a:off x="9189720" y="2788920"/>
+            <a:off x="9189720" y="2697480"/>
             <a:ext cx="0" cy="1371600"/>
           </a:xfrm>
           <a:prstGeom prst="line">
@@ -2800,7 +2800,7 @@
         </p:nvSpPr>
         <p:spPr>
           <a:xfrm>
-            <a:off x="9261043" y="2788920"/>
+            <a:off x="9261043" y="2697480"/>
             <a:ext cx="0" cy="1371600"/>
           </a:xfrm>
           <a:prstGeom prst="line">
@@ -2823,7 +2823,7 @@
         </p:nvSpPr>
         <p:spPr>
           <a:xfrm>
-            <a:off x="9332366" y="2788920"/>
+            <a:off x="9332366" y="2697480"/>
             <a:ext cx="0" cy="1371600"/>
           </a:xfrm>
           <a:prstGeom prst="line">
@@ -2846,7 +2846,7 @@
         </p:nvSpPr>
         <p:spPr>
           <a:xfrm>
-            <a:off x="9403690" y="2788920"/>
+            <a:off x="9403690" y="2697480"/>
             <a:ext cx="0" cy="1371600"/>
           </a:xfrm>
           <a:prstGeom prst="line">
@@ -2869,7 +2869,7 @@
         </p:nvSpPr>
         <p:spPr>
           <a:xfrm>
-            <a:off x="9475013" y="2788920"/>
+            <a:off x="9475013" y="2697480"/>
             <a:ext cx="0" cy="1371600"/>
           </a:xfrm>
           <a:prstGeom prst="line">
@@ -2892,7 +2892,7 @@
         </p:nvSpPr>
         <p:spPr>
           <a:xfrm>
-            <a:off x="9546336" y="2788920"/>
+            <a:off x="9546336" y="2697480"/>
             <a:ext cx="0" cy="1371600"/>
           </a:xfrm>
           <a:prstGeom prst="line">
@@ -2915,7 +2915,7 @@
         </p:nvSpPr>
         <p:spPr>
           <a:xfrm>
-            <a:off x="9617659" y="2788920"/>
+            <a:off x="9617659" y="2697480"/>
             <a:ext cx="0" cy="1371600"/>
           </a:xfrm>
           <a:prstGeom prst="line">
@@ -2938,7 +2938,7 @@
         </p:nvSpPr>
         <p:spPr>
           <a:xfrm>
-            <a:off x="9688982" y="2788920"/>
+            <a:off x="9688982" y="2697480"/>
             <a:ext cx="0" cy="1371600"/>
           </a:xfrm>
           <a:prstGeom prst="line">
@@ -2961,7 +2961,7 @@
         </p:nvSpPr>
         <p:spPr>
           <a:xfrm>
-            <a:off x="9760306" y="2788920"/>
+            <a:off x="9760306" y="2697480"/>
             <a:ext cx="0" cy="1371600"/>
           </a:xfrm>
           <a:prstGeom prst="line">
@@ -2984,7 +2984,7 @@
         </p:nvSpPr>
         <p:spPr>
           <a:xfrm>
-            <a:off x="9831629" y="2788920"/>
+            <a:off x="9831629" y="2697480"/>
             <a:ext cx="0" cy="1371600"/>
           </a:xfrm>
           <a:prstGeom prst="line">
@@ -3007,7 +3007,7 @@
         </p:nvSpPr>
         <p:spPr>
           <a:xfrm>
-            <a:off x="9902952" y="2788920"/>
+            <a:off x="9902952" y="2697480"/>
             <a:ext cx="0" cy="1371600"/>
           </a:xfrm>
           <a:prstGeom prst="line">
@@ -3030,7 +3030,7 @@
         </p:nvSpPr>
         <p:spPr>
           <a:xfrm>
-            <a:off x="9974275" y="2788920"/>
+            <a:off x="9974275" y="2697480"/>
             <a:ext cx="0" cy="1371600"/>
           </a:xfrm>
           <a:prstGeom prst="line">
@@ -3053,7 +3053,7 @@
         </p:nvSpPr>
         <p:spPr>
           <a:xfrm>
-            <a:off x="10045598" y="2788920"/>
+            <a:off x="10045598" y="2697480"/>
             <a:ext cx="0" cy="1371600"/>
           </a:xfrm>
           <a:prstGeom prst="line">
@@ -3582,8 +3582,8 @@
         </p:nvSpPr>
         <p:spPr>
           <a:xfrm>
-            <a:off x="0" y="5138928"/>
-            <a:ext cx="2331720" cy="1719072"/>
+            <a:off x="0" y="6053328"/>
+            <a:ext cx="2331720" cy="804672"/>
           </a:xfrm>
           <a:prstGeom prst="rect">
             <a:avLst/>
@@ -3607,8 +3607,8 @@
         </p:nvSpPr>
         <p:spPr>
           <a:xfrm>
-            <a:off x="2331720" y="5742432"/>
-            <a:ext cx="3200400" cy="1115568"/>
+            <a:off x="2331720" y="6053328"/>
+            <a:ext cx="3200400" cy="804672"/>
           </a:xfrm>
           <a:prstGeom prst="rect">
             <a:avLst/>
@@ -3632,8 +3632,8 @@
         </p:nvSpPr>
         <p:spPr>
           <a:xfrm>
-            <a:off x="5532120" y="5742432"/>
-            <a:ext cx="1371600" cy="1115568"/>
+            <a:off x="5532120" y="6053328"/>
+            <a:ext cx="1371600" cy="804672"/>
           </a:xfrm>
           <a:prstGeom prst="rect">
             <a:avLst/>
@@ -3657,8 +3657,8 @@
         </p:nvSpPr>
         <p:spPr>
           <a:xfrm>
-            <a:off x="2331720" y="1481328"/>
-            <a:ext cx="7315200" cy="292608"/>
+            <a:off x="2331720" y="1463040"/>
+            <a:ext cx="3749040" cy="292608"/>
           </a:xfrm>
           <a:prstGeom prst="rect">
             <a:avLst/>
@@ -3696,8 +3696,47 @@
         </p:nvSpPr>
         <p:spPr>
           <a:xfrm>
-            <a:off x="2286000" y="1810512"/>
-            <a:ext cx="7315200" cy="1700784"/>
+            <a:off x="6263640" y="1463040"/>
+            <a:ext cx="4023360" cy="292608"/>
+          </a:xfrm>
+          <a:prstGeom prst="rect">
+            <a:avLst/>
+          </a:prstGeom>
+          <a:noFill/>
+          <a:ln/>
+        </p:spPr>
+        <p:txBody>
+          <a:bodyPr wrap="square" lIns="0" tIns="0" rIns="0" bIns="0" rtlCol="0" anchor="ctr"/>
+          <a:lstStyle/>
+          <a:p>
+            <a:pPr algn="r" indent="0" marL="0">
+              <a:buNone/>
+            </a:pPr>
+            <a:r>
+              <a:rPr lang="en-US" sz="1100" b="1" dirty="0">
+                <a:solidFill>
+                  <a:srgbClr val="4A63C8"/>
+                </a:solidFill>
+                <a:latin typeface="Calibri" pitchFamily="34" charset="0"/>
+                <a:ea typeface="Calibri" pitchFamily="34" charset="-122"/>
+                <a:cs typeface="Calibri" pitchFamily="34" charset="-120"/>
+              </a:rPr>
+              <a:t>early-stage-bia.onrender.com</a:t>
+            </a:r>
+            <a:endParaRPr lang="en-US" sz="1100" dirty="0"/>
+          </a:p>
+        </p:txBody>
+      </p:sp>
+      <p:sp>
+        <p:nvSpPr>
+          <p:cNvPr id="70" name="Text 68"/>
+          <p:cNvSpPr txBox="1"/>
+          <p:nvPr/>
+        </p:nvSpPr>
+        <p:spPr>
+          <a:xfrm>
+            <a:off x="2286000" y="1792224"/>
+            <a:ext cx="7315200" cy="1572768"/>
           </a:xfrm>
           <a:prstGeom prst="rect">
             <a:avLst/>
@@ -3713,7 +3752,7 @@
               <a:buNone/>
             </a:pPr>
             <a:r>
-              <a:rPr lang="en-US" sz="9600" b="1" dirty="0">
+              <a:rPr lang="en-US" sz="9200" b="1" dirty="0">
                 <a:solidFill>
                   <a:srgbClr val="12235B"/>
                 </a:solidFill>
@@ -3723,20 +3762,20 @@
               </a:rPr>
               <a:t>BIET</a:t>
             </a:r>
-            <a:endParaRPr lang="en-US" sz="9600" dirty="0"/>
-          </a:p>
-        </p:txBody>
-      </p:sp>
-      <p:sp>
-        <p:nvSpPr>
-          <p:cNvPr id="70" name="Text 68"/>
-          <p:cNvSpPr txBox="1"/>
-          <p:nvPr/>
-        </p:nvSpPr>
-        <p:spPr>
-          <a:xfrm>
-            <a:off x="2331720" y="3419856"/>
-            <a:ext cx="7498080" cy="512064"/>
+            <a:endParaRPr lang="en-US" sz="9200" dirty="0"/>
+          </a:p>
+        </p:txBody>
+      </p:sp>
+      <p:sp>
+        <p:nvSpPr>
+          <p:cNvPr id="71" name="Text 69"/>
+          <p:cNvSpPr txBox="1"/>
+          <p:nvPr/>
+        </p:nvSpPr>
+        <p:spPr>
+          <a:xfrm>
+            <a:off x="2331720" y="3291840"/>
+            <a:ext cx="7498080" cy="493776"/>
           </a:xfrm>
           <a:prstGeom prst="rect">
             <a:avLst/>
@@ -3752,7 +3791,7 @@
               <a:buNone/>
             </a:pPr>
             <a:r>
-              <a:rPr lang="en-US" sz="2700" dirty="0">
+              <a:rPr lang="en-US" sz="2600" dirty="0">
                 <a:solidFill>
                   <a:srgbClr val="1D3A82"/>
                 </a:solidFill>
@@ -3762,20 +3801,20 @@
               </a:rPr>
               <a:t>Budget Impact Estimation Tool</a:t>
             </a:r>
-            <a:endParaRPr lang="en-US" sz="2700" dirty="0"/>
-          </a:p>
-        </p:txBody>
-      </p:sp>
-      <p:sp>
-        <p:nvSpPr>
-          <p:cNvPr id="71" name="Text 69"/>
-          <p:cNvSpPr txBox="1"/>
-          <p:nvPr/>
-        </p:nvSpPr>
-        <p:spPr>
-          <a:xfrm>
-            <a:off x="2331720" y="4005072"/>
-            <a:ext cx="6949440" cy="329184"/>
+            <a:endParaRPr lang="en-US" sz="2600" dirty="0"/>
+          </a:p>
+        </p:txBody>
+      </p:sp>
+      <p:sp>
+        <p:nvSpPr>
+          <p:cNvPr id="72" name="Text 70"/>
+          <p:cNvSpPr txBox="1"/>
+          <p:nvPr/>
+        </p:nvSpPr>
+        <p:spPr>
+          <a:xfrm>
+            <a:off x="2331720" y="3822192"/>
+            <a:ext cx="7223760" cy="292608"/>
           </a:xfrm>
           <a:prstGeom prst="rect">
             <a:avLst/>
@@ -3791,7 +3830,7 @@
               <a:buNone/>
             </a:pPr>
             <a:r>
-              <a:rPr lang="en-US" sz="1350" dirty="0">
+              <a:rPr lang="en-US" sz="1300" dirty="0">
                 <a:solidFill>
                   <a:srgbClr val="6B7A90"/>
                 </a:solidFill>
@@ -3801,20 +3840,47 @@
               </a:rPr>
               <a:t>Early-stage budget impact analysis for pharmaceutical decision support</a:t>
             </a:r>
-            <a:endParaRPr lang="en-US" sz="1350" dirty="0"/>
-          </a:p>
-        </p:txBody>
-      </p:sp>
-      <p:sp>
-        <p:nvSpPr>
-          <p:cNvPr id="72" name="Text 70"/>
-          <p:cNvSpPr txBox="1"/>
-          <p:nvPr/>
-        </p:nvSpPr>
-        <p:spPr>
-          <a:xfrm>
-            <a:off x="2331720" y="4572000"/>
-            <a:ext cx="5486400" cy="274320"/>
+            <a:endParaRPr lang="en-US" sz="1300" dirty="0"/>
+          </a:p>
+        </p:txBody>
+      </p:sp>
+      <p:sp>
+        <p:nvSpPr>
+          <p:cNvPr id="73" name="Shape 71"/>
+          <p:cNvSpPr/>
+          <p:nvPr/>
+        </p:nvSpPr>
+        <p:spPr>
+          <a:xfrm>
+            <a:off x="2331720" y="4315968"/>
+            <a:ext cx="7973568" cy="1517904"/>
+          </a:xfrm>
+          <a:prstGeom prst="roundRect">
+            <a:avLst>
+              <a:gd name="adj" fmla="val 4819"/>
+            </a:avLst>
+          </a:prstGeom>
+          <a:solidFill>
+            <a:srgbClr val="F1F8FD"/>
+          </a:solidFill>
+          <a:ln w="12700">
+            <a:solidFill>
+              <a:srgbClr val="F1F8FD"/>
+            </a:solidFill>
+            <a:prstDash val="solid"/>
+          </a:ln>
+        </p:spPr>
+      </p:sp>
+      <p:sp>
+        <p:nvSpPr>
+          <p:cNvPr id="74" name="Text 72"/>
+          <p:cNvSpPr txBox="1"/>
+          <p:nvPr/>
+        </p:nvSpPr>
+        <p:spPr>
+          <a:xfrm>
+            <a:off x="2606040" y="4443984"/>
+            <a:ext cx="2743200" cy="201168"/>
           </a:xfrm>
           <a:prstGeom prst="rect">
             <a:avLst/>
@@ -3830,7 +3896,88 @@
               <a:buNone/>
             </a:pPr>
             <a:r>
-              <a:rPr lang="en-US" sz="1150" b="1" dirty="0">
+              <a:rPr lang="en-US" sz="940" b="1" spc="110" kern="0" dirty="0">
+                <a:solidFill>
+                  <a:srgbClr val="4FC3E8"/>
+                </a:solidFill>
+                <a:latin typeface="Calibri" pitchFamily="34" charset="0"/>
+                <a:ea typeface="Calibri" pitchFamily="34" charset="-122"/>
+                <a:cs typeface="Calibri" pitchFamily="34" charset="-120"/>
+              </a:rPr>
+              <a:t>THE PROBLEM</a:t>
+            </a:r>
+            <a:endParaRPr lang="en-US" sz="940" dirty="0"/>
+          </a:p>
+        </p:txBody>
+      </p:sp>
+      <p:sp>
+        <p:nvSpPr>
+          <p:cNvPr id="75" name="Text 73"/>
+          <p:cNvSpPr txBox="1"/>
+          <p:nvPr/>
+        </p:nvSpPr>
+        <p:spPr>
+          <a:xfrm>
+            <a:off x="2606040" y="4645152"/>
+            <a:ext cx="7443216" cy="420624"/>
+          </a:xfrm>
+          <a:prstGeom prst="rect">
+            <a:avLst/>
+          </a:prstGeom>
+          <a:noFill/>
+          <a:ln/>
+        </p:spPr>
+        <p:txBody>
+          <a:bodyPr wrap="square" lIns="0" tIns="0" rIns="0" bIns="0" rtlCol="0" anchor="ctr"/>
+          <a:lstStyle/>
+          <a:p>
+            <a:pPr indent="0" marL="0">
+              <a:lnSpc>
+                <a:spcPts val="1500"/>
+              </a:lnSpc>
+              <a:buNone/>
+            </a:pPr>
+            <a:r>
+              <a:rPr lang="en-US" sz="1180" dirty="0">
+                <a:solidFill>
+                  <a:srgbClr val="1B2431"/>
+                </a:solidFill>
+                <a:latin typeface="Calibri" pitchFamily="34" charset="0"/>
+                <a:ea typeface="Calibri" pitchFamily="34" charset="-122"/>
+                <a:cs typeface="Calibri" pitchFamily="34" charset="-120"/>
+              </a:rPr>
+              <a:t>Early-stage drug teams cannot answer a payer's first question — what will this cost my budget? — without weeks of bespoke spreadsheet work.</a:t>
+            </a:r>
+            <a:endParaRPr lang="en-US" sz="1180" dirty="0"/>
+          </a:p>
+        </p:txBody>
+      </p:sp>
+      <p:sp>
+        <p:nvSpPr>
+          <p:cNvPr id="76" name="Text 74"/>
+          <p:cNvSpPr txBox="1"/>
+          <p:nvPr/>
+        </p:nvSpPr>
+        <p:spPr>
+          <a:xfrm>
+            <a:off x="2606040" y="5120640"/>
+            <a:ext cx="2743200" cy="201168"/>
+          </a:xfrm>
+          <a:prstGeom prst="rect">
+            <a:avLst/>
+          </a:prstGeom>
+          <a:noFill/>
+          <a:ln/>
+        </p:spPr>
+        <p:txBody>
+          <a:bodyPr wrap="square" lIns="0" tIns="0" rIns="0" bIns="0" rtlCol="0" anchor="ctr"/>
+          <a:lstStyle/>
+          <a:p>
+            <a:pPr indent="0" marL="0">
+              <a:buNone/>
+            </a:pPr>
+            <a:r>
+              <a:rPr lang="en-US" sz="940" b="1" spc="110" kern="0" dirty="0">
                 <a:solidFill>
                   <a:srgbClr val="4A63C8"/>
                 </a:solidFill>
@@ -3838,9 +3985,51 @@
                 <a:ea typeface="Calibri" pitchFamily="34" charset="-122"/>
                 <a:cs typeface="Calibri" pitchFamily="34" charset="-120"/>
               </a:rPr>
-              <a:t>early-stage-bia.onrender.com</a:t>
-            </a:r>
-            <a:endParaRPr lang="en-US" sz="1150" dirty="0"/>
+              <a:t>HEADLINE OUTCOME</a:t>
+            </a:r>
+            <a:endParaRPr lang="en-US" sz="940" dirty="0"/>
+          </a:p>
+        </p:txBody>
+      </p:sp>
+      <p:sp>
+        <p:nvSpPr>
+          <p:cNvPr id="77" name="Text 75"/>
+          <p:cNvSpPr txBox="1"/>
+          <p:nvPr/>
+        </p:nvSpPr>
+        <p:spPr>
+          <a:xfrm>
+            <a:off x="2606040" y="5321808"/>
+            <a:ext cx="7443216" cy="420624"/>
+          </a:xfrm>
+          <a:prstGeom prst="rect">
+            <a:avLst/>
+          </a:prstGeom>
+          <a:noFill/>
+          <a:ln/>
+        </p:spPr>
+        <p:txBody>
+          <a:bodyPr wrap="square" lIns="0" tIns="0" rIns="0" bIns="0" rtlCol="0" anchor="ctr"/>
+          <a:lstStyle/>
+          <a:p>
+            <a:pPr indent="0" marL="0">
+              <a:lnSpc>
+                <a:spcPts val="1500"/>
+              </a:lnSpc>
+              <a:buNone/>
+            </a:pPr>
+            <a:r>
+              <a:rPr lang="en-US" sz="1180" b="1" dirty="0">
+                <a:solidFill>
+                  <a:srgbClr val="12235B"/>
+                </a:solidFill>
+                <a:latin typeface="Calibri" pitchFamily="34" charset="0"/>
+                <a:ea typeface="Calibri" pitchFamily="34" charset="-122"/>
+                <a:cs typeface="Calibri" pitchFamily="34" charset="-120"/>
+              </a:rPr>
+              <a:t>A five-year model in under 10 minutes instead of weeks, every figure traceable to the input behind it.</a:t>
+            </a:r>
+            <a:endParaRPr lang="en-US" sz="1180" dirty="0"/>
           </a:p>
         </p:txBody>
       </p:sp>
@@ -3990,15 +4179,572 @@
                 <a:ea typeface="Calibri" pitchFamily="34" charset="-122"/>
                 <a:cs typeface="Calibri" pitchFamily="34" charset="-120"/>
               </a:rPr>
-              <a:t>A budget impact tool that returns a confident wrong number is worse than one that refuses. We tested for that specifically.</a:t>
+              <a:t>A tool that returns a confident wrong number is worse than one that refuses. We check the arithmetic against a case anyone can verify by hand.</a:t>
             </a:r>
             <a:endParaRPr lang="en-US" sz="1400" dirty="0"/>
+          </a:p>
+        </p:txBody>
+      </p:sp>
+      <p:sp>
+        <p:nvSpPr>
+          <p:cNvPr id="5" name="Shape 3"/>
+          <p:cNvSpPr/>
+          <p:nvPr/>
+        </p:nvSpPr>
+        <p:spPr>
+          <a:xfrm>
+            <a:off x="713232" y="2249424"/>
+            <a:ext cx="5257800" cy="2395728"/>
+          </a:xfrm>
+          <a:prstGeom prst="roundRect">
+            <a:avLst>
+              <a:gd name="adj" fmla="val 3817"/>
+            </a:avLst>
+          </a:prstGeom>
+          <a:solidFill>
+            <a:srgbClr val="F1F8FD"/>
+          </a:solidFill>
+          <a:ln w="12700">
+            <a:solidFill>
+              <a:srgbClr val="F1F8FD"/>
+            </a:solidFill>
+            <a:prstDash val="solid"/>
+          </a:ln>
+        </p:spPr>
+      </p:sp>
+      <p:sp>
+        <p:nvSpPr>
+          <p:cNvPr id="6" name="Text 4"/>
+          <p:cNvSpPr txBox="1"/>
+          <p:nvPr/>
+        </p:nvSpPr>
+        <p:spPr>
+          <a:xfrm>
+            <a:off x="950976" y="2395728"/>
+            <a:ext cx="4846320" cy="219456"/>
+          </a:xfrm>
+          <a:prstGeom prst="rect">
+            <a:avLst/>
+          </a:prstGeom>
+          <a:noFill/>
+          <a:ln/>
+        </p:spPr>
+        <p:txBody>
+          <a:bodyPr wrap="square" lIns="0" tIns="0" rIns="0" bIns="0" rtlCol="0" anchor="ctr"/>
+          <a:lstStyle/>
+          <a:p>
+            <a:pPr indent="0" marL="0">
+              <a:buNone/>
+            </a:pPr>
+            <a:r>
+              <a:rPr lang="en-US" sz="960" b="1" spc="110" kern="0" dirty="0">
+                <a:solidFill>
+                  <a:srgbClr val="4FC3E8"/>
+                </a:solidFill>
+                <a:latin typeface="Calibri" pitchFamily="34" charset="0"/>
+                <a:ea typeface="Calibri" pitchFamily="34" charset="-122"/>
+                <a:cs typeface="Calibri" pitchFamily="34" charset="-120"/>
+              </a:rPr>
+              <a:t>VALIDATION AGAINST A REFERENCE CASE</a:t>
+            </a:r>
+            <a:endParaRPr lang="en-US" sz="960" dirty="0"/>
+          </a:p>
+        </p:txBody>
+      </p:sp>
+      <p:sp>
+        <p:nvSpPr>
+          <p:cNvPr id="7" name="Text 5"/>
+          <p:cNvSpPr txBox="1"/>
+          <p:nvPr/>
+        </p:nvSpPr>
+        <p:spPr>
+          <a:xfrm>
+            <a:off x="950976" y="2706624"/>
+            <a:ext cx="2834640" cy="237744"/>
+          </a:xfrm>
+          <a:prstGeom prst="rect">
+            <a:avLst/>
+          </a:prstGeom>
+          <a:noFill/>
+          <a:ln/>
+        </p:spPr>
+        <p:txBody>
+          <a:bodyPr wrap="square" lIns="0" tIns="0" rIns="0" bIns="0" rtlCol="0" anchor="ctr"/>
+          <a:lstStyle/>
+          <a:p>
+            <a:pPr indent="0" marL="0">
+              <a:buNone/>
+            </a:pPr>
+            <a:r>
+              <a:rPr lang="en-US" sz="1140" dirty="0">
+                <a:solidFill>
+                  <a:srgbClr val="1B2431"/>
+                </a:solidFill>
+                <a:latin typeface="Calibri" pitchFamily="34" charset="0"/>
+                <a:ea typeface="Calibri" pitchFamily="34" charset="-122"/>
+                <a:cs typeface="Calibri" pitchFamily="34" charset="-120"/>
+              </a:rPr>
+              <a:t>Covered lives</a:t>
+            </a:r>
+            <a:endParaRPr lang="en-US" sz="1140" dirty="0"/>
+          </a:p>
+        </p:txBody>
+      </p:sp>
+      <p:sp>
+        <p:nvSpPr>
+          <p:cNvPr id="8" name="Text 6"/>
+          <p:cNvSpPr txBox="1"/>
+          <p:nvPr/>
+        </p:nvSpPr>
+        <p:spPr>
+          <a:xfrm>
+            <a:off x="3840480" y="2706624"/>
+            <a:ext cx="1920240" cy="237744"/>
+          </a:xfrm>
+          <a:prstGeom prst="rect">
+            <a:avLst/>
+          </a:prstGeom>
+          <a:noFill/>
+          <a:ln/>
+        </p:spPr>
+        <p:txBody>
+          <a:bodyPr wrap="square" lIns="0" tIns="0" rIns="0" bIns="0" rtlCol="0" anchor="ctr"/>
+          <a:lstStyle/>
+          <a:p>
+            <a:pPr algn="r" indent="0" marL="0">
+              <a:buNone/>
+            </a:pPr>
+            <a:r>
+              <a:rPr lang="en-US" sz="1140" b="1" dirty="0">
+                <a:solidFill>
+                  <a:srgbClr val="12235B"/>
+                </a:solidFill>
+                <a:latin typeface="Calibri" pitchFamily="34" charset="0"/>
+                <a:ea typeface="Calibri" pitchFamily="34" charset="-122"/>
+                <a:cs typeface="Calibri" pitchFamily="34" charset="-120"/>
+              </a:rPr>
+              <a:t>1,000,000</a:t>
+            </a:r>
+            <a:endParaRPr lang="en-US" sz="1140" dirty="0"/>
+          </a:p>
+        </p:txBody>
+      </p:sp>
+      <p:sp>
+        <p:nvSpPr>
+          <p:cNvPr id="9" name="Text 7"/>
+          <p:cNvSpPr txBox="1"/>
+          <p:nvPr/>
+        </p:nvSpPr>
+        <p:spPr>
+          <a:xfrm>
+            <a:off x="950976" y="2999232"/>
+            <a:ext cx="2834640" cy="237744"/>
+          </a:xfrm>
+          <a:prstGeom prst="rect">
+            <a:avLst/>
+          </a:prstGeom>
+          <a:noFill/>
+          <a:ln/>
+        </p:spPr>
+        <p:txBody>
+          <a:bodyPr wrap="square" lIns="0" tIns="0" rIns="0" bIns="0" rtlCol="0" anchor="ctr"/>
+          <a:lstStyle/>
+          <a:p>
+            <a:pPr indent="0" marL="0">
+              <a:buNone/>
+            </a:pPr>
+            <a:r>
+              <a:rPr lang="en-US" sz="1140" dirty="0">
+                <a:solidFill>
+                  <a:srgbClr val="1B2431"/>
+                </a:solidFill>
+                <a:latin typeface="Calibri" pitchFamily="34" charset="0"/>
+                <a:ea typeface="Calibri" pitchFamily="34" charset="-122"/>
+                <a:cs typeface="Calibri" pitchFamily="34" charset="-120"/>
+              </a:rPr>
+              <a:t>× prevalence 10%</a:t>
+            </a:r>
+            <a:endParaRPr lang="en-US" sz="1140" dirty="0"/>
+          </a:p>
+        </p:txBody>
+      </p:sp>
+      <p:sp>
+        <p:nvSpPr>
+          <p:cNvPr id="10" name="Text 8"/>
+          <p:cNvSpPr txBox="1"/>
+          <p:nvPr/>
+        </p:nvSpPr>
+        <p:spPr>
+          <a:xfrm>
+            <a:off x="3840480" y="2999232"/>
+            <a:ext cx="1920240" cy="237744"/>
+          </a:xfrm>
+          <a:prstGeom prst="rect">
+            <a:avLst/>
+          </a:prstGeom>
+          <a:noFill/>
+          <a:ln/>
+        </p:spPr>
+        <p:txBody>
+          <a:bodyPr wrap="square" lIns="0" tIns="0" rIns="0" bIns="0" rtlCol="0" anchor="ctr"/>
+          <a:lstStyle/>
+          <a:p>
+            <a:pPr algn="r" indent="0" marL="0">
+              <a:buNone/>
+            </a:pPr>
+            <a:r>
+              <a:rPr lang="en-US" sz="1140" b="1" dirty="0">
+                <a:solidFill>
+                  <a:srgbClr val="12235B"/>
+                </a:solidFill>
+                <a:latin typeface="Calibri" pitchFamily="34" charset="0"/>
+                <a:ea typeface="Calibri" pitchFamily="34" charset="-122"/>
+                <a:cs typeface="Calibri" pitchFamily="34" charset="-120"/>
+              </a:rPr>
+              <a:t>100,000</a:t>
+            </a:r>
+            <a:endParaRPr lang="en-US" sz="1140" dirty="0"/>
+          </a:p>
+        </p:txBody>
+      </p:sp>
+      <p:sp>
+        <p:nvSpPr>
+          <p:cNvPr id="11" name="Text 9"/>
+          <p:cNvSpPr txBox="1"/>
+          <p:nvPr/>
+        </p:nvSpPr>
+        <p:spPr>
+          <a:xfrm>
+            <a:off x="950976" y="3291840"/>
+            <a:ext cx="2834640" cy="237744"/>
+          </a:xfrm>
+          <a:prstGeom prst="rect">
+            <a:avLst/>
+          </a:prstGeom>
+          <a:noFill/>
+          <a:ln/>
+        </p:spPr>
+        <p:txBody>
+          <a:bodyPr wrap="square" lIns="0" tIns="0" rIns="0" bIns="0" rtlCol="0" anchor="ctr"/>
+          <a:lstStyle/>
+          <a:p>
+            <a:pPr indent="0" marL="0">
+              <a:buNone/>
+            </a:pPr>
+            <a:r>
+              <a:rPr lang="en-US" sz="1140" dirty="0">
+                <a:solidFill>
+                  <a:srgbClr val="1B2431"/>
+                </a:solidFill>
+                <a:latin typeface="Calibri" pitchFamily="34" charset="0"/>
+                <a:ea typeface="Calibri" pitchFamily="34" charset="-122"/>
+                <a:cs typeface="Calibri" pitchFamily="34" charset="-120"/>
+              </a:rPr>
+              <a:t>× diagnosed 50%</a:t>
+            </a:r>
+            <a:endParaRPr lang="en-US" sz="1140" dirty="0"/>
+          </a:p>
+        </p:txBody>
+      </p:sp>
+      <p:sp>
+        <p:nvSpPr>
+          <p:cNvPr id="12" name="Text 10"/>
+          <p:cNvSpPr txBox="1"/>
+          <p:nvPr/>
+        </p:nvSpPr>
+        <p:spPr>
+          <a:xfrm>
+            <a:off x="3840480" y="3291840"/>
+            <a:ext cx="1920240" cy="237744"/>
+          </a:xfrm>
+          <a:prstGeom prst="rect">
+            <a:avLst/>
+          </a:prstGeom>
+          <a:noFill/>
+          <a:ln/>
+        </p:spPr>
+        <p:txBody>
+          <a:bodyPr wrap="square" lIns="0" tIns="0" rIns="0" bIns="0" rtlCol="0" anchor="ctr"/>
+          <a:lstStyle/>
+          <a:p>
+            <a:pPr algn="r" indent="0" marL="0">
+              <a:buNone/>
+            </a:pPr>
+            <a:r>
+              <a:rPr lang="en-US" sz="1140" b="1" dirty="0">
+                <a:solidFill>
+                  <a:srgbClr val="12235B"/>
+                </a:solidFill>
+                <a:latin typeface="Calibri" pitchFamily="34" charset="0"/>
+                <a:ea typeface="Calibri" pitchFamily="34" charset="-122"/>
+                <a:cs typeface="Calibri" pitchFamily="34" charset="-120"/>
+              </a:rPr>
+              <a:t>50,000 eligible</a:t>
+            </a:r>
+            <a:endParaRPr lang="en-US" sz="1140" dirty="0"/>
+          </a:p>
+        </p:txBody>
+      </p:sp>
+      <p:sp>
+        <p:nvSpPr>
+          <p:cNvPr id="13" name="Text 11"/>
+          <p:cNvSpPr txBox="1"/>
+          <p:nvPr/>
+        </p:nvSpPr>
+        <p:spPr>
+          <a:xfrm>
+            <a:off x="950976" y="3584448"/>
+            <a:ext cx="2834640" cy="237744"/>
+          </a:xfrm>
+          <a:prstGeom prst="rect">
+            <a:avLst/>
+          </a:prstGeom>
+          <a:noFill/>
+          <a:ln/>
+        </p:spPr>
+        <p:txBody>
+          <a:bodyPr wrap="square" lIns="0" tIns="0" rIns="0" bIns="0" rtlCol="0" anchor="ctr"/>
+          <a:lstStyle/>
+          <a:p>
+            <a:pPr indent="0" marL="0">
+              <a:buNone/>
+            </a:pPr>
+            <a:r>
+              <a:rPr lang="en-US" sz="1140" dirty="0">
+                <a:solidFill>
+                  <a:srgbClr val="1B2431"/>
+                </a:solidFill>
+                <a:latin typeface="Calibri" pitchFamily="34" charset="0"/>
+                <a:ea typeface="Calibri" pitchFamily="34" charset="-122"/>
+                <a:cs typeface="Calibri" pitchFamily="34" charset="-120"/>
+              </a:rPr>
+              <a:t>× uptake 100%, 1 year</a:t>
+            </a:r>
+            <a:endParaRPr lang="en-US" sz="1140" dirty="0"/>
+          </a:p>
+        </p:txBody>
+      </p:sp>
+      <p:sp>
+        <p:nvSpPr>
+          <p:cNvPr id="14" name="Text 12"/>
+          <p:cNvSpPr txBox="1"/>
+          <p:nvPr/>
+        </p:nvSpPr>
+        <p:spPr>
+          <a:xfrm>
+            <a:off x="3840480" y="3584448"/>
+            <a:ext cx="1920240" cy="237744"/>
+          </a:xfrm>
+          <a:prstGeom prst="rect">
+            <a:avLst/>
+          </a:prstGeom>
+          <a:noFill/>
+          <a:ln/>
+        </p:spPr>
+        <p:txBody>
+          <a:bodyPr wrap="square" lIns="0" tIns="0" rIns="0" bIns="0" rtlCol="0" anchor="ctr"/>
+          <a:lstStyle/>
+          <a:p>
+            <a:pPr algn="r" indent="0" marL="0">
+              <a:buNone/>
+            </a:pPr>
+            <a:r>
+              <a:rPr lang="en-US" sz="1140" b="1" dirty="0">
+                <a:solidFill>
+                  <a:srgbClr val="12235B"/>
+                </a:solidFill>
+                <a:latin typeface="Calibri" pitchFamily="34" charset="0"/>
+                <a:ea typeface="Calibri" pitchFamily="34" charset="-122"/>
+                <a:cs typeface="Calibri" pitchFamily="34" charset="-120"/>
+              </a:rPr>
+              <a:t>50,000 treated</a:t>
+            </a:r>
+            <a:endParaRPr lang="en-US" sz="1140" dirty="0"/>
+          </a:p>
+        </p:txBody>
+      </p:sp>
+      <p:sp>
+        <p:nvSpPr>
+          <p:cNvPr id="15" name="Text 13"/>
+          <p:cNvSpPr txBox="1"/>
+          <p:nvPr/>
+        </p:nvSpPr>
+        <p:spPr>
+          <a:xfrm>
+            <a:off x="950976" y="3877056"/>
+            <a:ext cx="2834640" cy="237744"/>
+          </a:xfrm>
+          <a:prstGeom prst="rect">
+            <a:avLst/>
+          </a:prstGeom>
+          <a:noFill/>
+          <a:ln/>
+        </p:spPr>
+        <p:txBody>
+          <a:bodyPr wrap="square" lIns="0" tIns="0" rIns="0" bIns="0" rtlCol="0" anchor="ctr"/>
+          <a:lstStyle/>
+          <a:p>
+            <a:pPr indent="0" marL="0">
+              <a:buNone/>
+            </a:pPr>
+            <a:r>
+              <a:rPr lang="en-US" sz="1140" dirty="0">
+                <a:solidFill>
+                  <a:srgbClr val="1B2431"/>
+                </a:solidFill>
+                <a:latin typeface="Calibri" pitchFamily="34" charset="0"/>
+                <a:ea typeface="Calibri" pitchFamily="34" charset="-122"/>
+                <a:cs typeface="Calibri" pitchFamily="34" charset="-120"/>
+              </a:rPr>
+              <a:t>× new drug ₹100/yr</a:t>
+            </a:r>
+            <a:endParaRPr lang="en-US" sz="1140" dirty="0"/>
+          </a:p>
+        </p:txBody>
+      </p:sp>
+      <p:sp>
+        <p:nvSpPr>
+          <p:cNvPr id="16" name="Text 14"/>
+          <p:cNvSpPr txBox="1"/>
+          <p:nvPr/>
+        </p:nvSpPr>
+        <p:spPr>
+          <a:xfrm>
+            <a:off x="3840480" y="3877056"/>
+            <a:ext cx="1920240" cy="237744"/>
+          </a:xfrm>
+          <a:prstGeom prst="rect">
+            <a:avLst/>
+          </a:prstGeom>
+          <a:noFill/>
+          <a:ln/>
+        </p:spPr>
+        <p:txBody>
+          <a:bodyPr wrap="square" lIns="0" tIns="0" rIns="0" bIns="0" rtlCol="0" anchor="ctr"/>
+          <a:lstStyle/>
+          <a:p>
+            <a:pPr algn="r" indent="0" marL="0">
+              <a:buNone/>
+            </a:pPr>
+            <a:r>
+              <a:rPr lang="en-US" sz="1140" b="1" dirty="0">
+                <a:solidFill>
+                  <a:srgbClr val="12235B"/>
+                </a:solidFill>
+                <a:latin typeface="Calibri" pitchFamily="34" charset="0"/>
+                <a:ea typeface="Calibri" pitchFamily="34" charset="-122"/>
+                <a:cs typeface="Calibri" pitchFamily="34" charset="-120"/>
+              </a:rPr>
+              <a:t>₹5,000,000</a:t>
+            </a:r>
+            <a:endParaRPr lang="en-US" sz="1140" dirty="0"/>
+          </a:p>
+        </p:txBody>
+      </p:sp>
+      <p:sp>
+        <p:nvSpPr>
+          <p:cNvPr id="17" name="Shape 15"/>
+          <p:cNvSpPr/>
+          <p:nvPr/>
+        </p:nvSpPr>
+        <p:spPr>
+          <a:xfrm>
+            <a:off x="950976" y="4224528"/>
+            <a:ext cx="4809744" cy="0"/>
+          </a:xfrm>
+          <a:prstGeom prst="line">
+            <a:avLst/>
+          </a:prstGeom>
+          <a:noFill/>
+          <a:ln w="15240">
+            <a:solidFill>
+              <a:srgbClr val="9FD9F0"/>
+            </a:solidFill>
+            <a:prstDash val="solid"/>
+          </a:ln>
+        </p:spPr>
+      </p:sp>
+      <p:sp>
+        <p:nvSpPr>
+          <p:cNvPr id="18" name="Text 16"/>
+          <p:cNvSpPr txBox="1"/>
+          <p:nvPr/>
+        </p:nvSpPr>
+        <p:spPr>
+          <a:xfrm>
+            <a:off x="950976" y="4315968"/>
+            <a:ext cx="2560320" cy="256032"/>
+          </a:xfrm>
+          <a:prstGeom prst="rect">
+            <a:avLst/>
+          </a:prstGeom>
+          <a:noFill/>
+          <a:ln/>
+        </p:spPr>
+        <p:txBody>
+          <a:bodyPr wrap="square" lIns="0" tIns="0" rIns="0" bIns="0" rtlCol="0" anchor="ctr"/>
+          <a:lstStyle/>
+          <a:p>
+            <a:pPr indent="0" marL="0">
+              <a:buNone/>
+            </a:pPr>
+            <a:r>
+              <a:rPr lang="en-US" sz="1180" b="1" dirty="0">
+                <a:solidFill>
+                  <a:srgbClr val="12235B"/>
+                </a:solidFill>
+                <a:latin typeface="Calibri" pitchFamily="34" charset="0"/>
+                <a:ea typeface="Calibri" pitchFamily="34" charset="-122"/>
+                <a:cs typeface="Calibri" pitchFamily="34" charset="-120"/>
+              </a:rPr>
+              <a:t>Engine returns</a:t>
+            </a:r>
+            <a:endParaRPr lang="en-US" sz="1180" dirty="0"/>
+          </a:p>
+        </p:txBody>
+      </p:sp>
+      <p:sp>
+        <p:nvSpPr>
+          <p:cNvPr id="19" name="Text 17"/>
+          <p:cNvSpPr txBox="1"/>
+          <p:nvPr/>
+        </p:nvSpPr>
+        <p:spPr>
+          <a:xfrm>
+            <a:off x="3657600" y="4315968"/>
+            <a:ext cx="2103120" cy="256032"/>
+          </a:xfrm>
+          <a:prstGeom prst="rect">
+            <a:avLst/>
+          </a:prstGeom>
+          <a:noFill/>
+          <a:ln/>
+        </p:spPr>
+        <p:txBody>
+          <a:bodyPr wrap="square" lIns="0" tIns="0" rIns="0" bIns="0" rtlCol="0" anchor="ctr"/>
+          <a:lstStyle/>
+          <a:p>
+            <a:pPr algn="r" indent="0" marL="0">
+              <a:buNone/>
+            </a:pPr>
+            <a:r>
+              <a:rPr lang="en-US" sz="1260" b="1" dirty="0">
+                <a:solidFill>
+                  <a:srgbClr val="0B7A5A"/>
+                </a:solidFill>
+                <a:latin typeface="Calibri" pitchFamily="34" charset="0"/>
+                <a:ea typeface="Calibri" pitchFamily="34" charset="-122"/>
+                <a:cs typeface="Calibri" pitchFamily="34" charset="-120"/>
+              </a:rPr>
+              <a:t>₹5,000,000  ✓</a:t>
+            </a:r>
+            <a:endParaRPr lang="en-US" sz="1260" dirty="0"/>
           </a:p>
         </p:txBody>
       </p:sp>
       <p:pic>
         <p:nvPicPr>
-          <p:cNvPr id="5" name="Image 0" descr="s-sensitivity.png">    </p:cNvPr>
+          <p:cNvPr id="20" name="Image 0" descr="s-sensitivity.png">    </p:cNvPr>
           <p:cNvPicPr>
             <a:picLocks noChangeAspect="1"/>
           </p:cNvPicPr>
@@ -4012,8 +4758,8 @@
         </p:blipFill>
         <p:spPr>
           <a:xfrm>
-            <a:off x="713232" y="2249424"/>
-            <a:ext cx="5257800" cy="3008376"/>
+            <a:off x="6309360" y="2249424"/>
+            <a:ext cx="5120640" cy="2926080"/>
           </a:xfrm>
           <a:prstGeom prst="rect">
             <a:avLst/>
@@ -4022,14 +4768,14 @@
       </p:pic>
       <p:sp>
         <p:nvSpPr>
-          <p:cNvPr id="6" name="Text 3"/>
-          <p:cNvSpPr txBox="1"/>
-          <p:nvPr/>
-        </p:nvSpPr>
-        <p:spPr>
-          <a:xfrm>
-            <a:off x="713232" y="5321808"/>
-            <a:ext cx="5257800" cy="365760"/>
+          <p:cNvPr id="21" name="Text 18"/>
+          <p:cNvSpPr txBox="1"/>
+          <p:nvPr/>
+        </p:nvSpPr>
+        <p:spPr>
+          <a:xfrm>
+            <a:off x="6309360" y="5248656"/>
+            <a:ext cx="5120640" cy="365760"/>
           </a:xfrm>
           <a:prstGeom prst="rect">
             <a:avLst/>
@@ -4056,46 +4802,22 @@
                 <a:ea typeface="Calibri" pitchFamily="34" charset="-122"/>
                 <a:cs typeface="Calibri" pitchFamily="34" charset="-120"/>
               </a:rPr>
-              <a:t>Sensitivity — each parameter moved ±20% alone, sorted by swing.</a:t>
+              <a:t>Sensitivity — each parameter moved ±20% alone, sorted by how far the answer swings.</a:t>
             </a:r>
             <a:endParaRPr lang="en-US" sz="1020" dirty="0"/>
           </a:p>
         </p:txBody>
       </p:sp>
-      <p:pic>
-        <p:nvPicPr>
-          <p:cNvPr id="7" name="Image 1" descr="s-validation.png">    </p:cNvPr>
-          <p:cNvPicPr>
-            <a:picLocks noChangeAspect="1"/>
-          </p:cNvPicPr>
-          <p:nvPr/>
-        </p:nvPicPr>
-        <p:blipFill>
-          <a:blip r:embed="rId2"/>
-          <a:stretch>
-            <a:fillRect/>
-          </a:stretch>
-        </p:blipFill>
-        <p:spPr>
-          <a:xfrm>
-            <a:off x="6172200" y="2249424"/>
-            <a:ext cx="5257800" cy="3008376"/>
-          </a:xfrm>
-          <a:prstGeom prst="rect">
-            <a:avLst/>
-          </a:prstGeom>
-        </p:spPr>
-      </p:pic>
-      <p:sp>
-        <p:nvSpPr>
-          <p:cNvPr id="8" name="Text 4"/>
-          <p:cNvSpPr txBox="1"/>
-          <p:nvPr/>
-        </p:nvSpPr>
-        <p:spPr>
-          <a:xfrm>
-            <a:off x="6172200" y="5321808"/>
-            <a:ext cx="5257800" cy="365760"/>
+      <p:sp>
+        <p:nvSpPr>
+          <p:cNvPr id="22" name="Text 19"/>
+          <p:cNvSpPr txBox="1"/>
+          <p:nvPr/>
+        </p:nvSpPr>
+        <p:spPr>
+          <a:xfrm>
+            <a:off x="713232" y="4846320"/>
+            <a:ext cx="5257800" cy="274320"/>
           </a:xfrm>
           <a:prstGeom prst="rect">
             <a:avLst/>
@@ -4108,36 +4830,127 @@
           <a:lstStyle/>
           <a:p>
             <a:pPr indent="0" marL="0">
+              <a:buNone/>
+            </a:pPr>
+            <a:r>
+              <a:rPr lang="en-US" sz="1400" b="1" dirty="0">
+                <a:solidFill>
+                  <a:srgbClr val="12235B"/>
+                </a:solidFill>
+                <a:latin typeface="Calibri" pitchFamily="34" charset="0"/>
+                <a:ea typeface="Calibri" pitchFamily="34" charset="-122"/>
+                <a:cs typeface="Calibri" pitchFamily="34" charset="-120"/>
+              </a:rPr>
+              <a:t>Robustness to changing assumptions</a:t>
+            </a:r>
+            <a:endParaRPr lang="en-US" sz="1400" dirty="0"/>
+          </a:p>
+        </p:txBody>
+      </p:sp>
+      <p:sp>
+        <p:nvSpPr>
+          <p:cNvPr id="23" name="Text 20"/>
+          <p:cNvSpPr txBox="1"/>
+          <p:nvPr/>
+        </p:nvSpPr>
+        <p:spPr>
+          <a:xfrm>
+            <a:off x="713232" y="5175504"/>
+            <a:ext cx="5257800" cy="1005840"/>
+          </a:xfrm>
+          <a:prstGeom prst="rect">
+            <a:avLst/>
+          </a:prstGeom>
+          <a:noFill/>
+          <a:ln/>
+        </p:spPr>
+        <p:txBody>
+          <a:bodyPr wrap="square" lIns="0" tIns="0" rIns="0" bIns="0" rtlCol="0" anchor="t"/>
+          <a:lstStyle/>
+          <a:p>
+            <a:pPr marL="177800" indent="-177800">
               <a:lnSpc>
-                <a:spcPts val="1300"/>
+                <a:spcPts val="1523"/>
               </a:lnSpc>
-              <a:buNone/>
-            </a:pPr>
-            <a:r>
-              <a:rPr lang="en-US" sz="1020" i="1" dirty="0">
-                <a:solidFill>
-                  <a:srgbClr val="6B7A90"/>
-                </a:solidFill>
-                <a:latin typeface="Calibri" pitchFamily="34" charset="0"/>
-                <a:ea typeface="Calibri" pitchFamily="34" charset="-122"/>
-                <a:cs typeface="Calibri" pitchFamily="34" charset="-120"/>
-              </a:rPr>
-              <a:t>Validation — a zeroed input is caught, not silently returned as €0.</a:t>
-            </a:r>
-            <a:endParaRPr lang="en-US" sz="1020" dirty="0"/>
-          </a:p>
-        </p:txBody>
-      </p:sp>
-      <p:sp>
-        <p:nvSpPr>
-          <p:cNvPr id="9" name="Shape 5"/>
-          <p:cNvSpPr/>
-          <p:nvPr/>
-        </p:nvSpPr>
-        <p:spPr>
-          <a:xfrm>
-            <a:off x="713232" y="5760720"/>
-            <a:ext cx="10716768" cy="566928"/>
+              <a:spcAft>
+                <a:spcPts val="600"/>
+              </a:spcAft>
+              <a:buSzPct val="100000"/>
+              <a:buChar char="•"/>
+            </a:pPr>
+            <a:r>
+              <a:rPr lang="en-US" sz="1120" dirty="0">
+                <a:solidFill>
+                  <a:srgbClr val="1B2431"/>
+                </a:solidFill>
+                <a:latin typeface="Calibri" pitchFamily="34" charset="0"/>
+                <a:ea typeface="Calibri" pitchFamily="34" charset="-122"/>
+                <a:cs typeface="Calibri" pitchFamily="34" charset="-120"/>
+              </a:rPr>
+              <a:t>28 invalid inputs probed — 12 blocked, 10 flagged, none produce NaN</a:t>
+            </a:r>
+            <a:endParaRPr lang="en-US" sz="1120" dirty="0"/>
+          </a:p>
+          <a:p>
+            <a:pPr marL="177800" indent="-177800">
+              <a:lnSpc>
+                <a:spcPts val="1523"/>
+              </a:lnSpc>
+              <a:spcAft>
+                <a:spcPts val="600"/>
+              </a:spcAft>
+              <a:buSzPct val="100000"/>
+              <a:buChar char="•"/>
+            </a:pPr>
+            <a:r>
+              <a:rPr lang="en-US" sz="1120" dirty="0">
+                <a:solidFill>
+                  <a:srgbClr val="1B2431"/>
+                </a:solidFill>
+                <a:latin typeface="Calibri" pitchFamily="34" charset="0"/>
+                <a:ea typeface="Calibri" pitchFamily="34" charset="-122"/>
+                <a:cs typeface="Calibri" pitchFamily="34" charset="-120"/>
+              </a:rPr>
+              <a:t>Cost components reconcile exactly to scenario totals</a:t>
+            </a:r>
+            <a:endParaRPr lang="en-US" sz="1120" dirty="0"/>
+          </a:p>
+          <a:p>
+            <a:pPr marL="177800" indent="-177800">
+              <a:lnSpc>
+                <a:spcPts val="1523"/>
+              </a:lnSpc>
+              <a:spcAft>
+                <a:spcPts val="600"/>
+              </a:spcAft>
+              <a:buSzPct val="100000"/>
+              <a:buChar char="•"/>
+            </a:pPr>
+            <a:r>
+              <a:rPr lang="en-US" sz="1120" dirty="0">
+                <a:solidFill>
+                  <a:srgbClr val="1B2431"/>
+                </a:solidFill>
+                <a:latin typeface="Calibri" pitchFamily="34" charset="0"/>
+                <a:ea typeface="Calibri" pitchFamily="34" charset="-122"/>
+                <a:cs typeface="Calibri" pitchFamily="34" charset="-120"/>
+              </a:rPr>
+              <a:t>Break-even price re-solves to a net impact of zero</a:t>
+            </a:r>
+            <a:endParaRPr lang="en-US" sz="1120" dirty="0"/>
+          </a:p>
+        </p:txBody>
+      </p:sp>
+      <p:sp>
+        <p:nvSpPr>
+          <p:cNvPr id="24" name="Shape 21"/>
+          <p:cNvSpPr/>
+          <p:nvPr/>
+        </p:nvSpPr>
+        <p:spPr>
+          <a:xfrm>
+            <a:off x="6309360" y="5687568"/>
+            <a:ext cx="5120640" cy="566928"/>
           </a:xfrm>
           <a:prstGeom prst="roundRect">
             <a:avLst>
@@ -4145,26 +4958,26 @@
             </a:avLst>
           </a:prstGeom>
           <a:solidFill>
-            <a:srgbClr val="F1F8FD"/>
+            <a:srgbClr val="12235B"/>
           </a:solidFill>
           <a:ln w="12700">
             <a:solidFill>
-              <a:srgbClr val="F1F8FD"/>
-            </a:solidFill>
-            <a:prstDash val="solid"/>
-          </a:ln>
-        </p:spPr>
-      </p:sp>
-      <p:sp>
-        <p:nvSpPr>
-          <p:cNvPr id="10" name="Text 6"/>
-          <p:cNvSpPr txBox="1"/>
-          <p:nvPr/>
-        </p:nvSpPr>
-        <p:spPr>
-          <a:xfrm>
-            <a:off x="1005840" y="5852160"/>
-            <a:ext cx="548640" cy="365760"/>
+              <a:srgbClr val="12235B"/>
+            </a:solidFill>
+            <a:prstDash val="solid"/>
+          </a:ln>
+        </p:spPr>
+      </p:sp>
+      <p:sp>
+        <p:nvSpPr>
+          <p:cNvPr id="25" name="Text 22"/>
+          <p:cNvSpPr txBox="1"/>
+          <p:nvPr/>
+        </p:nvSpPr>
+        <p:spPr>
+          <a:xfrm>
+            <a:off x="6510528" y="5760720"/>
+            <a:ext cx="1554480" cy="274320"/>
           </a:xfrm>
           <a:prstGeom prst="rect">
             <a:avLst/>
@@ -4180,30 +4993,30 @@
               <a:buNone/>
             </a:pPr>
             <a:r>
-              <a:rPr lang="en-US" sz="1700" b="1" dirty="0">
-                <a:solidFill>
-                  <a:srgbClr val="4A63C8"/>
+              <a:rPr lang="en-US" sz="1500" b="1" dirty="0">
+                <a:solidFill>
+                  <a:srgbClr val="4FC3E8"/>
                 </a:solidFill>
                 <a:latin typeface="Cambria" pitchFamily="34" charset="0"/>
                 <a:ea typeface="Cambria" pitchFamily="34" charset="-122"/>
                 <a:cs typeface="Cambria" pitchFamily="34" charset="-120"/>
               </a:rPr>
-              <a:t>28</a:t>
-            </a:r>
-            <a:endParaRPr lang="en-US" sz="1700" dirty="0"/>
-          </a:p>
-        </p:txBody>
-      </p:sp>
-      <p:sp>
-        <p:nvSpPr>
-          <p:cNvPr id="11" name="Text 7"/>
-          <p:cNvSpPr txBox="1"/>
-          <p:nvPr/>
-        </p:nvSpPr>
-        <p:spPr>
-          <a:xfrm>
-            <a:off x="1572768" y="5925312"/>
-            <a:ext cx="1508760" cy="292608"/>
+              <a:t>&lt;100ms</a:t>
+            </a:r>
+            <a:endParaRPr lang="en-US" sz="1500" dirty="0"/>
+          </a:p>
+        </p:txBody>
+      </p:sp>
+      <p:sp>
+        <p:nvSpPr>
+          <p:cNvPr id="26" name="Text 23"/>
+          <p:cNvSpPr txBox="1"/>
+          <p:nvPr/>
+        </p:nvSpPr>
+        <p:spPr>
+          <a:xfrm>
+            <a:off x="6510528" y="6016752"/>
+            <a:ext cx="1600200" cy="201168"/>
           </a:xfrm>
           <a:prstGeom prst="rect">
             <a:avLst/>
@@ -4216,36 +5029,33 @@
           <a:lstStyle/>
           <a:p>
             <a:pPr indent="0" marL="0">
-              <a:lnSpc>
-                <a:spcPts val="1200"/>
-              </a:lnSpc>
-              <a:buNone/>
-            </a:pPr>
-            <a:r>
-              <a:rPr lang="en-US" sz="1020" dirty="0">
-                <a:solidFill>
-                  <a:srgbClr val="6B7A90"/>
-                </a:solidFill>
-                <a:latin typeface="Calibri" pitchFamily="34" charset="0"/>
-                <a:ea typeface="Calibri" pitchFamily="34" charset="-122"/>
-                <a:cs typeface="Calibri" pitchFamily="34" charset="-120"/>
-              </a:rPr>
-              <a:t>invalid inputs probed</a:t>
-            </a:r>
-            <a:endParaRPr lang="en-US" sz="1020" dirty="0"/>
-          </a:p>
-        </p:txBody>
-      </p:sp>
-      <p:sp>
-        <p:nvSpPr>
-          <p:cNvPr id="12" name="Text 8"/>
-          <p:cNvSpPr txBox="1"/>
-          <p:nvPr/>
-        </p:nvSpPr>
-        <p:spPr>
-          <a:xfrm>
-            <a:off x="3108960" y="5852160"/>
-            <a:ext cx="548640" cy="365760"/>
+              <a:buNone/>
+            </a:pPr>
+            <a:r>
+              <a:rPr lang="en-US" sz="960" dirty="0">
+                <a:solidFill>
+                  <a:srgbClr val="AFC4E4"/>
+                </a:solidFill>
+                <a:latin typeface="Calibri" pitchFamily="34" charset="0"/>
+                <a:ea typeface="Calibri" pitchFamily="34" charset="-122"/>
+                <a:cs typeface="Calibri" pitchFamily="34" charset="-120"/>
+              </a:rPr>
+              <a:t>recalculation</a:t>
+            </a:r>
+            <a:endParaRPr lang="en-US" sz="960" dirty="0"/>
+          </a:p>
+        </p:txBody>
+      </p:sp>
+      <p:sp>
+        <p:nvSpPr>
+          <p:cNvPr id="27" name="Text 24"/>
+          <p:cNvSpPr txBox="1"/>
+          <p:nvPr/>
+        </p:nvSpPr>
+        <p:spPr>
+          <a:xfrm>
+            <a:off x="8202168" y="5760720"/>
+            <a:ext cx="1554480" cy="274320"/>
           </a:xfrm>
           <a:prstGeom prst="rect">
             <a:avLst/>
@@ -4261,30 +5071,30 @@
               <a:buNone/>
             </a:pPr>
             <a:r>
-              <a:rPr lang="en-US" sz="1700" b="1" dirty="0">
-                <a:solidFill>
-                  <a:srgbClr val="4A63C8"/>
+              <a:rPr lang="en-US" sz="1500" b="1" dirty="0">
+                <a:solidFill>
+                  <a:srgbClr val="4FC3E8"/>
                 </a:solidFill>
                 <a:latin typeface="Cambria" pitchFamily="34" charset="0"/>
                 <a:ea typeface="Cambria" pitchFamily="34" charset="-122"/>
                 <a:cs typeface="Cambria" pitchFamily="34" charset="-120"/>
               </a:rPr>
-              <a:t>12</a:t>
-            </a:r>
-            <a:endParaRPr lang="en-US" sz="1700" dirty="0"/>
-          </a:p>
-        </p:txBody>
-      </p:sp>
-      <p:sp>
-        <p:nvSpPr>
-          <p:cNvPr id="13" name="Text 9"/>
-          <p:cNvSpPr txBox="1"/>
-          <p:nvPr/>
-        </p:nvSpPr>
-        <p:spPr>
-          <a:xfrm>
-            <a:off x="3675888" y="5925312"/>
-            <a:ext cx="1508760" cy="292608"/>
+              <a:t>38</a:t>
+            </a:r>
+            <a:endParaRPr lang="en-US" sz="1500" dirty="0"/>
+          </a:p>
+        </p:txBody>
+      </p:sp>
+      <p:sp>
+        <p:nvSpPr>
+          <p:cNvPr id="28" name="Text 25"/>
+          <p:cNvSpPr txBox="1"/>
+          <p:nvPr/>
+        </p:nvSpPr>
+        <p:spPr>
+          <a:xfrm>
+            <a:off x="8202168" y="6016752"/>
+            <a:ext cx="1600200" cy="201168"/>
           </a:xfrm>
           <a:prstGeom prst="rect">
             <a:avLst/>
@@ -4297,36 +5107,33 @@
           <a:lstStyle/>
           <a:p>
             <a:pPr indent="0" marL="0">
-              <a:lnSpc>
-                <a:spcPts val="1200"/>
-              </a:lnSpc>
-              <a:buNone/>
-            </a:pPr>
-            <a:r>
-              <a:rPr lang="en-US" sz="1020" dirty="0">
-                <a:solidFill>
-                  <a:srgbClr val="6B7A90"/>
-                </a:solidFill>
-                <a:latin typeface="Calibri" pitchFamily="34" charset="0"/>
-                <a:ea typeface="Calibri" pitchFamily="34" charset="-122"/>
-                <a:cs typeface="Calibri" pitchFamily="34" charset="-120"/>
-              </a:rPr>
-              <a:t>blocked outright</a:t>
-            </a:r>
-            <a:endParaRPr lang="en-US" sz="1020" dirty="0"/>
-          </a:p>
-        </p:txBody>
-      </p:sp>
-      <p:sp>
-        <p:nvSpPr>
-          <p:cNvPr id="14" name="Text 10"/>
-          <p:cNvSpPr txBox="1"/>
-          <p:nvPr/>
-        </p:nvSpPr>
-        <p:spPr>
-          <a:xfrm>
-            <a:off x="5212080" y="5852160"/>
-            <a:ext cx="548640" cy="365760"/>
+              <a:buNone/>
+            </a:pPr>
+            <a:r>
+              <a:rPr lang="en-US" sz="960" dirty="0">
+                <a:solidFill>
+                  <a:srgbClr val="AFC4E4"/>
+                </a:solidFill>
+                <a:latin typeface="Calibri" pitchFamily="34" charset="0"/>
+                <a:ea typeface="Calibri" pitchFamily="34" charset="-122"/>
+                <a:cs typeface="Calibri" pitchFamily="34" charset="-120"/>
+              </a:rPr>
+              <a:t>automated tests</a:t>
+            </a:r>
+            <a:endParaRPr lang="en-US" sz="960" dirty="0"/>
+          </a:p>
+        </p:txBody>
+      </p:sp>
+      <p:sp>
+        <p:nvSpPr>
+          <p:cNvPr id="29" name="Text 26"/>
+          <p:cNvSpPr txBox="1"/>
+          <p:nvPr/>
+        </p:nvSpPr>
+        <p:spPr>
+          <a:xfrm>
+            <a:off x="9893808" y="5760720"/>
+            <a:ext cx="1554480" cy="274320"/>
           </a:xfrm>
           <a:prstGeom prst="rect">
             <a:avLst/>
@@ -4342,30 +5149,30 @@
               <a:buNone/>
             </a:pPr>
             <a:r>
-              <a:rPr lang="en-US" sz="1700" b="1" dirty="0">
-                <a:solidFill>
-                  <a:srgbClr val="4A63C8"/>
+              <a:rPr lang="en-US" sz="1500" b="1" dirty="0">
+                <a:solidFill>
+                  <a:srgbClr val="4FC3E8"/>
                 </a:solidFill>
                 <a:latin typeface="Cambria" pitchFamily="34" charset="0"/>
                 <a:ea typeface="Cambria" pitchFamily="34" charset="-122"/>
                 <a:cs typeface="Cambria" pitchFamily="34" charset="-120"/>
               </a:rPr>
-              <a:t>10</a:t>
-            </a:r>
-            <a:endParaRPr lang="en-US" sz="1700" dirty="0"/>
-          </a:p>
-        </p:txBody>
-      </p:sp>
-      <p:sp>
-        <p:nvSpPr>
-          <p:cNvPr id="15" name="Text 11"/>
-          <p:cNvSpPr txBox="1"/>
-          <p:nvPr/>
-        </p:nvSpPr>
-        <p:spPr>
-          <a:xfrm>
-            <a:off x="5779008" y="5925312"/>
-            <a:ext cx="1508760" cy="292608"/>
+              <a:t>0</a:t>
+            </a:r>
+            <a:endParaRPr lang="en-US" sz="1500" dirty="0"/>
+          </a:p>
+        </p:txBody>
+      </p:sp>
+      <p:sp>
+        <p:nvSpPr>
+          <p:cNvPr id="30" name="Text 27"/>
+          <p:cNvSpPr txBox="1"/>
+          <p:nvPr/>
+        </p:nvSpPr>
+        <p:spPr>
+          <a:xfrm>
+            <a:off x="9893808" y="6016752"/>
+            <a:ext cx="1600200" cy="201168"/>
           </a:xfrm>
           <a:prstGeom prst="rect">
             <a:avLst/>
@@ -4378,191 +5185,26 @@
           <a:lstStyle/>
           <a:p>
             <a:pPr indent="0" marL="0">
-              <a:lnSpc>
-                <a:spcPts val="1200"/>
-              </a:lnSpc>
-              <a:buNone/>
-            </a:pPr>
-            <a:r>
-              <a:rPr lang="en-US" sz="1020" dirty="0">
-                <a:solidFill>
-                  <a:srgbClr val="6B7A90"/>
-                </a:solidFill>
-                <a:latin typeface="Calibri" pitchFamily="34" charset="0"/>
-                <a:ea typeface="Calibri" pitchFamily="34" charset="-122"/>
-                <a:cs typeface="Calibri" pitchFamily="34" charset="-120"/>
-              </a:rPr>
-              <a:t>flagged as suspect</a:t>
-            </a:r>
-            <a:endParaRPr lang="en-US" sz="1020" dirty="0"/>
-          </a:p>
-        </p:txBody>
-      </p:sp>
-      <p:sp>
-        <p:nvSpPr>
-          <p:cNvPr id="16" name="Text 12"/>
-          <p:cNvSpPr txBox="1"/>
-          <p:nvPr/>
-        </p:nvSpPr>
-        <p:spPr>
-          <a:xfrm>
-            <a:off x="7315200" y="5852160"/>
-            <a:ext cx="548640" cy="365760"/>
-          </a:xfrm>
-          <a:prstGeom prst="rect">
-            <a:avLst/>
-          </a:prstGeom>
-          <a:noFill/>
-          <a:ln/>
-        </p:spPr>
-        <p:txBody>
-          <a:bodyPr wrap="square" lIns="0" tIns="0" rIns="0" bIns="0" rtlCol="0" anchor="ctr"/>
-          <a:lstStyle/>
-          <a:p>
-            <a:pPr indent="0" marL="0">
-              <a:buNone/>
-            </a:pPr>
-            <a:r>
-              <a:rPr lang="en-US" sz="1700" b="1" dirty="0">
-                <a:solidFill>
-                  <a:srgbClr val="4A63C8"/>
-                </a:solidFill>
-                <a:latin typeface="Cambria" pitchFamily="34" charset="0"/>
-                <a:ea typeface="Cambria" pitchFamily="34" charset="-122"/>
-                <a:cs typeface="Cambria" pitchFamily="34" charset="-120"/>
-              </a:rPr>
-              <a:t>0</a:t>
-            </a:r>
-            <a:endParaRPr lang="en-US" sz="1700" dirty="0"/>
-          </a:p>
-        </p:txBody>
-      </p:sp>
-      <p:sp>
-        <p:nvSpPr>
-          <p:cNvPr id="17" name="Text 13"/>
-          <p:cNvSpPr txBox="1"/>
-          <p:nvPr/>
-        </p:nvSpPr>
-        <p:spPr>
-          <a:xfrm>
-            <a:off x="7882128" y="5925312"/>
-            <a:ext cx="1508760" cy="292608"/>
-          </a:xfrm>
-          <a:prstGeom prst="rect">
-            <a:avLst/>
-          </a:prstGeom>
-          <a:noFill/>
-          <a:ln/>
-        </p:spPr>
-        <p:txBody>
-          <a:bodyPr wrap="square" lIns="0" tIns="0" rIns="0" bIns="0" rtlCol="0" anchor="ctr"/>
-          <a:lstStyle/>
-          <a:p>
-            <a:pPr indent="0" marL="0">
-              <a:lnSpc>
-                <a:spcPts val="1200"/>
-              </a:lnSpc>
-              <a:buNone/>
-            </a:pPr>
-            <a:r>
-              <a:rPr lang="en-US" sz="1020" dirty="0">
-                <a:solidFill>
-                  <a:srgbClr val="6B7A90"/>
-                </a:solidFill>
-                <a:latin typeface="Calibri" pitchFamily="34" charset="0"/>
-                <a:ea typeface="Calibri" pitchFamily="34" charset="-122"/>
-                <a:cs typeface="Calibri" pitchFamily="34" charset="-120"/>
-              </a:rPr>
-              <a:t>produce NaN or a crash</a:t>
-            </a:r>
-            <a:endParaRPr lang="en-US" sz="1020" dirty="0"/>
-          </a:p>
-        </p:txBody>
-      </p:sp>
-      <p:sp>
-        <p:nvSpPr>
-          <p:cNvPr id="18" name="Text 14"/>
-          <p:cNvSpPr txBox="1"/>
-          <p:nvPr/>
-        </p:nvSpPr>
-        <p:spPr>
-          <a:xfrm>
-            <a:off x="9418320" y="5852160"/>
-            <a:ext cx="548640" cy="365760"/>
-          </a:xfrm>
-          <a:prstGeom prst="rect">
-            <a:avLst/>
-          </a:prstGeom>
-          <a:noFill/>
-          <a:ln/>
-        </p:spPr>
-        <p:txBody>
-          <a:bodyPr wrap="square" lIns="0" tIns="0" rIns="0" bIns="0" rtlCol="0" anchor="ctr"/>
-          <a:lstStyle/>
-          <a:p>
-            <a:pPr indent="0" marL="0">
-              <a:buNone/>
-            </a:pPr>
-            <a:r>
-              <a:rPr lang="en-US" sz="1700" b="1" dirty="0">
-                <a:solidFill>
-                  <a:srgbClr val="4A63C8"/>
-                </a:solidFill>
-                <a:latin typeface="Cambria" pitchFamily="34" charset="0"/>
-                <a:ea typeface="Cambria" pitchFamily="34" charset="-122"/>
-                <a:cs typeface="Cambria" pitchFamily="34" charset="-120"/>
-              </a:rPr>
-              <a:t>38</a:t>
-            </a:r>
-            <a:endParaRPr lang="en-US" sz="1700" dirty="0"/>
-          </a:p>
-        </p:txBody>
-      </p:sp>
-      <p:sp>
-        <p:nvSpPr>
-          <p:cNvPr id="19" name="Text 15"/>
-          <p:cNvSpPr txBox="1"/>
-          <p:nvPr/>
-        </p:nvSpPr>
-        <p:spPr>
-          <a:xfrm>
-            <a:off x="9985248" y="5925312"/>
-            <a:ext cx="1508760" cy="292608"/>
-          </a:xfrm>
-          <a:prstGeom prst="rect">
-            <a:avLst/>
-          </a:prstGeom>
-          <a:noFill/>
-          <a:ln/>
-        </p:spPr>
-        <p:txBody>
-          <a:bodyPr wrap="square" lIns="0" tIns="0" rIns="0" bIns="0" rtlCol="0" anchor="ctr"/>
-          <a:lstStyle/>
-          <a:p>
-            <a:pPr indent="0" marL="0">
-              <a:lnSpc>
-                <a:spcPts val="1200"/>
-              </a:lnSpc>
-              <a:buNone/>
-            </a:pPr>
-            <a:r>
-              <a:rPr lang="en-US" sz="1020" dirty="0">
-                <a:solidFill>
-                  <a:srgbClr val="6B7A90"/>
-                </a:solidFill>
-                <a:latin typeface="Calibri" pitchFamily="34" charset="0"/>
-                <a:ea typeface="Calibri" pitchFamily="34" charset="-122"/>
-                <a:cs typeface="Calibri" pitchFamily="34" charset="-120"/>
-              </a:rPr>
-              <a:t>automated tests</a:t>
-            </a:r>
-            <a:endParaRPr lang="en-US" sz="1020" dirty="0"/>
-          </a:p>
-        </p:txBody>
-      </p:sp>
-      <p:sp>
-        <p:nvSpPr>
-          <p:cNvPr id="20" name="Text 16"/>
+              <a:buNone/>
+            </a:pPr>
+            <a:r>
+              <a:rPr lang="en-US" sz="960" dirty="0">
+                <a:solidFill>
+                  <a:srgbClr val="AFC4E4"/>
+                </a:solidFill>
+                <a:latin typeface="Calibri" pitchFamily="34" charset="0"/>
+                <a:ea typeface="Calibri" pitchFamily="34" charset="-122"/>
+                <a:cs typeface="Calibri" pitchFamily="34" charset="-120"/>
+              </a:rPr>
+              <a:t>network calls</a:t>
+            </a:r>
+            <a:endParaRPr lang="en-US" sz="960" dirty="0"/>
+          </a:p>
+        </p:txBody>
+      </p:sp>
+      <p:sp>
+        <p:nvSpPr>
+          <p:cNvPr id="31" name="Text 28"/>
           <p:cNvSpPr txBox="1"/>
           <p:nvPr/>
         </p:nvSpPr>
@@ -4601,7 +5243,7 @@
       </p:sp>
       <p:sp>
         <p:nvSpPr>
-          <p:cNvPr id="21" name="Shape 17"/>
+          <p:cNvPr id="32" name="Shape 29"/>
           <p:cNvSpPr/>
           <p:nvPr/>
         </p:nvSpPr>
@@ -4624,7 +5266,7 @@
       </p:sp>
       <p:sp>
         <p:nvSpPr>
-          <p:cNvPr id="22" name="Text 18"/>
+          <p:cNvPr id="33" name="Text 30"/>
           <p:cNvSpPr txBox="1"/>
           <p:nvPr/>
         </p:nvSpPr>
@@ -6361,7 +7003,7 @@
                 <a:ea typeface="Calibri" pitchFamily="34" charset="-122"/>
                 <a:cs typeface="Calibri" pitchFamily="34" charset="-120"/>
               </a:rPr>
-              <a:t>Known limits</a:t>
+              <a:t>Known limits &amp; data gaps</a:t>
             </a:r>
             <a:endParaRPr lang="en-US" sz="1400" dirty="0"/>
           </a:p>
@@ -6430,7 +7072,7 @@
                 <a:ea typeface="Calibri" pitchFamily="34" charset="-122"/>
                 <a:cs typeface="Calibri" pitchFamily="34" charset="-120"/>
               </a:rPr>
-              <a:t>Single country per model</a:t>
+              <a:t>Single country per model — no multi-market roll-up yet</a:t>
             </a:r>
             <a:endParaRPr lang="en-US" sz="1140" dirty="0"/>
           </a:p>
@@ -6454,7 +7096,7 @@
                 <a:ea typeface="Calibri" pitchFamily="34" charset="-122"/>
                 <a:cs typeface="Calibri" pitchFamily="34" charset="-120"/>
               </a:rPr>
-              <a:t>Subgroups inherit parent parameters</a:t>
+              <a:t>Subgroups inherit parent parameters rather than their own</a:t>
             </a:r>
             <a:endParaRPr lang="en-US" sz="1140" dirty="0"/>
           </a:p>
@@ -6478,7 +7120,7 @@
                 <a:ea typeface="Calibri" pitchFamily="34" charset="-122"/>
                 <a:cs typeface="Calibri" pitchFamily="34" charset="-120"/>
               </a:rPr>
-              <a:t>Market share redistributes proportionally</a:t>
+              <a:t>Market share redistributes proportionally, not by displacement</a:t>
             </a:r>
             <a:endParaRPr lang="en-US" sz="1140" dirty="0"/>
           </a:p>
@@ -6526,7 +7168,31 @@
                 <a:ea typeface="Calibri" pitchFamily="34" charset="-122"/>
                 <a:cs typeface="Calibri" pitchFamily="34" charset="-120"/>
               </a:rPr>
-              <a:t>Demo values are illustrative, not sourced estimates</a:t>
+              <a:t>Data gap: no validated country cost set — demo values are illustrative</a:t>
+            </a:r>
+            <a:endParaRPr lang="en-US" sz="1140" dirty="0"/>
+          </a:p>
+          <a:p>
+            <a:pPr marL="177800" indent="-177800">
+              <a:lnSpc>
+                <a:spcPts val="1550"/>
+              </a:lnSpc>
+              <a:spcAft>
+                <a:spcPts val="600"/>
+              </a:spcAft>
+              <a:buSzPct val="100000"/>
+              <a:buChar char="•"/>
+            </a:pPr>
+            <a:r>
+              <a:rPr lang="en-US" sz="1140" dirty="0">
+                <a:solidFill>
+                  <a:srgbClr val="1B2431"/>
+                </a:solidFill>
+                <a:latin typeface="Calibri" pitchFamily="34" charset="0"/>
+                <a:ea typeface="Calibri" pitchFamily="34" charset="-122"/>
+                <a:cs typeface="Calibri" pitchFamily="34" charset="-120"/>
+              </a:rPr>
+              <a:t>Data gap: clinical parameters not yet expert-reviewed</a:t>
             </a:r>
             <a:endParaRPr lang="en-US" sz="1140" dirty="0"/>
           </a:p>
@@ -17979,14 +18645,41 @@
       </p:sp>
       <p:sp>
         <p:nvSpPr>
-          <p:cNvPr id="4" name="Text 2"/>
-          <p:cNvSpPr txBox="1"/>
-          <p:nvPr/>
-        </p:nvSpPr>
-        <p:spPr>
-          <a:xfrm>
-            <a:off x="713232" y="1572768"/>
-            <a:ext cx="8778240" cy="402336"/>
+          <p:cNvPr id="4" name="Shape 2"/>
+          <p:cNvSpPr/>
+          <p:nvPr/>
+        </p:nvSpPr>
+        <p:spPr>
+          <a:xfrm>
+            <a:off x="713232" y="1664208"/>
+            <a:ext cx="10844784" cy="1572768"/>
+          </a:xfrm>
+          <a:prstGeom prst="roundRect">
+            <a:avLst>
+              <a:gd name="adj" fmla="val 4651"/>
+            </a:avLst>
+          </a:prstGeom>
+          <a:solidFill>
+            <a:srgbClr val="F1F8FD"/>
+          </a:solidFill>
+          <a:ln w="12700">
+            <a:solidFill>
+              <a:srgbClr val="DCEDF8"/>
+            </a:solidFill>
+            <a:prstDash val="solid"/>
+          </a:ln>
+        </p:spPr>
+      </p:sp>
+      <p:sp>
+        <p:nvSpPr>
+          <p:cNvPr id="5" name="Text 3"/>
+          <p:cNvSpPr txBox="1"/>
+          <p:nvPr/>
+        </p:nvSpPr>
+        <p:spPr>
+          <a:xfrm>
+            <a:off x="896112" y="1755648"/>
+            <a:ext cx="8229600" cy="219456"/>
           </a:xfrm>
           <a:prstGeom prst="rect">
             <a:avLst/>
@@ -17999,13 +18692,10 @@
           <a:lstStyle/>
           <a:p>
             <a:pPr indent="0" marL="0">
-              <a:lnSpc>
-                <a:spcPts val="1900"/>
-              </a:lnSpc>
-              <a:buNone/>
-            </a:pPr>
-            <a:r>
-              <a:rPr lang="en-US" sz="1400" dirty="0">
+              <a:buNone/>
+            </a:pPr>
+            <a:r>
+              <a:rPr lang="en-US" sz="960" b="1" spc="110" kern="0" dirty="0">
                 <a:solidFill>
                   <a:srgbClr val="6B7A90"/>
                 </a:solidFill>
@@ -18013,46 +18703,673 @@
                 <a:ea typeface="Calibri" pitchFamily="34" charset="-122"/>
                 <a:cs typeface="Calibri" pitchFamily="34" charset="-120"/>
               </a:rPr>
-              <a:t>The calculation runs entirely in the browser. The server exists for the things a browser cannot do: reach third-party APIs, hold a key, and persist.</a:t>
-            </a:r>
-            <a:endParaRPr lang="en-US" sz="1400" dirty="0"/>
-          </a:p>
-        </p:txBody>
-      </p:sp>
-      <p:pic>
-        <p:nvPicPr>
-          <p:cNvPr id="5" name="Image 0" descr="dgm-01-system-architecture.png">    </p:cNvPr>
-          <p:cNvPicPr>
-            <a:picLocks noChangeAspect="1"/>
-          </p:cNvPicPr>
-          <p:nvPr/>
-        </p:nvPicPr>
-        <p:blipFill>
-          <a:blip r:embed="rId1"/>
-          <a:stretch>
-            <a:fillRect/>
-          </a:stretch>
-        </p:blipFill>
-        <p:spPr>
-          <a:xfrm>
-            <a:off x="713232" y="2194560"/>
-            <a:ext cx="7589520" cy="3033979"/>
-          </a:xfrm>
-          <a:prstGeom prst="rect">
-            <a:avLst/>
-          </a:prstGeom>
-        </p:spPr>
-      </p:pic>
-      <p:sp>
-        <p:nvSpPr>
-          <p:cNvPr id="6" name="Text 3"/>
-          <p:cNvSpPr txBox="1"/>
-          <p:nvPr/>
-        </p:nvSpPr>
-        <p:spPr>
-          <a:xfrm>
-            <a:off x="8686800" y="2231136"/>
-            <a:ext cx="2788920" cy="274320"/>
+              <a:t>BROWSER  ·  REACT SPA — THE MODEL RUNS HERE, WITH NO NETWORK CALL</a:t>
+            </a:r>
+            <a:endParaRPr lang="en-US" sz="960" dirty="0"/>
+          </a:p>
+        </p:txBody>
+      </p:sp>
+      <p:sp>
+        <p:nvSpPr>
+          <p:cNvPr id="6" name="Shape 4"/>
+          <p:cNvSpPr/>
+          <p:nvPr/>
+        </p:nvSpPr>
+        <p:spPr>
+          <a:xfrm>
+            <a:off x="804672" y="1956816"/>
+            <a:ext cx="2487168" cy="585216"/>
+          </a:xfrm>
+          <a:prstGeom prst="roundRect">
+            <a:avLst>
+              <a:gd name="adj" fmla="val 9375"/>
+            </a:avLst>
+          </a:prstGeom>
+          <a:solidFill>
+            <a:srgbClr val="DCEDF8"/>
+          </a:solidFill>
+          <a:ln w="13970">
+            <a:solidFill>
+              <a:srgbClr val="9FD9F0"/>
+            </a:solidFill>
+            <a:prstDash val="solid"/>
+          </a:ln>
+        </p:spPr>
+      </p:sp>
+      <p:sp>
+        <p:nvSpPr>
+          <p:cNvPr id="7" name="Text 5"/>
+          <p:cNvSpPr txBox="1"/>
+          <p:nvPr/>
+        </p:nvSpPr>
+        <p:spPr>
+          <a:xfrm>
+            <a:off x="914400" y="2048256"/>
+            <a:ext cx="2267712" cy="256032"/>
+          </a:xfrm>
+          <a:prstGeom prst="rect">
+            <a:avLst/>
+          </a:prstGeom>
+          <a:noFill/>
+          <a:ln/>
+        </p:spPr>
+        <p:txBody>
+          <a:bodyPr wrap="square" lIns="0" tIns="0" rIns="0" bIns="0" rtlCol="0" anchor="ctr"/>
+          <a:lstStyle/>
+          <a:p>
+            <a:pPr algn="ctr" indent="0" marL="0">
+              <a:buNone/>
+            </a:pPr>
+            <a:r>
+              <a:rPr lang="en-US" sz="1240" b="1" dirty="0">
+                <a:solidFill>
+                  <a:srgbClr val="12235B"/>
+                </a:solidFill>
+                <a:latin typeface="Calibri" pitchFamily="34" charset="0"/>
+                <a:ea typeface="Calibri" pitchFamily="34" charset="-122"/>
+                <a:cs typeface="Calibri" pitchFamily="34" charset="-120"/>
+              </a:rPr>
+              <a:t>Input tabs</a:t>
+            </a:r>
+            <a:endParaRPr lang="en-US" sz="1240" dirty="0"/>
+          </a:p>
+        </p:txBody>
+      </p:sp>
+      <p:sp>
+        <p:nvSpPr>
+          <p:cNvPr id="8" name="Text 6"/>
+          <p:cNvSpPr txBox="1"/>
+          <p:nvPr/>
+        </p:nvSpPr>
+        <p:spPr>
+          <a:xfrm>
+            <a:off x="896112" y="2286000"/>
+            <a:ext cx="2304288" cy="201168"/>
+          </a:xfrm>
+          <a:prstGeom prst="rect">
+            <a:avLst/>
+          </a:prstGeom>
+          <a:noFill/>
+          <a:ln/>
+        </p:spPr>
+        <p:txBody>
+          <a:bodyPr wrap="square" lIns="0" tIns="0" rIns="0" bIns="0" rtlCol="0" anchor="ctr"/>
+          <a:lstStyle/>
+          <a:p>
+            <a:pPr algn="ctr" indent="0" marL="0">
+              <a:buNone/>
+            </a:pPr>
+            <a:r>
+              <a:rPr lang="en-US" sz="940" dirty="0">
+                <a:solidFill>
+                  <a:srgbClr val="6B7A90"/>
+                </a:solidFill>
+                <a:latin typeface="Calibri" pitchFamily="34" charset="0"/>
+                <a:ea typeface="Calibri" pitchFamily="34" charset="-122"/>
+                <a:cs typeface="Calibri" pitchFamily="34" charset="-120"/>
+              </a:rPr>
+              <a:t>6 guided steps</a:t>
+            </a:r>
+            <a:endParaRPr lang="en-US" sz="940" dirty="0"/>
+          </a:p>
+        </p:txBody>
+      </p:sp>
+      <p:sp>
+        <p:nvSpPr>
+          <p:cNvPr id="9" name="Shape 7"/>
+          <p:cNvSpPr/>
+          <p:nvPr/>
+        </p:nvSpPr>
+        <p:spPr>
+          <a:xfrm>
+            <a:off x="3566160" y="1956816"/>
+            <a:ext cx="2487168" cy="585216"/>
+          </a:xfrm>
+          <a:prstGeom prst="roundRect">
+            <a:avLst>
+              <a:gd name="adj" fmla="val 9375"/>
+            </a:avLst>
+          </a:prstGeom>
+          <a:solidFill>
+            <a:srgbClr val="4FC3E8"/>
+          </a:solidFill>
+          <a:ln w="13970">
+            <a:solidFill>
+              <a:srgbClr val="4FC3E8"/>
+            </a:solidFill>
+            <a:prstDash val="solid"/>
+          </a:ln>
+        </p:spPr>
+      </p:sp>
+      <p:sp>
+        <p:nvSpPr>
+          <p:cNvPr id="10" name="Text 8"/>
+          <p:cNvSpPr txBox="1"/>
+          <p:nvPr/>
+        </p:nvSpPr>
+        <p:spPr>
+          <a:xfrm>
+            <a:off x="3675888" y="2048256"/>
+            <a:ext cx="2267712" cy="256032"/>
+          </a:xfrm>
+          <a:prstGeom prst="rect">
+            <a:avLst/>
+          </a:prstGeom>
+          <a:noFill/>
+          <a:ln/>
+        </p:spPr>
+        <p:txBody>
+          <a:bodyPr wrap="square" lIns="0" tIns="0" rIns="0" bIns="0" rtlCol="0" anchor="ctr"/>
+          <a:lstStyle/>
+          <a:p>
+            <a:pPr algn="ctr" indent="0" marL="0">
+              <a:buNone/>
+            </a:pPr>
+            <a:r>
+              <a:rPr lang="en-US" sz="1240" b="1" dirty="0">
+                <a:solidFill>
+                  <a:srgbClr val="FFFFFF"/>
+                </a:solidFill>
+                <a:latin typeface="Calibri" pitchFamily="34" charset="0"/>
+                <a:ea typeface="Calibri" pitchFamily="34" charset="-122"/>
+                <a:cs typeface="Calibri" pitchFamily="34" charset="-120"/>
+              </a:rPr>
+              <a:t>Calculation engine</a:t>
+            </a:r>
+            <a:endParaRPr lang="en-US" sz="1240" dirty="0"/>
+          </a:p>
+        </p:txBody>
+      </p:sp>
+      <p:sp>
+        <p:nvSpPr>
+          <p:cNvPr id="11" name="Text 9"/>
+          <p:cNvSpPr txBox="1"/>
+          <p:nvPr/>
+        </p:nvSpPr>
+        <p:spPr>
+          <a:xfrm>
+            <a:off x="3657600" y="2286000"/>
+            <a:ext cx="2304288" cy="201168"/>
+          </a:xfrm>
+          <a:prstGeom prst="rect">
+            <a:avLst/>
+          </a:prstGeom>
+          <a:noFill/>
+          <a:ln/>
+        </p:spPr>
+        <p:txBody>
+          <a:bodyPr wrap="square" lIns="0" tIns="0" rIns="0" bIns="0" rtlCol="0" anchor="ctr"/>
+          <a:lstStyle/>
+          <a:p>
+            <a:pPr algn="ctr" indent="0" marL="0">
+              <a:buNone/>
+            </a:pPr>
+            <a:r>
+              <a:rPr lang="en-US" sz="940" dirty="0">
+                <a:solidFill>
+                  <a:srgbClr val="6B7A90"/>
+                </a:solidFill>
+                <a:latin typeface="Calibri" pitchFamily="34" charset="0"/>
+                <a:ea typeface="Calibri" pitchFamily="34" charset="-122"/>
+                <a:cs typeface="Calibri" pitchFamily="34" charset="-120"/>
+              </a:rPr>
+              <a:t>biaEngine.js · 11 functions</a:t>
+            </a:r>
+            <a:endParaRPr lang="en-US" sz="940" dirty="0"/>
+          </a:p>
+        </p:txBody>
+      </p:sp>
+      <p:sp>
+        <p:nvSpPr>
+          <p:cNvPr id="12" name="Shape 10"/>
+          <p:cNvSpPr/>
+          <p:nvPr/>
+        </p:nvSpPr>
+        <p:spPr>
+          <a:xfrm>
+            <a:off x="6327648" y="1956816"/>
+            <a:ext cx="2487168" cy="585216"/>
+          </a:xfrm>
+          <a:prstGeom prst="roundRect">
+            <a:avLst>
+              <a:gd name="adj" fmla="val 9375"/>
+            </a:avLst>
+          </a:prstGeom>
+          <a:solidFill>
+            <a:srgbClr val="DCEDF8"/>
+          </a:solidFill>
+          <a:ln w="13970">
+            <a:solidFill>
+              <a:srgbClr val="9FD9F0"/>
+            </a:solidFill>
+            <a:prstDash val="solid"/>
+          </a:ln>
+        </p:spPr>
+      </p:sp>
+      <p:sp>
+        <p:nvSpPr>
+          <p:cNvPr id="13" name="Text 11"/>
+          <p:cNvSpPr txBox="1"/>
+          <p:nvPr/>
+        </p:nvSpPr>
+        <p:spPr>
+          <a:xfrm>
+            <a:off x="6437376" y="2048256"/>
+            <a:ext cx="2267712" cy="256032"/>
+          </a:xfrm>
+          <a:prstGeom prst="rect">
+            <a:avLst/>
+          </a:prstGeom>
+          <a:noFill/>
+          <a:ln/>
+        </p:spPr>
+        <p:txBody>
+          <a:bodyPr wrap="square" lIns="0" tIns="0" rIns="0" bIns="0" rtlCol="0" anchor="ctr"/>
+          <a:lstStyle/>
+          <a:p>
+            <a:pPr algn="ctr" indent="0" marL="0">
+              <a:buNone/>
+            </a:pPr>
+            <a:r>
+              <a:rPr lang="en-US" sz="1240" b="1" dirty="0">
+                <a:solidFill>
+                  <a:srgbClr val="12235B"/>
+                </a:solidFill>
+                <a:latin typeface="Calibri" pitchFamily="34" charset="0"/>
+                <a:ea typeface="Calibri" pitchFamily="34" charset="-122"/>
+                <a:cs typeface="Calibri" pitchFamily="34" charset="-120"/>
+              </a:rPr>
+              <a:t>Results</a:t>
+            </a:r>
+            <a:endParaRPr lang="en-US" sz="1240" dirty="0"/>
+          </a:p>
+        </p:txBody>
+      </p:sp>
+      <p:sp>
+        <p:nvSpPr>
+          <p:cNvPr id="14" name="Text 12"/>
+          <p:cNvSpPr txBox="1"/>
+          <p:nvPr/>
+        </p:nvSpPr>
+        <p:spPr>
+          <a:xfrm>
+            <a:off x="6419088" y="2286000"/>
+            <a:ext cx="2304288" cy="201168"/>
+          </a:xfrm>
+          <a:prstGeom prst="rect">
+            <a:avLst/>
+          </a:prstGeom>
+          <a:noFill/>
+          <a:ln/>
+        </p:spPr>
+        <p:txBody>
+          <a:bodyPr wrap="square" lIns="0" tIns="0" rIns="0" bIns="0" rtlCol="0" anchor="ctr"/>
+          <a:lstStyle/>
+          <a:p>
+            <a:pPr algn="ctr" indent="0" marL="0">
+              <a:buNone/>
+            </a:pPr>
+            <a:r>
+              <a:rPr lang="en-US" sz="940" dirty="0">
+                <a:solidFill>
+                  <a:srgbClr val="6B7A90"/>
+                </a:solidFill>
+                <a:latin typeface="Calibri" pitchFamily="34" charset="0"/>
+                <a:ea typeface="Calibri" pitchFamily="34" charset="-122"/>
+                <a:cs typeface="Calibri" pitchFamily="34" charset="-120"/>
+              </a:rPr>
+              <a:t>7 views</a:t>
+            </a:r>
+            <a:endParaRPr lang="en-US" sz="940" dirty="0"/>
+          </a:p>
+        </p:txBody>
+      </p:sp>
+      <p:sp>
+        <p:nvSpPr>
+          <p:cNvPr id="15" name="Shape 13"/>
+          <p:cNvSpPr/>
+          <p:nvPr/>
+        </p:nvSpPr>
+        <p:spPr>
+          <a:xfrm>
+            <a:off x="9089136" y="1956816"/>
+            <a:ext cx="2487168" cy="585216"/>
+          </a:xfrm>
+          <a:prstGeom prst="roundRect">
+            <a:avLst>
+              <a:gd name="adj" fmla="val 9375"/>
+            </a:avLst>
+          </a:prstGeom>
+          <a:solidFill>
+            <a:srgbClr val="DCEDF8"/>
+          </a:solidFill>
+          <a:ln w="13970">
+            <a:solidFill>
+              <a:srgbClr val="9FD9F0"/>
+            </a:solidFill>
+            <a:prstDash val="solid"/>
+          </a:ln>
+        </p:spPr>
+      </p:sp>
+      <p:sp>
+        <p:nvSpPr>
+          <p:cNvPr id="16" name="Text 14"/>
+          <p:cNvSpPr txBox="1"/>
+          <p:nvPr/>
+        </p:nvSpPr>
+        <p:spPr>
+          <a:xfrm>
+            <a:off x="9198864" y="2048256"/>
+            <a:ext cx="2267712" cy="256032"/>
+          </a:xfrm>
+          <a:prstGeom prst="rect">
+            <a:avLst/>
+          </a:prstGeom>
+          <a:noFill/>
+          <a:ln/>
+        </p:spPr>
+        <p:txBody>
+          <a:bodyPr wrap="square" lIns="0" tIns="0" rIns="0" bIns="0" rtlCol="0" anchor="ctr"/>
+          <a:lstStyle/>
+          <a:p>
+            <a:pPr algn="ctr" indent="0" marL="0">
+              <a:buNone/>
+            </a:pPr>
+            <a:r>
+              <a:rPr lang="en-US" sz="1240" b="1" dirty="0">
+                <a:solidFill>
+                  <a:srgbClr val="12235B"/>
+                </a:solidFill>
+                <a:latin typeface="Calibri" pitchFamily="34" charset="0"/>
+                <a:ea typeface="Calibri" pitchFamily="34" charset="-122"/>
+                <a:cs typeface="Calibri" pitchFamily="34" charset="-120"/>
+              </a:rPr>
+              <a:t>Exports</a:t>
+            </a:r>
+            <a:endParaRPr lang="en-US" sz="1240" dirty="0"/>
+          </a:p>
+        </p:txBody>
+      </p:sp>
+      <p:sp>
+        <p:nvSpPr>
+          <p:cNvPr id="17" name="Text 15"/>
+          <p:cNvSpPr txBox="1"/>
+          <p:nvPr/>
+        </p:nvSpPr>
+        <p:spPr>
+          <a:xfrm>
+            <a:off x="9180576" y="2286000"/>
+            <a:ext cx="2304288" cy="201168"/>
+          </a:xfrm>
+          <a:prstGeom prst="rect">
+            <a:avLst/>
+          </a:prstGeom>
+          <a:noFill/>
+          <a:ln/>
+        </p:spPr>
+        <p:txBody>
+          <a:bodyPr wrap="square" lIns="0" tIns="0" rIns="0" bIns="0" rtlCol="0" anchor="ctr"/>
+          <a:lstStyle/>
+          <a:p>
+            <a:pPr algn="ctr" indent="0" marL="0">
+              <a:buNone/>
+            </a:pPr>
+            <a:r>
+              <a:rPr lang="en-US" sz="940" dirty="0">
+                <a:solidFill>
+                  <a:srgbClr val="6B7A90"/>
+                </a:solidFill>
+                <a:latin typeface="Calibri" pitchFamily="34" charset="0"/>
+                <a:ea typeface="Calibri" pitchFamily="34" charset="-122"/>
+                <a:cs typeface="Calibri" pitchFamily="34" charset="-120"/>
+              </a:rPr>
+              <a:t>PDF · Excel</a:t>
+            </a:r>
+            <a:endParaRPr lang="en-US" sz="940" dirty="0"/>
+          </a:p>
+        </p:txBody>
+      </p:sp>
+      <p:sp>
+        <p:nvSpPr>
+          <p:cNvPr id="18" name="Shape 16"/>
+          <p:cNvSpPr/>
+          <p:nvPr/>
+        </p:nvSpPr>
+        <p:spPr>
+          <a:xfrm>
+            <a:off x="3291840" y="2249424"/>
+            <a:ext cx="274320" cy="0"/>
+          </a:xfrm>
+          <a:prstGeom prst="line">
+            <a:avLst/>
+          </a:prstGeom>
+          <a:noFill/>
+          <a:ln w="19050">
+            <a:solidFill>
+              <a:srgbClr val="4A63C8"/>
+            </a:solidFill>
+            <a:prstDash val="solid"/>
+            <a:tailEnd type="triangle"/>
+          </a:ln>
+        </p:spPr>
+      </p:sp>
+      <p:sp>
+        <p:nvSpPr>
+          <p:cNvPr id="19" name="Shape 17"/>
+          <p:cNvSpPr/>
+          <p:nvPr/>
+        </p:nvSpPr>
+        <p:spPr>
+          <a:xfrm>
+            <a:off x="6053328" y="2249424"/>
+            <a:ext cx="274320" cy="0"/>
+          </a:xfrm>
+          <a:prstGeom prst="line">
+            <a:avLst/>
+          </a:prstGeom>
+          <a:noFill/>
+          <a:ln w="19050">
+            <a:solidFill>
+              <a:srgbClr val="4A63C8"/>
+            </a:solidFill>
+            <a:prstDash val="solid"/>
+            <a:tailEnd type="triangle"/>
+          </a:ln>
+        </p:spPr>
+      </p:sp>
+      <p:sp>
+        <p:nvSpPr>
+          <p:cNvPr id="20" name="Shape 18"/>
+          <p:cNvSpPr/>
+          <p:nvPr/>
+        </p:nvSpPr>
+        <p:spPr>
+          <a:xfrm>
+            <a:off x="8814816" y="2249424"/>
+            <a:ext cx="274320" cy="0"/>
+          </a:xfrm>
+          <a:prstGeom prst="line">
+            <a:avLst/>
+          </a:prstGeom>
+          <a:noFill/>
+          <a:ln w="19050">
+            <a:solidFill>
+              <a:srgbClr val="4A63C8"/>
+            </a:solidFill>
+            <a:prstDash val="solid"/>
+            <a:tailEnd type="triangle"/>
+          </a:ln>
+        </p:spPr>
+      </p:sp>
+      <p:sp>
+        <p:nvSpPr>
+          <p:cNvPr id="21" name="Shape 19"/>
+          <p:cNvSpPr/>
+          <p:nvPr/>
+        </p:nvSpPr>
+        <p:spPr>
+          <a:xfrm>
+            <a:off x="804672" y="2670048"/>
+            <a:ext cx="2487168" cy="585216"/>
+          </a:xfrm>
+          <a:prstGeom prst="roundRect">
+            <a:avLst>
+              <a:gd name="adj" fmla="val 9375"/>
+            </a:avLst>
+          </a:prstGeom>
+          <a:solidFill>
+            <a:srgbClr val="FFFFFF"/>
+          </a:solidFill>
+          <a:ln w="13970">
+            <a:solidFill>
+              <a:srgbClr val="DCEDF8"/>
+            </a:solidFill>
+            <a:prstDash val="solid"/>
+          </a:ln>
+        </p:spPr>
+      </p:sp>
+      <p:sp>
+        <p:nvSpPr>
+          <p:cNvPr id="22" name="Text 20"/>
+          <p:cNvSpPr txBox="1"/>
+          <p:nvPr/>
+        </p:nvSpPr>
+        <p:spPr>
+          <a:xfrm>
+            <a:off x="914400" y="2843784"/>
+            <a:ext cx="2267712" cy="256032"/>
+          </a:xfrm>
+          <a:prstGeom prst="rect">
+            <a:avLst/>
+          </a:prstGeom>
+          <a:noFill/>
+          <a:ln/>
+        </p:spPr>
+        <p:txBody>
+          <a:bodyPr wrap="square" lIns="0" tIns="0" rIns="0" bIns="0" rtlCol="0" anchor="ctr"/>
+          <a:lstStyle/>
+          <a:p>
+            <a:pPr algn="ctr" indent="0" marL="0">
+              <a:buNone/>
+            </a:pPr>
+            <a:r>
+              <a:rPr lang="en-US" sz="1240" b="1" dirty="0">
+                <a:solidFill>
+                  <a:srgbClr val="12235B"/>
+                </a:solidFill>
+                <a:latin typeface="Calibri" pitchFamily="34" charset="0"/>
+                <a:ea typeface="Calibri" pitchFamily="34" charset="-122"/>
+                <a:cs typeface="Calibri" pitchFamily="34" charset="-120"/>
+              </a:rPr>
+              <a:t>sessionStorage</a:t>
+            </a:r>
+            <a:endParaRPr lang="en-US" sz="1240" dirty="0"/>
+          </a:p>
+        </p:txBody>
+      </p:sp>
+      <p:sp>
+        <p:nvSpPr>
+          <p:cNvPr id="23" name="Shape 21"/>
+          <p:cNvSpPr/>
+          <p:nvPr/>
+        </p:nvSpPr>
+        <p:spPr>
+          <a:xfrm>
+            <a:off x="9089136" y="2670048"/>
+            <a:ext cx="2487168" cy="585216"/>
+          </a:xfrm>
+          <a:prstGeom prst="roundRect">
+            <a:avLst>
+              <a:gd name="adj" fmla="val 9375"/>
+            </a:avLst>
+          </a:prstGeom>
+          <a:solidFill>
+            <a:srgbClr val="FFFFFF"/>
+          </a:solidFill>
+          <a:ln w="13970">
+            <a:solidFill>
+              <a:srgbClr val="DCEDF8"/>
+            </a:solidFill>
+            <a:prstDash val="solid"/>
+          </a:ln>
+        </p:spPr>
+      </p:sp>
+      <p:sp>
+        <p:nvSpPr>
+          <p:cNvPr id="24" name="Text 22"/>
+          <p:cNvSpPr txBox="1"/>
+          <p:nvPr/>
+        </p:nvSpPr>
+        <p:spPr>
+          <a:xfrm>
+            <a:off x="9198864" y="2843784"/>
+            <a:ext cx="2267712" cy="256032"/>
+          </a:xfrm>
+          <a:prstGeom prst="rect">
+            <a:avLst/>
+          </a:prstGeom>
+          <a:noFill/>
+          <a:ln/>
+        </p:spPr>
+        <p:txBody>
+          <a:bodyPr wrap="square" lIns="0" tIns="0" rIns="0" bIns="0" rtlCol="0" anchor="ctr"/>
+          <a:lstStyle/>
+          <a:p>
+            <a:pPr algn="ctr" indent="0" marL="0">
+              <a:buNone/>
+            </a:pPr>
+            <a:r>
+              <a:rPr lang="en-US" sz="1240" b="1" dirty="0">
+                <a:solidFill>
+                  <a:srgbClr val="12235B"/>
+                </a:solidFill>
+                <a:latin typeface="Calibri" pitchFamily="34" charset="0"/>
+                <a:ea typeface="Calibri" pitchFamily="34" charset="-122"/>
+                <a:cs typeface="Calibri" pitchFamily="34" charset="-120"/>
+              </a:rPr>
+              <a:t>EviTrack UI</a:t>
+            </a:r>
+            <a:endParaRPr lang="en-US" sz="1240" dirty="0"/>
+          </a:p>
+        </p:txBody>
+      </p:sp>
+      <p:sp>
+        <p:nvSpPr>
+          <p:cNvPr id="25" name="Shape 23"/>
+          <p:cNvSpPr/>
+          <p:nvPr/>
+        </p:nvSpPr>
+        <p:spPr>
+          <a:xfrm>
+            <a:off x="713232" y="3584448"/>
+            <a:ext cx="10844784" cy="1170432"/>
+          </a:xfrm>
+          <a:prstGeom prst="roundRect">
+            <a:avLst>
+              <a:gd name="adj" fmla="val 6250"/>
+            </a:avLst>
+          </a:prstGeom>
+          <a:solidFill>
+            <a:srgbClr val="F1F8FD"/>
+          </a:solidFill>
+          <a:ln w="12700">
+            <a:solidFill>
+              <a:srgbClr val="DCEDF8"/>
+            </a:solidFill>
+            <a:prstDash val="solid"/>
+          </a:ln>
+        </p:spPr>
+      </p:sp>
+      <p:sp>
+        <p:nvSpPr>
+          <p:cNvPr id="26" name="Text 24"/>
+          <p:cNvSpPr txBox="1"/>
+          <p:nvPr/>
+        </p:nvSpPr>
+        <p:spPr>
+          <a:xfrm>
+            <a:off x="896112" y="3675888"/>
+            <a:ext cx="8229600" cy="219456"/>
           </a:xfrm>
           <a:prstGeom prst="rect">
             <a:avLst/>
@@ -18068,7 +19385,73 @@
               <a:buNone/>
             </a:pPr>
             <a:r>
-              <a:rPr lang="en-US" sz="1400" b="1" dirty="0">
+              <a:rPr lang="en-US" sz="960" b="1" spc="110" kern="0" dirty="0">
+                <a:solidFill>
+                  <a:srgbClr val="6B7A90"/>
+                </a:solidFill>
+                <a:latin typeface="Calibri" pitchFamily="34" charset="0"/>
+                <a:ea typeface="Calibri" pitchFamily="34" charset="-122"/>
+                <a:cs typeface="Calibri" pitchFamily="34" charset="-120"/>
+              </a:rPr>
+              <a:t>RENDER WEB SERVICE  ·  EXPRESS — ONE ORIGIN, NO CALCULATION</a:t>
+            </a:r>
+            <a:endParaRPr lang="en-US" sz="960" dirty="0"/>
+          </a:p>
+        </p:txBody>
+      </p:sp>
+      <p:sp>
+        <p:nvSpPr>
+          <p:cNvPr id="27" name="Shape 25"/>
+          <p:cNvSpPr/>
+          <p:nvPr/>
+        </p:nvSpPr>
+        <p:spPr>
+          <a:xfrm>
+            <a:off x="804672" y="3895344"/>
+            <a:ext cx="2487168" cy="585216"/>
+          </a:xfrm>
+          <a:prstGeom prst="roundRect">
+            <a:avLst>
+              <a:gd name="adj" fmla="val 9375"/>
+            </a:avLst>
+          </a:prstGeom>
+          <a:solidFill>
+            <a:srgbClr val="FFFFFF"/>
+          </a:solidFill>
+          <a:ln w="13970">
+            <a:solidFill>
+              <a:srgbClr val="DCEDF8"/>
+            </a:solidFill>
+            <a:prstDash val="solid"/>
+          </a:ln>
+        </p:spPr>
+      </p:sp>
+      <p:sp>
+        <p:nvSpPr>
+          <p:cNvPr id="28" name="Text 26"/>
+          <p:cNvSpPr txBox="1"/>
+          <p:nvPr/>
+        </p:nvSpPr>
+        <p:spPr>
+          <a:xfrm>
+            <a:off x="914400" y="3986784"/>
+            <a:ext cx="2267712" cy="256032"/>
+          </a:xfrm>
+          <a:prstGeom prst="rect">
+            <a:avLst/>
+          </a:prstGeom>
+          <a:noFill/>
+          <a:ln/>
+        </p:spPr>
+        <p:txBody>
+          <a:bodyPr wrap="square" lIns="0" tIns="0" rIns="0" bIns="0" rtlCol="0" anchor="ctr"/>
+          <a:lstStyle/>
+          <a:p>
+            <a:pPr algn="ctr" indent="0" marL="0">
+              <a:buNone/>
+            </a:pPr>
+            <a:r>
+              <a:rPr lang="en-US" sz="1240" b="1" dirty="0">
                 <a:solidFill>
                   <a:srgbClr val="12235B"/>
                 </a:solidFill>
@@ -18076,140 +19459,400 @@
                 <a:ea typeface="Calibri" pitchFamily="34" charset="-122"/>
                 <a:cs typeface="Calibri" pitchFamily="34" charset="-120"/>
               </a:rPr>
-              <a:t>Core components</a:t>
-            </a:r>
-            <a:endParaRPr lang="en-US" sz="1400" dirty="0"/>
-          </a:p>
-        </p:txBody>
-      </p:sp>
-      <p:sp>
-        <p:nvSpPr>
-          <p:cNvPr id="7" name="Text 4"/>
-          <p:cNvSpPr txBox="1"/>
-          <p:nvPr/>
-        </p:nvSpPr>
-        <p:spPr>
-          <a:xfrm>
-            <a:off x="8686800" y="2578608"/>
-            <a:ext cx="2788920" cy="1417320"/>
-          </a:xfrm>
-          <a:prstGeom prst="rect">
-            <a:avLst/>
-          </a:prstGeom>
-          <a:noFill/>
-          <a:ln/>
-        </p:spPr>
-        <p:txBody>
-          <a:bodyPr wrap="square" lIns="0" tIns="0" rIns="0" bIns="0" rtlCol="0" anchor="t"/>
-          <a:lstStyle/>
-          <a:p>
-            <a:pPr marL="177800" indent="-177800">
-              <a:lnSpc>
-                <a:spcPts val="1523"/>
-              </a:lnSpc>
-              <a:spcAft>
-                <a:spcPts val="600"/>
-              </a:spcAft>
-              <a:buSzPct val="100000"/>
-              <a:buChar char="•"/>
-            </a:pPr>
-            <a:r>
-              <a:rPr lang="en-US" sz="1120" dirty="0">
-                <a:solidFill>
-                  <a:srgbClr val="1B2431"/>
-                </a:solidFill>
-                <a:latin typeface="Calibri" pitchFamily="34" charset="0"/>
-                <a:ea typeface="Calibri" pitchFamily="34" charset="-122"/>
-                <a:cs typeface="Calibri" pitchFamily="34" charset="-120"/>
-              </a:rPr>
-              <a:t>Calculation engine — one module, 11 pure functions</a:t>
-            </a:r>
-            <a:endParaRPr lang="en-US" sz="1120" dirty="0"/>
-          </a:p>
-          <a:p>
-            <a:pPr marL="177800" indent="-177800">
-              <a:lnSpc>
-                <a:spcPts val="1523"/>
-              </a:lnSpc>
-              <a:spcAft>
-                <a:spcPts val="600"/>
-              </a:spcAft>
-              <a:buSzPct val="100000"/>
-              <a:buChar char="•"/>
-            </a:pPr>
-            <a:r>
-              <a:rPr lang="en-US" sz="1120" dirty="0">
-                <a:solidFill>
-                  <a:srgbClr val="1B2431"/>
-                </a:solidFill>
-                <a:latin typeface="Calibri" pitchFamily="34" charset="0"/>
-                <a:ea typeface="Calibri" pitchFamily="34" charset="-122"/>
-                <a:cs typeface="Calibri" pitchFamily="34" charset="-120"/>
-              </a:rPr>
-              <a:t>React SPA — 6 input tabs, 7 result views</a:t>
-            </a:r>
-            <a:endParaRPr lang="en-US" sz="1120" dirty="0"/>
-          </a:p>
-          <a:p>
-            <a:pPr marL="177800" indent="-177800">
-              <a:lnSpc>
-                <a:spcPts val="1523"/>
-              </a:lnSpc>
-              <a:spcAft>
-                <a:spcPts val="600"/>
-              </a:spcAft>
-              <a:buSzPct val="100000"/>
-              <a:buChar char="•"/>
-            </a:pPr>
-            <a:r>
-              <a:rPr lang="en-US" sz="1120" dirty="0">
-                <a:solidFill>
-                  <a:srgbClr val="1B2431"/>
-                </a:solidFill>
-                <a:latin typeface="Calibri" pitchFamily="34" charset="0"/>
-                <a:ea typeface="Calibri" pitchFamily="34" charset="-122"/>
-                <a:cs typeface="Calibri" pitchFamily="34" charset="-120"/>
-              </a:rPr>
-              <a:t>Express API — evidence, LLM proxy, persistence</a:t>
-            </a:r>
-            <a:endParaRPr lang="en-US" sz="1120" dirty="0"/>
-          </a:p>
-          <a:p>
-            <a:pPr marL="177800" indent="-177800">
-              <a:lnSpc>
-                <a:spcPts val="1523"/>
-              </a:lnSpc>
-              <a:spcAft>
-                <a:spcPts val="600"/>
-              </a:spcAft>
-              <a:buSzPct val="100000"/>
-              <a:buChar char="•"/>
-            </a:pPr>
-            <a:r>
-              <a:rPr lang="en-US" sz="1120" dirty="0">
-                <a:solidFill>
-                  <a:srgbClr val="1B2431"/>
-                </a:solidFill>
-                <a:latin typeface="Calibri" pitchFamily="34" charset="0"/>
-                <a:ea typeface="Calibri" pitchFamily="34" charset="-122"/>
-                <a:cs typeface="Calibri" pitchFamily="34" charset="-120"/>
-              </a:rPr>
-              <a:t>EviTrack — 5 source adapters behind one registry</a:t>
-            </a:r>
-            <a:endParaRPr lang="en-US" sz="1120" dirty="0"/>
-          </a:p>
-        </p:txBody>
-      </p:sp>
-      <p:sp>
-        <p:nvSpPr>
-          <p:cNvPr id="8" name="Text 5"/>
-          <p:cNvSpPr txBox="1"/>
-          <p:nvPr/>
-        </p:nvSpPr>
-        <p:spPr>
-          <a:xfrm>
-            <a:off x="8686800" y="4114800"/>
-            <a:ext cx="2788920" cy="274320"/>
+              <a:t>Static host</a:t>
+            </a:r>
+            <a:endParaRPr lang="en-US" sz="1240" dirty="0"/>
+          </a:p>
+        </p:txBody>
+      </p:sp>
+      <p:sp>
+        <p:nvSpPr>
+          <p:cNvPr id="29" name="Text 27"/>
+          <p:cNvSpPr txBox="1"/>
+          <p:nvPr/>
+        </p:nvSpPr>
+        <p:spPr>
+          <a:xfrm>
+            <a:off x="896112" y="4224528"/>
+            <a:ext cx="2304288" cy="201168"/>
+          </a:xfrm>
+          <a:prstGeom prst="rect">
+            <a:avLst/>
+          </a:prstGeom>
+          <a:noFill/>
+          <a:ln/>
+        </p:spPr>
+        <p:txBody>
+          <a:bodyPr wrap="square" lIns="0" tIns="0" rIns="0" bIns="0" rtlCol="0" anchor="ctr"/>
+          <a:lstStyle/>
+          <a:p>
+            <a:pPr algn="ctr" indent="0" marL="0">
+              <a:buNone/>
+            </a:pPr>
+            <a:r>
+              <a:rPr lang="en-US" sz="940" dirty="0">
+                <a:solidFill>
+                  <a:srgbClr val="6B7A90"/>
+                </a:solidFill>
+                <a:latin typeface="Calibri" pitchFamily="34" charset="0"/>
+                <a:ea typeface="Calibri" pitchFamily="34" charset="-122"/>
+                <a:cs typeface="Calibri" pitchFamily="34" charset="-120"/>
+              </a:rPr>
+              <a:t>serves the built app</a:t>
+            </a:r>
+            <a:endParaRPr lang="en-US" sz="940" dirty="0"/>
+          </a:p>
+        </p:txBody>
+      </p:sp>
+      <p:sp>
+        <p:nvSpPr>
+          <p:cNvPr id="30" name="Shape 28"/>
+          <p:cNvSpPr/>
+          <p:nvPr/>
+        </p:nvSpPr>
+        <p:spPr>
+          <a:xfrm>
+            <a:off x="3566160" y="3895344"/>
+            <a:ext cx="2487168" cy="585216"/>
+          </a:xfrm>
+          <a:prstGeom prst="roundRect">
+            <a:avLst>
+              <a:gd name="adj" fmla="val 9375"/>
+            </a:avLst>
+          </a:prstGeom>
+          <a:solidFill>
+            <a:srgbClr val="FFFFFF"/>
+          </a:solidFill>
+          <a:ln w="13970">
+            <a:solidFill>
+              <a:srgbClr val="DCEDF8"/>
+            </a:solidFill>
+            <a:prstDash val="solid"/>
+          </a:ln>
+        </p:spPr>
+      </p:sp>
+      <p:sp>
+        <p:nvSpPr>
+          <p:cNvPr id="31" name="Text 29"/>
+          <p:cNvSpPr txBox="1"/>
+          <p:nvPr/>
+        </p:nvSpPr>
+        <p:spPr>
+          <a:xfrm>
+            <a:off x="3675888" y="3986784"/>
+            <a:ext cx="2267712" cy="256032"/>
+          </a:xfrm>
+          <a:prstGeom prst="rect">
+            <a:avLst/>
+          </a:prstGeom>
+          <a:noFill/>
+          <a:ln/>
+        </p:spPr>
+        <p:txBody>
+          <a:bodyPr wrap="square" lIns="0" tIns="0" rIns="0" bIns="0" rtlCol="0" anchor="ctr"/>
+          <a:lstStyle/>
+          <a:p>
+            <a:pPr algn="ctr" indent="0" marL="0">
+              <a:buNone/>
+            </a:pPr>
+            <a:r>
+              <a:rPr lang="en-US" sz="1240" b="1" dirty="0">
+                <a:solidFill>
+                  <a:srgbClr val="12235B"/>
+                </a:solidFill>
+                <a:latin typeface="Calibri" pitchFamily="34" charset="0"/>
+                <a:ea typeface="Calibri" pitchFamily="34" charset="-122"/>
+                <a:cs typeface="Calibri" pitchFamily="34" charset="-120"/>
+              </a:rPr>
+              <a:t>REST API</a:t>
+            </a:r>
+            <a:endParaRPr lang="en-US" sz="1240" dirty="0"/>
+          </a:p>
+        </p:txBody>
+      </p:sp>
+      <p:sp>
+        <p:nvSpPr>
+          <p:cNvPr id="32" name="Text 30"/>
+          <p:cNvSpPr txBox="1"/>
+          <p:nvPr/>
+        </p:nvSpPr>
+        <p:spPr>
+          <a:xfrm>
+            <a:off x="3657600" y="4224528"/>
+            <a:ext cx="2304288" cy="201168"/>
+          </a:xfrm>
+          <a:prstGeom prst="rect">
+            <a:avLst/>
+          </a:prstGeom>
+          <a:noFill/>
+          <a:ln/>
+        </p:spPr>
+        <p:txBody>
+          <a:bodyPr wrap="square" lIns="0" tIns="0" rIns="0" bIns="0" rtlCol="0" anchor="ctr"/>
+          <a:lstStyle/>
+          <a:p>
+            <a:pPr algn="ctr" indent="0" marL="0">
+              <a:buNone/>
+            </a:pPr>
+            <a:r>
+              <a:rPr lang="en-US" sz="940" dirty="0">
+                <a:solidFill>
+                  <a:srgbClr val="6B7A90"/>
+                </a:solidFill>
+                <a:latin typeface="Calibri" pitchFamily="34" charset="0"/>
+                <a:ea typeface="Calibri" pitchFamily="34" charset="-122"/>
+                <a:cs typeface="Calibri" pitchFamily="34" charset="-120"/>
+              </a:rPr>
+              <a:t>/api/model/runs</a:t>
+            </a:r>
+            <a:endParaRPr lang="en-US" sz="940" dirty="0"/>
+          </a:p>
+        </p:txBody>
+      </p:sp>
+      <p:sp>
+        <p:nvSpPr>
+          <p:cNvPr id="33" name="Shape 31"/>
+          <p:cNvSpPr/>
+          <p:nvPr/>
+        </p:nvSpPr>
+        <p:spPr>
+          <a:xfrm>
+            <a:off x="6327648" y="3895344"/>
+            <a:ext cx="2487168" cy="585216"/>
+          </a:xfrm>
+          <a:prstGeom prst="roundRect">
+            <a:avLst>
+              <a:gd name="adj" fmla="val 9375"/>
+            </a:avLst>
+          </a:prstGeom>
+          <a:solidFill>
+            <a:srgbClr val="FFFFFF"/>
+          </a:solidFill>
+          <a:ln w="13970">
+            <a:solidFill>
+              <a:srgbClr val="DCEDF8"/>
+            </a:solidFill>
+            <a:prstDash val="solid"/>
+          </a:ln>
+        </p:spPr>
+      </p:sp>
+      <p:sp>
+        <p:nvSpPr>
+          <p:cNvPr id="34" name="Text 32"/>
+          <p:cNvSpPr txBox="1"/>
+          <p:nvPr/>
+        </p:nvSpPr>
+        <p:spPr>
+          <a:xfrm>
+            <a:off x="6437376" y="3986784"/>
+            <a:ext cx="2267712" cy="256032"/>
+          </a:xfrm>
+          <a:prstGeom prst="rect">
+            <a:avLst/>
+          </a:prstGeom>
+          <a:noFill/>
+          <a:ln/>
+        </p:spPr>
+        <p:txBody>
+          <a:bodyPr wrap="square" lIns="0" tIns="0" rIns="0" bIns="0" rtlCol="0" anchor="ctr"/>
+          <a:lstStyle/>
+          <a:p>
+            <a:pPr algn="ctr" indent="0" marL="0">
+              <a:buNone/>
+            </a:pPr>
+            <a:r>
+              <a:rPr lang="en-US" sz="1240" b="1" dirty="0">
+                <a:solidFill>
+                  <a:srgbClr val="12235B"/>
+                </a:solidFill>
+                <a:latin typeface="Calibri" pitchFamily="34" charset="0"/>
+                <a:ea typeface="Calibri" pitchFamily="34" charset="-122"/>
+                <a:cs typeface="Calibri" pitchFamily="34" charset="-120"/>
+              </a:rPr>
+              <a:t>Evidence API</a:t>
+            </a:r>
+            <a:endParaRPr lang="en-US" sz="1240" dirty="0"/>
+          </a:p>
+        </p:txBody>
+      </p:sp>
+      <p:sp>
+        <p:nvSpPr>
+          <p:cNvPr id="35" name="Text 33"/>
+          <p:cNvSpPr txBox="1"/>
+          <p:nvPr/>
+        </p:nvSpPr>
+        <p:spPr>
+          <a:xfrm>
+            <a:off x="6419088" y="4224528"/>
+            <a:ext cx="2304288" cy="201168"/>
+          </a:xfrm>
+          <a:prstGeom prst="rect">
+            <a:avLst/>
+          </a:prstGeom>
+          <a:noFill/>
+          <a:ln/>
+        </p:spPr>
+        <p:txBody>
+          <a:bodyPr wrap="square" lIns="0" tIns="0" rIns="0" bIns="0" rtlCol="0" anchor="ctr"/>
+          <a:lstStyle/>
+          <a:p>
+            <a:pPr algn="ctr" indent="0" marL="0">
+              <a:buNone/>
+            </a:pPr>
+            <a:r>
+              <a:rPr lang="en-US" sz="940" dirty="0">
+                <a:solidFill>
+                  <a:srgbClr val="6B7A90"/>
+                </a:solidFill>
+                <a:latin typeface="Calibri" pitchFamily="34" charset="0"/>
+                <a:ea typeface="Calibri" pitchFamily="34" charset="-122"/>
+                <a:cs typeface="Calibri" pitchFamily="34" charset="-120"/>
+              </a:rPr>
+              <a:t>/api/v1/evitrack</a:t>
+            </a:r>
+            <a:endParaRPr lang="en-US" sz="940" dirty="0"/>
+          </a:p>
+        </p:txBody>
+      </p:sp>
+      <p:sp>
+        <p:nvSpPr>
+          <p:cNvPr id="36" name="Shape 34"/>
+          <p:cNvSpPr/>
+          <p:nvPr/>
+        </p:nvSpPr>
+        <p:spPr>
+          <a:xfrm>
+            <a:off x="9089136" y="3895344"/>
+            <a:ext cx="2487168" cy="585216"/>
+          </a:xfrm>
+          <a:prstGeom prst="roundRect">
+            <a:avLst>
+              <a:gd name="adj" fmla="val 9375"/>
+            </a:avLst>
+          </a:prstGeom>
+          <a:solidFill>
+            <a:srgbClr val="FFFFFF"/>
+          </a:solidFill>
+          <a:ln w="13970">
+            <a:solidFill>
+              <a:srgbClr val="DCEDF8"/>
+            </a:solidFill>
+            <a:prstDash val="solid"/>
+          </a:ln>
+        </p:spPr>
+      </p:sp>
+      <p:sp>
+        <p:nvSpPr>
+          <p:cNvPr id="37" name="Text 35"/>
+          <p:cNvSpPr txBox="1"/>
+          <p:nvPr/>
+        </p:nvSpPr>
+        <p:spPr>
+          <a:xfrm>
+            <a:off x="9198864" y="3986784"/>
+            <a:ext cx="2267712" cy="256032"/>
+          </a:xfrm>
+          <a:prstGeom prst="rect">
+            <a:avLst/>
+          </a:prstGeom>
+          <a:noFill/>
+          <a:ln/>
+        </p:spPr>
+        <p:txBody>
+          <a:bodyPr wrap="square" lIns="0" tIns="0" rIns="0" bIns="0" rtlCol="0" anchor="ctr"/>
+          <a:lstStyle/>
+          <a:p>
+            <a:pPr algn="ctr" indent="0" marL="0">
+              <a:buNone/>
+            </a:pPr>
+            <a:r>
+              <a:rPr lang="en-US" sz="1240" b="1" dirty="0">
+                <a:solidFill>
+                  <a:srgbClr val="12235B"/>
+                </a:solidFill>
+                <a:latin typeface="Calibri" pitchFamily="34" charset="0"/>
+                <a:ea typeface="Calibri" pitchFamily="34" charset="-122"/>
+                <a:cs typeface="Calibri" pitchFamily="34" charset="-120"/>
+              </a:rPr>
+              <a:t>LLM proxy</a:t>
+            </a:r>
+            <a:endParaRPr lang="en-US" sz="1240" dirty="0"/>
+          </a:p>
+        </p:txBody>
+      </p:sp>
+      <p:sp>
+        <p:nvSpPr>
+          <p:cNvPr id="38" name="Text 36"/>
+          <p:cNvSpPr txBox="1"/>
+          <p:nvPr/>
+        </p:nvSpPr>
+        <p:spPr>
+          <a:xfrm>
+            <a:off x="9180576" y="4224528"/>
+            <a:ext cx="2304288" cy="201168"/>
+          </a:xfrm>
+          <a:prstGeom prst="rect">
+            <a:avLst/>
+          </a:prstGeom>
+          <a:noFill/>
+          <a:ln/>
+        </p:spPr>
+        <p:txBody>
+          <a:bodyPr wrap="square" lIns="0" tIns="0" rIns="0" bIns="0" rtlCol="0" anchor="ctr"/>
+          <a:lstStyle/>
+          <a:p>
+            <a:pPr algn="ctr" indent="0" marL="0">
+              <a:buNone/>
+            </a:pPr>
+            <a:r>
+              <a:rPr lang="en-US" sz="940" dirty="0">
+                <a:solidFill>
+                  <a:srgbClr val="6B7A90"/>
+                </a:solidFill>
+                <a:latin typeface="Calibri" pitchFamily="34" charset="0"/>
+                <a:ea typeface="Calibri" pitchFamily="34" charset="-122"/>
+                <a:cs typeface="Calibri" pitchFamily="34" charset="-120"/>
+              </a:rPr>
+              <a:t>/api/chat · /api/v1/llm</a:t>
+            </a:r>
+            <a:endParaRPr lang="en-US" sz="940" dirty="0"/>
+          </a:p>
+        </p:txBody>
+      </p:sp>
+      <p:sp>
+        <p:nvSpPr>
+          <p:cNvPr id="39" name="Shape 37"/>
+          <p:cNvSpPr/>
+          <p:nvPr/>
+        </p:nvSpPr>
+        <p:spPr>
+          <a:xfrm>
+            <a:off x="6190488" y="3236976"/>
+            <a:ext cx="0" cy="347472"/>
+          </a:xfrm>
+          <a:prstGeom prst="line">
+            <a:avLst/>
+          </a:prstGeom>
+          <a:noFill/>
+          <a:ln w="19050">
+            <a:solidFill>
+              <a:srgbClr val="4A63C8"/>
+            </a:solidFill>
+            <a:prstDash val="solid"/>
+            <a:tailEnd type="triangle"/>
+          </a:ln>
+        </p:spPr>
+      </p:sp>
+      <p:sp>
+        <p:nvSpPr>
+          <p:cNvPr id="40" name="Text 38"/>
+          <p:cNvSpPr txBox="1"/>
+          <p:nvPr/>
+        </p:nvSpPr>
+        <p:spPr>
+          <a:xfrm>
+            <a:off x="6318504" y="3291840"/>
+            <a:ext cx="2377440" cy="237744"/>
           </a:xfrm>
           <a:prstGeom prst="rect">
             <a:avLst/>
@@ -18225,7 +19868,139 @@
               <a:buNone/>
             </a:pPr>
             <a:r>
-              <a:rPr lang="en-US" sz="1400" b="1" dirty="0">
+              <a:rPr lang="en-US" sz="960" dirty="0">
+                <a:solidFill>
+                  <a:srgbClr val="6B7A90"/>
+                </a:solidFill>
+                <a:latin typeface="Calibri" pitchFamily="34" charset="0"/>
+                <a:ea typeface="Calibri" pitchFamily="34" charset="-122"/>
+                <a:cs typeface="Calibri" pitchFamily="34" charset="-120"/>
+              </a:rPr>
+              <a:t>HTTPS · same origin</a:t>
+            </a:r>
+            <a:endParaRPr lang="en-US" sz="960" dirty="0"/>
+          </a:p>
+        </p:txBody>
+      </p:sp>
+      <p:sp>
+        <p:nvSpPr>
+          <p:cNvPr id="41" name="Shape 39"/>
+          <p:cNvSpPr/>
+          <p:nvPr/>
+        </p:nvSpPr>
+        <p:spPr>
+          <a:xfrm>
+            <a:off x="713232" y="5138928"/>
+            <a:ext cx="10844784" cy="1170432"/>
+          </a:xfrm>
+          <a:prstGeom prst="roundRect">
+            <a:avLst>
+              <a:gd name="adj" fmla="val 6250"/>
+            </a:avLst>
+          </a:prstGeom>
+          <a:solidFill>
+            <a:srgbClr val="F1F8FD"/>
+          </a:solidFill>
+          <a:ln w="12700">
+            <a:solidFill>
+              <a:srgbClr val="DCEDF8"/>
+            </a:solidFill>
+            <a:prstDash val="solid"/>
+          </a:ln>
+        </p:spPr>
+      </p:sp>
+      <p:sp>
+        <p:nvSpPr>
+          <p:cNvPr id="42" name="Text 40"/>
+          <p:cNvSpPr txBox="1"/>
+          <p:nvPr/>
+        </p:nvSpPr>
+        <p:spPr>
+          <a:xfrm>
+            <a:off x="896112" y="5230368"/>
+            <a:ext cx="8229600" cy="219456"/>
+          </a:xfrm>
+          <a:prstGeom prst="rect">
+            <a:avLst/>
+          </a:prstGeom>
+          <a:noFill/>
+          <a:ln/>
+        </p:spPr>
+        <p:txBody>
+          <a:bodyPr wrap="square" lIns="0" tIns="0" rIns="0" bIns="0" rtlCol="0" anchor="ctr"/>
+          <a:lstStyle/>
+          <a:p>
+            <a:pPr indent="0" marL="0">
+              <a:buNone/>
+            </a:pPr>
+            <a:r>
+              <a:rPr lang="en-US" sz="960" b="1" spc="110" kern="0" dirty="0">
+                <a:solidFill>
+                  <a:srgbClr val="6B7A90"/>
+                </a:solidFill>
+                <a:latin typeface="Calibri" pitchFamily="34" charset="0"/>
+                <a:ea typeface="Calibri" pitchFamily="34" charset="-122"/>
+                <a:cs typeface="Calibri" pitchFamily="34" charset="-120"/>
+              </a:rPr>
+              <a:t>EXTERNAL  ·  OPTIONAL STORE</a:t>
+            </a:r>
+            <a:endParaRPr lang="en-US" sz="960" dirty="0"/>
+          </a:p>
+        </p:txBody>
+      </p:sp>
+      <p:sp>
+        <p:nvSpPr>
+          <p:cNvPr id="43" name="Shape 41"/>
+          <p:cNvSpPr/>
+          <p:nvPr/>
+        </p:nvSpPr>
+        <p:spPr>
+          <a:xfrm>
+            <a:off x="3566160" y="5449824"/>
+            <a:ext cx="2487168" cy="585216"/>
+          </a:xfrm>
+          <a:prstGeom prst="roundRect">
+            <a:avLst>
+              <a:gd name="adj" fmla="val 9375"/>
+            </a:avLst>
+          </a:prstGeom>
+          <a:solidFill>
+            <a:srgbClr val="FFFFFF"/>
+          </a:solidFill>
+          <a:ln w="13970">
+            <a:solidFill>
+              <a:srgbClr val="6B7A90"/>
+            </a:solidFill>
+            <a:prstDash val="solid"/>
+          </a:ln>
+        </p:spPr>
+      </p:sp>
+      <p:sp>
+        <p:nvSpPr>
+          <p:cNvPr id="44" name="Text 42"/>
+          <p:cNvSpPr txBox="1"/>
+          <p:nvPr/>
+        </p:nvSpPr>
+        <p:spPr>
+          <a:xfrm>
+            <a:off x="3675888" y="5541264"/>
+            <a:ext cx="2267712" cy="256032"/>
+          </a:xfrm>
+          <a:prstGeom prst="rect">
+            <a:avLst/>
+          </a:prstGeom>
+          <a:noFill/>
+          <a:ln/>
+        </p:spPr>
+        <p:txBody>
+          <a:bodyPr wrap="square" lIns="0" tIns="0" rIns="0" bIns="0" rtlCol="0" anchor="ctr"/>
+          <a:lstStyle/>
+          <a:p>
+            <a:pPr algn="ctr" indent="0" marL="0">
+              <a:buNone/>
+            </a:pPr>
+            <a:r>
+              <a:rPr lang="en-US" sz="1240" b="1" dirty="0">
                 <a:solidFill>
                   <a:srgbClr val="12235B"/>
                 </a:solidFill>
@@ -18233,109 +20008,375 @@
                 <a:ea typeface="Calibri" pitchFamily="34" charset="-122"/>
                 <a:cs typeface="Calibri" pitchFamily="34" charset="-120"/>
               </a:rPr>
-              <a:t>Why client-side</a:t>
-            </a:r>
-            <a:endParaRPr lang="en-US" sz="1400" dirty="0"/>
-          </a:p>
-        </p:txBody>
-      </p:sp>
-      <p:sp>
-        <p:nvSpPr>
-          <p:cNvPr id="9" name="Text 6"/>
-          <p:cNvSpPr txBox="1"/>
-          <p:nvPr/>
-        </p:nvSpPr>
-        <p:spPr>
-          <a:xfrm>
-            <a:off x="8686800" y="4462272"/>
-            <a:ext cx="2788920" cy="1371600"/>
-          </a:xfrm>
-          <a:prstGeom prst="rect">
-            <a:avLst/>
-          </a:prstGeom>
-          <a:noFill/>
-          <a:ln/>
-        </p:spPr>
-        <p:txBody>
-          <a:bodyPr wrap="square" lIns="0" tIns="0" rIns="0" bIns="0" rtlCol="0" anchor="t"/>
-          <a:lstStyle/>
-          <a:p>
-            <a:pPr marL="177800" indent="-177800">
-              <a:lnSpc>
-                <a:spcPts val="1523"/>
-              </a:lnSpc>
-              <a:spcAft>
-                <a:spcPts val="600"/>
-              </a:spcAft>
-              <a:buSzPct val="100000"/>
-              <a:buChar char="•"/>
-            </a:pPr>
-            <a:r>
-              <a:rPr lang="en-US" sz="1120" dirty="0">
-                <a:solidFill>
-                  <a:srgbClr val="1B2431"/>
-                </a:solidFill>
-                <a:latin typeface="Calibri" pitchFamily="34" charset="0"/>
-                <a:ea typeface="Calibri" pitchFamily="34" charset="-122"/>
-                <a:cs typeface="Calibri" pitchFamily="34" charset="-120"/>
-              </a:rPr>
-              <a:t>No request between an edit and a new number</a:t>
-            </a:r>
-            <a:endParaRPr lang="en-US" sz="1120" dirty="0"/>
-          </a:p>
-          <a:p>
-            <a:pPr marL="177800" indent="-177800">
-              <a:lnSpc>
-                <a:spcPts val="1523"/>
-              </a:lnSpc>
-              <a:spcAft>
-                <a:spcPts val="600"/>
-              </a:spcAft>
-              <a:buSzPct val="100000"/>
-              <a:buChar char="•"/>
-            </a:pPr>
-            <a:r>
-              <a:rPr lang="en-US" sz="1120" dirty="0">
-                <a:solidFill>
-                  <a:srgbClr val="1B2431"/>
-                </a:solidFill>
-                <a:latin typeface="Calibri" pitchFamily="34" charset="0"/>
-                <a:ea typeface="Calibri" pitchFamily="34" charset="-122"/>
-                <a:cs typeface="Calibri" pitchFamily="34" charset="-120"/>
-              </a:rPr>
-              <a:t>Free-tier instances sleep; a demo cannot stall</a:t>
-            </a:r>
-            <a:endParaRPr lang="en-US" sz="1120" dirty="0"/>
-          </a:p>
-          <a:p>
-            <a:pPr marL="177800" indent="-177800">
-              <a:lnSpc>
-                <a:spcPts val="1523"/>
-              </a:lnSpc>
-              <a:spcAft>
-                <a:spcPts val="600"/>
-              </a:spcAft>
-              <a:buSzPct val="100000"/>
-              <a:buChar char="•"/>
-            </a:pPr>
-            <a:r>
-              <a:rPr lang="en-US" sz="1120" dirty="0">
-                <a:solidFill>
-                  <a:srgbClr val="1B2431"/>
-                </a:solidFill>
-                <a:latin typeface="Calibri" pitchFamily="34" charset="0"/>
-                <a:ea typeface="Calibri" pitchFamily="34" charset="-122"/>
-                <a:cs typeface="Calibri" pitchFamily="34" charset="-120"/>
-              </a:rPr>
-              <a:t>Database stays off the critical path</a:t>
-            </a:r>
-            <a:endParaRPr lang="en-US" sz="1120" dirty="0"/>
-          </a:p>
-        </p:txBody>
-      </p:sp>
-      <p:sp>
-        <p:nvSpPr>
-          <p:cNvPr id="10" name="Text 7"/>
+              <a:t>PostgreSQL 16</a:t>
+            </a:r>
+            <a:endParaRPr lang="en-US" sz="1240" dirty="0"/>
+          </a:p>
+        </p:txBody>
+      </p:sp>
+      <p:sp>
+        <p:nvSpPr>
+          <p:cNvPr id="45" name="Text 43"/>
+          <p:cNvSpPr txBox="1"/>
+          <p:nvPr/>
+        </p:nvSpPr>
+        <p:spPr>
+          <a:xfrm>
+            <a:off x="3657600" y="5779008"/>
+            <a:ext cx="2304288" cy="201168"/>
+          </a:xfrm>
+          <a:prstGeom prst="rect">
+            <a:avLst/>
+          </a:prstGeom>
+          <a:noFill/>
+          <a:ln/>
+        </p:spPr>
+        <p:txBody>
+          <a:bodyPr wrap="square" lIns="0" tIns="0" rIns="0" bIns="0" rtlCol="0" anchor="ctr"/>
+          <a:lstStyle/>
+          <a:p>
+            <a:pPr algn="ctr" indent="0" marL="0">
+              <a:buNone/>
+            </a:pPr>
+            <a:r>
+              <a:rPr lang="en-US" sz="940" dirty="0">
+                <a:solidFill>
+                  <a:srgbClr val="6B7A90"/>
+                </a:solidFill>
+                <a:latin typeface="Calibri" pitchFamily="34" charset="0"/>
+                <a:ea typeface="Calibri" pitchFamily="34" charset="-122"/>
+                <a:cs typeface="Calibri" pitchFamily="34" charset="-120"/>
+              </a:rPr>
+              <a:t>optional — run history</a:t>
+            </a:r>
+            <a:endParaRPr lang="en-US" sz="940" dirty="0"/>
+          </a:p>
+        </p:txBody>
+      </p:sp>
+      <p:sp>
+        <p:nvSpPr>
+          <p:cNvPr id="46" name="Shape 44"/>
+          <p:cNvSpPr/>
+          <p:nvPr/>
+        </p:nvSpPr>
+        <p:spPr>
+          <a:xfrm>
+            <a:off x="6327648" y="5449824"/>
+            <a:ext cx="2487168" cy="585216"/>
+          </a:xfrm>
+          <a:prstGeom prst="roundRect">
+            <a:avLst>
+              <a:gd name="adj" fmla="val 9375"/>
+            </a:avLst>
+          </a:prstGeom>
+          <a:solidFill>
+            <a:srgbClr val="E6F9EF"/>
+          </a:solidFill>
+          <a:ln w="13970">
+            <a:solidFill>
+              <a:srgbClr val="9FDCBB"/>
+            </a:solidFill>
+            <a:prstDash val="solid"/>
+          </a:ln>
+        </p:spPr>
+      </p:sp>
+      <p:sp>
+        <p:nvSpPr>
+          <p:cNvPr id="47" name="Text 45"/>
+          <p:cNvSpPr txBox="1"/>
+          <p:nvPr/>
+        </p:nvSpPr>
+        <p:spPr>
+          <a:xfrm>
+            <a:off x="6437376" y="5541264"/>
+            <a:ext cx="2267712" cy="256032"/>
+          </a:xfrm>
+          <a:prstGeom prst="rect">
+            <a:avLst/>
+          </a:prstGeom>
+          <a:noFill/>
+          <a:ln/>
+        </p:spPr>
+        <p:txBody>
+          <a:bodyPr wrap="square" lIns="0" tIns="0" rIns="0" bIns="0" rtlCol="0" anchor="ctr"/>
+          <a:lstStyle/>
+          <a:p>
+            <a:pPr algn="ctr" indent="0" marL="0">
+              <a:buNone/>
+            </a:pPr>
+            <a:r>
+              <a:rPr lang="en-US" sz="1240" b="1" dirty="0">
+                <a:solidFill>
+                  <a:srgbClr val="12235B"/>
+                </a:solidFill>
+                <a:latin typeface="Calibri" pitchFamily="34" charset="0"/>
+                <a:ea typeface="Calibri" pitchFamily="34" charset="-122"/>
+                <a:cs typeface="Calibri" pitchFamily="34" charset="-120"/>
+              </a:rPr>
+              <a:t>Evidence sources</a:t>
+            </a:r>
+            <a:endParaRPr lang="en-US" sz="1240" dirty="0"/>
+          </a:p>
+        </p:txBody>
+      </p:sp>
+      <p:sp>
+        <p:nvSpPr>
+          <p:cNvPr id="48" name="Text 46"/>
+          <p:cNvSpPr txBox="1"/>
+          <p:nvPr/>
+        </p:nvSpPr>
+        <p:spPr>
+          <a:xfrm>
+            <a:off x="6419088" y="5779008"/>
+            <a:ext cx="2304288" cy="201168"/>
+          </a:xfrm>
+          <a:prstGeom prst="rect">
+            <a:avLst/>
+          </a:prstGeom>
+          <a:noFill/>
+          <a:ln/>
+        </p:spPr>
+        <p:txBody>
+          <a:bodyPr wrap="square" lIns="0" tIns="0" rIns="0" bIns="0" rtlCol="0" anchor="ctr"/>
+          <a:lstStyle/>
+          <a:p>
+            <a:pPr algn="ctr" indent="0" marL="0">
+              <a:buNone/>
+            </a:pPr>
+            <a:r>
+              <a:rPr lang="en-US" sz="940" dirty="0">
+                <a:solidFill>
+                  <a:srgbClr val="6B7A90"/>
+                </a:solidFill>
+                <a:latin typeface="Calibri" pitchFamily="34" charset="0"/>
+                <a:ea typeface="Calibri" pitchFamily="34" charset="-122"/>
+                <a:cs typeface="Calibri" pitchFamily="34" charset="-120"/>
+              </a:rPr>
+              <a:t>PubMed · trials · FDA · WHO</a:t>
+            </a:r>
+            <a:endParaRPr lang="en-US" sz="940" dirty="0"/>
+          </a:p>
+        </p:txBody>
+      </p:sp>
+      <p:sp>
+        <p:nvSpPr>
+          <p:cNvPr id="49" name="Shape 47"/>
+          <p:cNvSpPr/>
+          <p:nvPr/>
+        </p:nvSpPr>
+        <p:spPr>
+          <a:xfrm>
+            <a:off x="9089136" y="5449824"/>
+            <a:ext cx="2487168" cy="585216"/>
+          </a:xfrm>
+          <a:prstGeom prst="roundRect">
+            <a:avLst>
+              <a:gd name="adj" fmla="val 9375"/>
+            </a:avLst>
+          </a:prstGeom>
+          <a:solidFill>
+            <a:srgbClr val="E6F9EF"/>
+          </a:solidFill>
+          <a:ln w="13970">
+            <a:solidFill>
+              <a:srgbClr val="9FDCBB"/>
+            </a:solidFill>
+            <a:prstDash val="solid"/>
+          </a:ln>
+        </p:spPr>
+      </p:sp>
+      <p:sp>
+        <p:nvSpPr>
+          <p:cNvPr id="50" name="Text 48"/>
+          <p:cNvSpPr txBox="1"/>
+          <p:nvPr/>
+        </p:nvSpPr>
+        <p:spPr>
+          <a:xfrm>
+            <a:off x="9198864" y="5541264"/>
+            <a:ext cx="2267712" cy="256032"/>
+          </a:xfrm>
+          <a:prstGeom prst="rect">
+            <a:avLst/>
+          </a:prstGeom>
+          <a:noFill/>
+          <a:ln/>
+        </p:spPr>
+        <p:txBody>
+          <a:bodyPr wrap="square" lIns="0" tIns="0" rIns="0" bIns="0" rtlCol="0" anchor="ctr"/>
+          <a:lstStyle/>
+          <a:p>
+            <a:pPr algn="ctr" indent="0" marL="0">
+              <a:buNone/>
+            </a:pPr>
+            <a:r>
+              <a:rPr lang="en-US" sz="1240" b="1" dirty="0">
+                <a:solidFill>
+                  <a:srgbClr val="12235B"/>
+                </a:solidFill>
+                <a:latin typeface="Calibri" pitchFamily="34" charset="0"/>
+                <a:ea typeface="Calibri" pitchFamily="34" charset="-122"/>
+                <a:cs typeface="Calibri" pitchFamily="34" charset="-120"/>
+              </a:rPr>
+              <a:t>LLM providers</a:t>
+            </a:r>
+            <a:endParaRPr lang="en-US" sz="1240" dirty="0"/>
+          </a:p>
+        </p:txBody>
+      </p:sp>
+      <p:sp>
+        <p:nvSpPr>
+          <p:cNvPr id="51" name="Text 49"/>
+          <p:cNvSpPr txBox="1"/>
+          <p:nvPr/>
+        </p:nvSpPr>
+        <p:spPr>
+          <a:xfrm>
+            <a:off x="9180576" y="5779008"/>
+            <a:ext cx="2304288" cy="201168"/>
+          </a:xfrm>
+          <a:prstGeom prst="rect">
+            <a:avLst/>
+          </a:prstGeom>
+          <a:noFill/>
+          <a:ln/>
+        </p:spPr>
+        <p:txBody>
+          <a:bodyPr wrap="square" lIns="0" tIns="0" rIns="0" bIns="0" rtlCol="0" anchor="ctr"/>
+          <a:lstStyle/>
+          <a:p>
+            <a:pPr algn="ctr" indent="0" marL="0">
+              <a:buNone/>
+            </a:pPr>
+            <a:r>
+              <a:rPr lang="en-US" sz="940" dirty="0">
+                <a:solidFill>
+                  <a:srgbClr val="6B7A90"/>
+                </a:solidFill>
+                <a:latin typeface="Calibri" pitchFamily="34" charset="0"/>
+                <a:ea typeface="Calibri" pitchFamily="34" charset="-122"/>
+                <a:cs typeface="Calibri" pitchFamily="34" charset="-120"/>
+              </a:rPr>
+              <a:t>Groq · Gemini</a:t>
+            </a:r>
+            <a:endParaRPr lang="en-US" sz="940" dirty="0"/>
+          </a:p>
+        </p:txBody>
+      </p:sp>
+      <p:sp>
+        <p:nvSpPr>
+          <p:cNvPr id="52" name="Shape 50"/>
+          <p:cNvSpPr/>
+          <p:nvPr/>
+        </p:nvSpPr>
+        <p:spPr>
+          <a:xfrm>
+            <a:off x="4809744" y="4480560"/>
+            <a:ext cx="0" cy="969264"/>
+          </a:xfrm>
+          <a:prstGeom prst="line">
+            <a:avLst/>
+          </a:prstGeom>
+          <a:noFill/>
+          <a:ln w="19050">
+            <a:solidFill>
+              <a:srgbClr val="6B7A90"/>
+            </a:solidFill>
+            <a:prstDash val="dash"/>
+            <a:tailEnd type="triangle"/>
+          </a:ln>
+        </p:spPr>
+      </p:sp>
+      <p:sp>
+        <p:nvSpPr>
+          <p:cNvPr id="53" name="Shape 51"/>
+          <p:cNvSpPr/>
+          <p:nvPr/>
+        </p:nvSpPr>
+        <p:spPr>
+          <a:xfrm>
+            <a:off x="7571232" y="4480560"/>
+            <a:ext cx="0" cy="969264"/>
+          </a:xfrm>
+          <a:prstGeom prst="line">
+            <a:avLst/>
+          </a:prstGeom>
+          <a:noFill/>
+          <a:ln w="19050">
+            <a:solidFill>
+              <a:srgbClr val="4A63C8"/>
+            </a:solidFill>
+            <a:prstDash val="solid"/>
+            <a:tailEnd type="triangle"/>
+          </a:ln>
+        </p:spPr>
+      </p:sp>
+      <p:sp>
+        <p:nvSpPr>
+          <p:cNvPr id="54" name="Shape 52"/>
+          <p:cNvSpPr/>
+          <p:nvPr/>
+        </p:nvSpPr>
+        <p:spPr>
+          <a:xfrm>
+            <a:off x="10332720" y="4480560"/>
+            <a:ext cx="0" cy="969264"/>
+          </a:xfrm>
+          <a:prstGeom prst="line">
+            <a:avLst/>
+          </a:prstGeom>
+          <a:noFill/>
+          <a:ln w="19050">
+            <a:solidFill>
+              <a:srgbClr val="4A63C8"/>
+            </a:solidFill>
+            <a:prstDash val="solid"/>
+            <a:tailEnd type="triangle"/>
+          </a:ln>
+        </p:spPr>
+      </p:sp>
+      <p:sp>
+        <p:nvSpPr>
+          <p:cNvPr id="55" name="Text 53"/>
+          <p:cNvSpPr txBox="1"/>
+          <p:nvPr/>
+        </p:nvSpPr>
+        <p:spPr>
+          <a:xfrm>
+            <a:off x="6035040" y="6144768"/>
+            <a:ext cx="4754880" cy="237744"/>
+          </a:xfrm>
+          <a:prstGeom prst="rect">
+            <a:avLst/>
+          </a:prstGeom>
+          <a:noFill/>
+          <a:ln/>
+        </p:spPr>
+        <p:txBody>
+          <a:bodyPr wrap="square" lIns="0" tIns="0" rIns="0" bIns="0" rtlCol="0" anchor="ctr"/>
+          <a:lstStyle/>
+          <a:p>
+            <a:pPr algn="r" indent="0" marL="0">
+              <a:buNone/>
+            </a:pPr>
+            <a:r>
+              <a:rPr lang="en-US" sz="960" i="1" dirty="0">
+                <a:solidFill>
+                  <a:srgbClr val="6B7A90"/>
+                </a:solidFill>
+                <a:latin typeface="Calibri" pitchFamily="34" charset="0"/>
+                <a:ea typeface="Calibri" pitchFamily="34" charset="-122"/>
+                <a:cs typeface="Calibri" pitchFamily="34" charset="-120"/>
+              </a:rPr>
+              <a:t>Dashed = optional: with no database the app still runs.</a:t>
+            </a:r>
+            <a:endParaRPr lang="en-US" sz="960" dirty="0"/>
+          </a:p>
+        </p:txBody>
+      </p:sp>
+      <p:sp>
+        <p:nvSpPr>
+          <p:cNvPr id="56" name="Text 54"/>
           <p:cNvSpPr txBox="1"/>
           <p:nvPr/>
         </p:nvSpPr>
@@ -18374,7 +20415,7 @@
       </p:sp>
       <p:sp>
         <p:nvSpPr>
-          <p:cNvPr id="11" name="Shape 8"/>
+          <p:cNvPr id="57" name="Shape 55"/>
           <p:cNvSpPr/>
           <p:nvPr/>
         </p:nvSpPr>
@@ -18397,7 +20438,7 @@
       </p:sp>
       <p:sp>
         <p:nvSpPr>
-          <p:cNvPr id="12" name="Text 9"/>
+          <p:cNvPr id="58" name="Text 56"/>
           <p:cNvSpPr txBox="1"/>
           <p:nvPr/>
         </p:nvSpPr>

--- a/docs/presentation/BIET-Denovo-IBAB.pptx
+++ b/docs/presentation/BIET-Denovo-IBAB.pptx
@@ -3832,7 +3832,7 @@
             <a:r>
               <a:rPr lang="en-US" sz="1300" dirty="0">
                 <a:solidFill>
-                  <a:srgbClr val="6B7A90"/>
+                  <a:srgbClr val="232C3A"/>
                 </a:solidFill>
                 <a:latin typeface="Calibri" pitchFamily="34" charset="0"/>
                 <a:ea typeface="Calibri" pitchFamily="34" charset="-122"/>
@@ -4173,7 +4173,7 @@
             <a:r>
               <a:rPr lang="en-US" sz="1400" dirty="0">
                 <a:solidFill>
-                  <a:srgbClr val="6B7A90"/>
+                  <a:srgbClr val="232C3A"/>
                 </a:solidFill>
                 <a:latin typeface="Calibri" pitchFamily="34" charset="0"/>
                 <a:ea typeface="Calibri" pitchFamily="34" charset="-122"/>
@@ -4796,7 +4796,7 @@
             <a:r>
               <a:rPr lang="en-US" sz="1020" i="1" dirty="0">
                 <a:solidFill>
-                  <a:srgbClr val="6B7A90"/>
+                  <a:srgbClr val="232C3A"/>
                 </a:solidFill>
                 <a:latin typeface="Calibri" pitchFamily="34" charset="0"/>
                 <a:ea typeface="Calibri" pitchFamily="34" charset="-122"/>
@@ -5229,7 +5229,7 @@
             <a:r>
               <a:rPr lang="en-US" sz="950" dirty="0">
                 <a:solidFill>
-                  <a:srgbClr val="6B7A90"/>
+                  <a:srgbClr val="232C3A"/>
                 </a:solidFill>
                 <a:latin typeface="Calibri" pitchFamily="34" charset="0"/>
                 <a:ea typeface="Calibri" pitchFamily="34" charset="-122"/>
@@ -5443,7 +5443,7 @@
             <a:r>
               <a:rPr lang="en-US" sz="1400" dirty="0">
                 <a:solidFill>
-                  <a:srgbClr val="6B7A90"/>
+                  <a:srgbClr val="232C3A"/>
                 </a:solidFill>
                 <a:latin typeface="Calibri" pitchFamily="34" charset="0"/>
                 <a:ea typeface="Calibri" pitchFamily="34" charset="-122"/>
@@ -5609,7 +5609,7 @@
             <a:r>
               <a:rPr lang="en-US" sz="1080" dirty="0">
                 <a:solidFill>
-                  <a:srgbClr val="6B7A90"/>
+                  <a:srgbClr val="232C3A"/>
                 </a:solidFill>
                 <a:latin typeface="Calibri" pitchFamily="34" charset="0"/>
                 <a:ea typeface="Calibri" pitchFamily="34" charset="-122"/>
@@ -5712,7 +5712,7 @@
             <a:r>
               <a:rPr lang="en-US" sz="1080" dirty="0">
                 <a:solidFill>
-                  <a:srgbClr val="6B7A90"/>
+                  <a:srgbClr val="232C3A"/>
                 </a:solidFill>
                 <a:latin typeface="Calibri" pitchFamily="34" charset="0"/>
                 <a:ea typeface="Calibri" pitchFamily="34" charset="-122"/>
@@ -5815,7 +5815,7 @@
             <a:r>
               <a:rPr lang="en-US" sz="1080" dirty="0">
                 <a:solidFill>
-                  <a:srgbClr val="6B7A90"/>
+                  <a:srgbClr val="232C3A"/>
                 </a:solidFill>
                 <a:latin typeface="Calibri" pitchFamily="34" charset="0"/>
                 <a:ea typeface="Calibri" pitchFamily="34" charset="-122"/>
@@ -5918,7 +5918,7 @@
             <a:r>
               <a:rPr lang="en-US" sz="1080" dirty="0">
                 <a:solidFill>
-                  <a:srgbClr val="6B7A90"/>
+                  <a:srgbClr val="232C3A"/>
                 </a:solidFill>
                 <a:latin typeface="Calibri" pitchFamily="34" charset="0"/>
                 <a:ea typeface="Calibri" pitchFamily="34" charset="-122"/>
@@ -6021,7 +6021,7 @@
             <a:r>
               <a:rPr lang="en-US" sz="1080" dirty="0">
                 <a:solidFill>
-                  <a:srgbClr val="6B7A90"/>
+                  <a:srgbClr val="232C3A"/>
                 </a:solidFill>
                 <a:latin typeface="Calibri" pitchFamily="34" charset="0"/>
                 <a:ea typeface="Calibri" pitchFamily="34" charset="-122"/>
@@ -6129,7 +6129,7 @@
             <a:r>
               <a:rPr lang="en-US" sz="950" dirty="0">
                 <a:solidFill>
-                  <a:srgbClr val="6B7A90"/>
+                  <a:srgbClr val="232C3A"/>
                 </a:solidFill>
                 <a:latin typeface="Calibri" pitchFamily="34" charset="0"/>
                 <a:ea typeface="Calibri" pitchFamily="34" charset="-122"/>
@@ -6550,7 +6550,7 @@
             <a:r>
               <a:rPr lang="en-US" sz="1400" dirty="0">
                 <a:solidFill>
-                  <a:srgbClr val="6B7A90"/>
+                  <a:srgbClr val="232C3A"/>
                 </a:solidFill>
                 <a:latin typeface="Calibri" pitchFamily="34" charset="0"/>
                 <a:ea typeface="Calibri" pitchFamily="34" charset="-122"/>
@@ -7225,7 +7225,7 @@
             <a:r>
               <a:rPr lang="en-US" sz="950" dirty="0">
                 <a:solidFill>
-                  <a:srgbClr val="6B7A90"/>
+                  <a:srgbClr val="232C3A"/>
                 </a:solidFill>
                 <a:latin typeface="Calibri" pitchFamily="34" charset="0"/>
                 <a:ea typeface="Calibri" pitchFamily="34" charset="-122"/>
@@ -7876,7 +7876,7 @@
             <a:r>
               <a:rPr lang="en-US" sz="1400" dirty="0">
                 <a:solidFill>
-                  <a:srgbClr val="6B7A90"/>
+                  <a:srgbClr val="232C3A"/>
                 </a:solidFill>
                 <a:latin typeface="Calibri" pitchFamily="34" charset="0"/>
                 <a:ea typeface="Calibri" pitchFamily="34" charset="-122"/>
@@ -8023,7 +8023,7 @@
             <a:r>
               <a:rPr lang="en-US" sz="1200" dirty="0">
                 <a:solidFill>
-                  <a:srgbClr val="6B7A90"/>
+                  <a:srgbClr val="232C3A"/>
                 </a:solidFill>
                 <a:latin typeface="Calibri" pitchFamily="34" charset="0"/>
                 <a:ea typeface="Calibri" pitchFamily="34" charset="-122"/>
@@ -8170,7 +8170,7 @@
             <a:r>
               <a:rPr lang="en-US" sz="1200" dirty="0">
                 <a:solidFill>
-                  <a:srgbClr val="6B7A90"/>
+                  <a:srgbClr val="232C3A"/>
                 </a:solidFill>
                 <a:latin typeface="Calibri" pitchFamily="34" charset="0"/>
                 <a:ea typeface="Calibri" pitchFamily="34" charset="-122"/>
@@ -8236,7 +8236,7 @@
             <a:r>
               <a:rPr lang="en-US" sz="1300" b="1" dirty="0">
                 <a:solidFill>
-                  <a:srgbClr val="FFFFFF"/>
+                  <a:srgbClr val="12235B"/>
                 </a:solidFill>
                 <a:latin typeface="Calibri" pitchFamily="34" charset="0"/>
                 <a:ea typeface="Calibri" pitchFamily="34" charset="-122"/>
@@ -8317,7 +8317,7 @@
             <a:r>
               <a:rPr lang="en-US" sz="1200" dirty="0">
                 <a:solidFill>
-                  <a:srgbClr val="6B7A90"/>
+                  <a:srgbClr val="232C3A"/>
                 </a:solidFill>
                 <a:latin typeface="Calibri" pitchFamily="34" charset="0"/>
                 <a:ea typeface="Calibri" pitchFamily="34" charset="-122"/>
@@ -8356,7 +8356,7 @@
             <a:r>
               <a:rPr lang="en-US" sz="950" dirty="0">
                 <a:solidFill>
-                  <a:srgbClr val="6B7A90"/>
+                  <a:srgbClr val="232C3A"/>
                 </a:solidFill>
                 <a:latin typeface="Calibri" pitchFamily="34" charset="0"/>
                 <a:ea typeface="Calibri" pitchFamily="34" charset="-122"/>
@@ -8592,7 +8592,7 @@
             <a:r>
               <a:rPr lang="en-US" sz="1150" b="1" dirty="0">
                 <a:solidFill>
-                  <a:srgbClr val="FFFFFF"/>
+                  <a:srgbClr val="12235B"/>
                 </a:solidFill>
                 <a:latin typeface="Calibri" pitchFamily="34" charset="0"/>
                 <a:ea typeface="Calibri" pitchFamily="34" charset="-122"/>
@@ -8738,7 +8738,7 @@
             <a:r>
               <a:rPr lang="en-US" sz="1120" dirty="0">
                 <a:solidFill>
-                  <a:srgbClr val="6B7A90"/>
+                  <a:srgbClr val="232C3A"/>
                 </a:solidFill>
                 <a:latin typeface="Calibri" pitchFamily="34" charset="0"/>
                 <a:ea typeface="Calibri" pitchFamily="34" charset="-122"/>
@@ -8948,7 +8948,7 @@
             <a:r>
               <a:rPr lang="en-US" sz="1120" dirty="0">
                 <a:solidFill>
-                  <a:srgbClr val="6B7A90"/>
+                  <a:srgbClr val="232C3A"/>
                 </a:solidFill>
                 <a:latin typeface="Calibri" pitchFamily="34" charset="0"/>
                 <a:ea typeface="Calibri" pitchFamily="34" charset="-122"/>
@@ -9158,7 +9158,7 @@
             <a:r>
               <a:rPr lang="en-US" sz="1120" dirty="0">
                 <a:solidFill>
-                  <a:srgbClr val="6B7A90"/>
+                  <a:srgbClr val="232C3A"/>
                 </a:solidFill>
                 <a:latin typeface="Calibri" pitchFamily="34" charset="0"/>
                 <a:ea typeface="Calibri" pitchFamily="34" charset="-122"/>
@@ -9345,7 +9345,7 @@
             <a:r>
               <a:rPr lang="en-US" sz="1120" dirty="0">
                 <a:solidFill>
-                  <a:srgbClr val="6B7A90"/>
+                  <a:srgbClr val="232C3A"/>
                 </a:solidFill>
                 <a:latin typeface="Calibri" pitchFamily="34" charset="0"/>
                 <a:ea typeface="Calibri" pitchFamily="34" charset="-122"/>
@@ -9465,7 +9465,7 @@
             <a:r>
               <a:rPr lang="en-US" sz="1080" dirty="0">
                 <a:solidFill>
-                  <a:srgbClr val="6B7A90"/>
+                  <a:srgbClr val="232C3A"/>
                 </a:solidFill>
                 <a:latin typeface="Calibri" pitchFamily="34" charset="0"/>
                 <a:ea typeface="Calibri" pitchFamily="34" charset="-122"/>
@@ -9546,7 +9546,7 @@
             <a:r>
               <a:rPr lang="en-US" sz="1080" dirty="0">
                 <a:solidFill>
-                  <a:srgbClr val="6B7A90"/>
+                  <a:srgbClr val="232C3A"/>
                 </a:solidFill>
                 <a:latin typeface="Calibri" pitchFamily="34" charset="0"/>
                 <a:ea typeface="Calibri" pitchFamily="34" charset="-122"/>
@@ -9627,7 +9627,7 @@
             <a:r>
               <a:rPr lang="en-US" sz="1080" dirty="0">
                 <a:solidFill>
-                  <a:srgbClr val="6B7A90"/>
+                  <a:srgbClr val="232C3A"/>
                 </a:solidFill>
                 <a:latin typeface="Calibri" pitchFamily="34" charset="0"/>
                 <a:ea typeface="Calibri" pitchFamily="34" charset="-122"/>
@@ -9708,7 +9708,7 @@
             <a:r>
               <a:rPr lang="en-US" sz="1080" dirty="0">
                 <a:solidFill>
-                  <a:srgbClr val="6B7A90"/>
+                  <a:srgbClr val="232C3A"/>
                 </a:solidFill>
                 <a:latin typeface="Calibri" pitchFamily="34" charset="0"/>
                 <a:ea typeface="Calibri" pitchFamily="34" charset="-122"/>
@@ -9747,7 +9747,7 @@
             <a:r>
               <a:rPr lang="en-US" sz="950" dirty="0">
                 <a:solidFill>
-                  <a:srgbClr val="6B7A90"/>
+                  <a:srgbClr val="232C3A"/>
                 </a:solidFill>
                 <a:latin typeface="Calibri" pitchFamily="34" charset="0"/>
                 <a:ea typeface="Calibri" pitchFamily="34" charset="-122"/>
@@ -11782,7 +11782,7 @@
             <a:r>
               <a:rPr lang="en-US" sz="1240" dirty="0">
                 <a:solidFill>
-                  <a:srgbClr val="6B7A90"/>
+                  <a:srgbClr val="232C3A"/>
                 </a:solidFill>
                 <a:latin typeface="Calibri" pitchFamily="34" charset="0"/>
                 <a:ea typeface="Calibri" pitchFamily="34" charset="-122"/>
@@ -11961,7 +11961,7 @@
             <a:r>
               <a:rPr lang="en-US" sz="1240" dirty="0">
                 <a:solidFill>
-                  <a:srgbClr val="6B7A90"/>
+                  <a:srgbClr val="232C3A"/>
                 </a:solidFill>
                 <a:latin typeface="Calibri" pitchFamily="34" charset="0"/>
                 <a:ea typeface="Calibri" pitchFamily="34" charset="-122"/>
@@ -12140,7 +12140,7 @@
             <a:r>
               <a:rPr lang="en-US" sz="1240" dirty="0">
                 <a:solidFill>
-                  <a:srgbClr val="6B7A90"/>
+                  <a:srgbClr val="232C3A"/>
                 </a:solidFill>
                 <a:latin typeface="Calibri" pitchFamily="34" charset="0"/>
                 <a:ea typeface="Calibri" pitchFamily="34" charset="-122"/>
@@ -12319,7 +12319,7 @@
             <a:r>
               <a:rPr lang="en-US" sz="1240" dirty="0">
                 <a:solidFill>
-                  <a:srgbClr val="6B7A90"/>
+                  <a:srgbClr val="232C3A"/>
                 </a:solidFill>
                 <a:latin typeface="Calibri" pitchFamily="34" charset="0"/>
                 <a:ea typeface="Calibri" pitchFamily="34" charset="-122"/>
@@ -12498,7 +12498,7 @@
             <a:r>
               <a:rPr lang="en-US" sz="1240" dirty="0">
                 <a:solidFill>
-                  <a:srgbClr val="6B7A90"/>
+                  <a:srgbClr val="232C3A"/>
                 </a:solidFill>
                 <a:latin typeface="Calibri" pitchFamily="34" charset="0"/>
                 <a:ea typeface="Calibri" pitchFamily="34" charset="-122"/>
@@ -12677,7 +12677,7 @@
             <a:r>
               <a:rPr lang="en-US" sz="1240" dirty="0">
                 <a:solidFill>
-                  <a:srgbClr val="6B7A90"/>
+                  <a:srgbClr val="232C3A"/>
                 </a:solidFill>
                 <a:latin typeface="Calibri" pitchFamily="34" charset="0"/>
                 <a:ea typeface="Calibri" pitchFamily="34" charset="-122"/>
@@ -12856,7 +12856,7 @@
             <a:r>
               <a:rPr lang="en-US" sz="1240" dirty="0">
                 <a:solidFill>
-                  <a:srgbClr val="6B7A90"/>
+                  <a:srgbClr val="232C3A"/>
                 </a:solidFill>
                 <a:latin typeface="Calibri" pitchFamily="34" charset="0"/>
                 <a:ea typeface="Calibri" pitchFamily="34" charset="-122"/>
@@ -12934,7 +12934,7 @@
             <a:r>
               <a:rPr lang="en-US" sz="950" dirty="0">
                 <a:solidFill>
-                  <a:srgbClr val="6B7A90"/>
+                  <a:srgbClr val="232C3A"/>
                 </a:solidFill>
                 <a:latin typeface="Calibri" pitchFamily="34" charset="0"/>
                 <a:ea typeface="Calibri" pitchFamily="34" charset="-122"/>
@@ -13449,7 +13449,7 @@
             <a:r>
               <a:rPr lang="en-US" sz="1400" dirty="0">
                 <a:solidFill>
-                  <a:srgbClr val="6B7A90"/>
+                  <a:srgbClr val="232C3A"/>
                 </a:solidFill>
                 <a:latin typeface="Calibri" pitchFamily="34" charset="0"/>
                 <a:ea typeface="Calibri" pitchFamily="34" charset="-122"/>
@@ -13754,7 +13754,7 @@
             <a:r>
               <a:rPr lang="en-US" sz="1160" dirty="0">
                 <a:solidFill>
-                  <a:srgbClr val="6B7A90"/>
+                  <a:srgbClr val="232C3A"/>
                 </a:solidFill>
                 <a:latin typeface="Calibri" pitchFamily="34" charset="0"/>
                 <a:ea typeface="Calibri" pitchFamily="34" charset="-122"/>
@@ -13860,7 +13860,7 @@
             <a:r>
               <a:rPr lang="en-US" sz="1160" dirty="0">
                 <a:solidFill>
-                  <a:srgbClr val="6B7A90"/>
+                  <a:srgbClr val="232C3A"/>
                 </a:solidFill>
                 <a:latin typeface="Calibri" pitchFamily="34" charset="0"/>
                 <a:ea typeface="Calibri" pitchFamily="34" charset="-122"/>
@@ -13966,7 +13966,7 @@
             <a:r>
               <a:rPr lang="en-US" sz="1160" dirty="0">
                 <a:solidFill>
-                  <a:srgbClr val="6B7A90"/>
+                  <a:srgbClr val="232C3A"/>
                 </a:solidFill>
                 <a:latin typeface="Calibri" pitchFamily="34" charset="0"/>
                 <a:ea typeface="Calibri" pitchFamily="34" charset="-122"/>
@@ -14074,7 +14074,7 @@
             <a:r>
               <a:rPr lang="en-US" sz="950" dirty="0">
                 <a:solidFill>
-                  <a:srgbClr val="6B7A90"/>
+                  <a:srgbClr val="232C3A"/>
                 </a:solidFill>
                 <a:latin typeface="Calibri" pitchFamily="34" charset="0"/>
                 <a:ea typeface="Calibri" pitchFamily="34" charset="-122"/>
@@ -14771,7 +14771,7 @@
             <a:r>
               <a:rPr lang="en-US" sz="1400" dirty="0">
                 <a:solidFill>
-                  <a:srgbClr val="6B7A90"/>
+                  <a:srgbClr val="232C3A"/>
                 </a:solidFill>
                 <a:latin typeface="Calibri" pitchFamily="34" charset="0"/>
                 <a:ea typeface="Calibri" pitchFamily="34" charset="-122"/>
@@ -14921,7 +14921,7 @@
             <a:r>
               <a:rPr lang="en-US" sz="1180" dirty="0">
                 <a:solidFill>
-                  <a:srgbClr val="6B7A90"/>
+                  <a:srgbClr val="232C3A"/>
                 </a:solidFill>
                 <a:latin typeface="Calibri" pitchFamily="34" charset="0"/>
                 <a:ea typeface="Calibri" pitchFamily="34" charset="-122"/>
@@ -15071,7 +15071,7 @@
             <a:r>
               <a:rPr lang="en-US" sz="1180" dirty="0">
                 <a:solidFill>
-                  <a:srgbClr val="6B7A90"/>
+                  <a:srgbClr val="232C3A"/>
                 </a:solidFill>
                 <a:latin typeface="Calibri" pitchFamily="34" charset="0"/>
                 <a:ea typeface="Calibri" pitchFamily="34" charset="-122"/>
@@ -15221,7 +15221,7 @@
             <a:r>
               <a:rPr lang="en-US" sz="1180" dirty="0">
                 <a:solidFill>
-                  <a:srgbClr val="6B7A90"/>
+                  <a:srgbClr val="232C3A"/>
                 </a:solidFill>
                 <a:latin typeface="Calibri" pitchFamily="34" charset="0"/>
                 <a:ea typeface="Calibri" pitchFamily="34" charset="-122"/>
@@ -15341,7 +15341,7 @@
             <a:r>
               <a:rPr lang="en-US" sz="950" dirty="0">
                 <a:solidFill>
-                  <a:srgbClr val="6B7A90"/>
+                  <a:srgbClr val="232C3A"/>
                 </a:solidFill>
                 <a:latin typeface="Calibri" pitchFamily="34" charset="0"/>
                 <a:ea typeface="Calibri" pitchFamily="34" charset="-122"/>
@@ -15580,7 +15580,7 @@
             <a:r>
               <a:rPr lang="en-US" sz="1400" dirty="0">
                 <a:solidFill>
-                  <a:srgbClr val="6B7A90"/>
+                  <a:srgbClr val="232C3A"/>
                 </a:solidFill>
                 <a:latin typeface="Calibri" pitchFamily="34" charset="0"/>
                 <a:ea typeface="Calibri" pitchFamily="34" charset="-122"/>
@@ -16556,7 +16556,7 @@
             <a:r>
               <a:rPr lang="en-US" sz="1020" i="1" dirty="0">
                 <a:solidFill>
-                  <a:srgbClr val="6B7A90"/>
+                  <a:srgbClr val="232C3A"/>
                 </a:solidFill>
                 <a:latin typeface="Calibri" pitchFamily="34" charset="0"/>
                 <a:ea typeface="Calibri" pitchFamily="34" charset="-122"/>
@@ -16994,7 +16994,7 @@
             <a:r>
               <a:rPr lang="en-US" sz="950" dirty="0">
                 <a:solidFill>
-                  <a:srgbClr val="6B7A90"/>
+                  <a:srgbClr val="232C3A"/>
                 </a:solidFill>
                 <a:latin typeface="Calibri" pitchFamily="34" charset="0"/>
                 <a:ea typeface="Calibri" pitchFamily="34" charset="-122"/>
@@ -17438,7 +17438,7 @@
             <a:r>
               <a:rPr lang="en-US" sz="1400" dirty="0">
                 <a:solidFill>
-                  <a:srgbClr val="6B7A90"/>
+                  <a:srgbClr val="232C3A"/>
                 </a:solidFill>
                 <a:latin typeface="Calibri" pitchFamily="34" charset="0"/>
                 <a:ea typeface="Calibri" pitchFamily="34" charset="-122"/>
@@ -17504,7 +17504,7 @@
             <a:r>
               <a:rPr lang="en-US" sz="1020" i="1" dirty="0">
                 <a:solidFill>
-                  <a:srgbClr val="6B7A90"/>
+                  <a:srgbClr val="232C3A"/>
                 </a:solidFill>
                 <a:latin typeface="Calibri" pitchFamily="34" charset="0"/>
                 <a:ea typeface="Calibri" pitchFamily="34" charset="-122"/>
@@ -17727,7 +17727,7 @@
             <a:r>
               <a:rPr lang="en-US" sz="1100" dirty="0">
                 <a:solidFill>
-                  <a:srgbClr val="6B7A90"/>
+                  <a:srgbClr val="232C3A"/>
                 </a:solidFill>
                 <a:latin typeface="Calibri" pitchFamily="34" charset="0"/>
                 <a:ea typeface="Calibri" pitchFamily="34" charset="-122"/>
@@ -17844,7 +17844,7 @@
             <a:r>
               <a:rPr lang="en-US" sz="1100" dirty="0">
                 <a:solidFill>
-                  <a:srgbClr val="6B7A90"/>
+                  <a:srgbClr val="232C3A"/>
                 </a:solidFill>
                 <a:latin typeface="Calibri" pitchFamily="34" charset="0"/>
                 <a:ea typeface="Calibri" pitchFamily="34" charset="-122"/>
@@ -17961,7 +17961,7 @@
             <a:r>
               <a:rPr lang="en-US" sz="1100" dirty="0">
                 <a:solidFill>
-                  <a:srgbClr val="6B7A90"/>
+                  <a:srgbClr val="232C3A"/>
                 </a:solidFill>
                 <a:latin typeface="Calibri" pitchFamily="34" charset="0"/>
                 <a:ea typeface="Calibri" pitchFamily="34" charset="-122"/>
@@ -18078,7 +18078,7 @@
             <a:r>
               <a:rPr lang="en-US" sz="1100" dirty="0">
                 <a:solidFill>
-                  <a:srgbClr val="6B7A90"/>
+                  <a:srgbClr val="232C3A"/>
                 </a:solidFill>
                 <a:latin typeface="Calibri" pitchFamily="34" charset="0"/>
                 <a:ea typeface="Calibri" pitchFamily="34" charset="-122"/>
@@ -18195,7 +18195,7 @@
             <a:r>
               <a:rPr lang="en-US" sz="1100" dirty="0">
                 <a:solidFill>
-                  <a:srgbClr val="6B7A90"/>
+                  <a:srgbClr val="232C3A"/>
                 </a:solidFill>
                 <a:latin typeface="Calibri" pitchFamily="34" charset="0"/>
                 <a:ea typeface="Calibri" pitchFamily="34" charset="-122"/>
@@ -18339,7 +18339,7 @@
             <a:r>
               <a:rPr lang="en-US" sz="1100" dirty="0">
                 <a:solidFill>
-                  <a:srgbClr val="6B7A90"/>
+                  <a:srgbClr val="232C3A"/>
                 </a:solidFill>
                 <a:latin typeface="Calibri" pitchFamily="34" charset="0"/>
                 <a:ea typeface="Calibri" pitchFamily="34" charset="-122"/>
@@ -18420,7 +18420,7 @@
             <a:r>
               <a:rPr lang="en-US" sz="1140" dirty="0">
                 <a:solidFill>
-                  <a:srgbClr val="6B7A90"/>
+                  <a:srgbClr val="232C3A"/>
                 </a:solidFill>
                 <a:latin typeface="Calibri" pitchFamily="34" charset="0"/>
                 <a:ea typeface="Calibri" pitchFamily="34" charset="-122"/>
@@ -18459,7 +18459,7 @@
             <a:r>
               <a:rPr lang="en-US" sz="950" dirty="0">
                 <a:solidFill>
-                  <a:srgbClr val="6B7A90"/>
+                  <a:srgbClr val="232C3A"/>
                 </a:solidFill>
                 <a:latin typeface="Calibri" pitchFamily="34" charset="0"/>
                 <a:ea typeface="Calibri" pitchFamily="34" charset="-122"/>
@@ -18697,7 +18697,7 @@
             <a:r>
               <a:rPr lang="en-US" sz="960" b="1" spc="110" kern="0" dirty="0">
                 <a:solidFill>
-                  <a:srgbClr val="6B7A90"/>
+                  <a:srgbClr val="232C3A"/>
                 </a:solidFill>
                 <a:latin typeface="Calibri" pitchFamily="34" charset="0"/>
                 <a:ea typeface="Calibri" pitchFamily="34" charset="-122"/>
@@ -18802,7 +18802,7 @@
             <a:r>
               <a:rPr lang="en-US" sz="940" dirty="0">
                 <a:solidFill>
-                  <a:srgbClr val="6B7A90"/>
+                  <a:srgbClr val="232C3A"/>
                 </a:solidFill>
                 <a:latin typeface="Calibri" pitchFamily="34" charset="0"/>
                 <a:ea typeface="Calibri" pitchFamily="34" charset="-122"/>
@@ -18831,11 +18831,11 @@
             </a:avLst>
           </a:prstGeom>
           <a:solidFill>
-            <a:srgbClr val="4FC3E8"/>
+            <a:srgbClr val="12235B"/>
           </a:solidFill>
           <a:ln w="13970">
             <a:solidFill>
-              <a:srgbClr val="4FC3E8"/>
+              <a:srgbClr val="12235B"/>
             </a:solidFill>
             <a:prstDash val="solid"/>
           </a:ln>
@@ -18907,7 +18907,7 @@
             <a:r>
               <a:rPr lang="en-US" sz="940" dirty="0">
                 <a:solidFill>
-                  <a:srgbClr val="6B7A90"/>
+                  <a:srgbClr val="9FD9F0"/>
                 </a:solidFill>
                 <a:latin typeface="Calibri" pitchFamily="34" charset="0"/>
                 <a:ea typeface="Calibri" pitchFamily="34" charset="-122"/>
@@ -19012,7 +19012,7 @@
             <a:r>
               <a:rPr lang="en-US" sz="940" dirty="0">
                 <a:solidFill>
-                  <a:srgbClr val="6B7A90"/>
+                  <a:srgbClr val="232C3A"/>
                 </a:solidFill>
                 <a:latin typeface="Calibri" pitchFamily="34" charset="0"/>
                 <a:ea typeface="Calibri" pitchFamily="34" charset="-122"/>
@@ -19117,7 +19117,7 @@
             <a:r>
               <a:rPr lang="en-US" sz="940" dirty="0">
                 <a:solidFill>
-                  <a:srgbClr val="6B7A90"/>
+                  <a:srgbClr val="232C3A"/>
                 </a:solidFill>
                 <a:latin typeface="Calibri" pitchFamily="34" charset="0"/>
                 <a:ea typeface="Calibri" pitchFamily="34" charset="-122"/>
@@ -19387,7 +19387,7 @@
             <a:r>
               <a:rPr lang="en-US" sz="960" b="1" spc="110" kern="0" dirty="0">
                 <a:solidFill>
-                  <a:srgbClr val="6B7A90"/>
+                  <a:srgbClr val="232C3A"/>
                 </a:solidFill>
                 <a:latin typeface="Calibri" pitchFamily="34" charset="0"/>
                 <a:ea typeface="Calibri" pitchFamily="34" charset="-122"/>
@@ -19492,7 +19492,7 @@
             <a:r>
               <a:rPr lang="en-US" sz="940" dirty="0">
                 <a:solidFill>
-                  <a:srgbClr val="6B7A90"/>
+                  <a:srgbClr val="232C3A"/>
                 </a:solidFill>
                 <a:latin typeface="Calibri" pitchFamily="34" charset="0"/>
                 <a:ea typeface="Calibri" pitchFamily="34" charset="-122"/>
@@ -19597,7 +19597,7 @@
             <a:r>
               <a:rPr lang="en-US" sz="940" dirty="0">
                 <a:solidFill>
-                  <a:srgbClr val="6B7A90"/>
+                  <a:srgbClr val="232C3A"/>
                 </a:solidFill>
                 <a:latin typeface="Calibri" pitchFamily="34" charset="0"/>
                 <a:ea typeface="Calibri" pitchFamily="34" charset="-122"/>
@@ -19702,7 +19702,7 @@
             <a:r>
               <a:rPr lang="en-US" sz="940" dirty="0">
                 <a:solidFill>
-                  <a:srgbClr val="6B7A90"/>
+                  <a:srgbClr val="232C3A"/>
                 </a:solidFill>
                 <a:latin typeface="Calibri" pitchFamily="34" charset="0"/>
                 <a:ea typeface="Calibri" pitchFamily="34" charset="-122"/>
@@ -19807,7 +19807,7 @@
             <a:r>
               <a:rPr lang="en-US" sz="940" dirty="0">
                 <a:solidFill>
-                  <a:srgbClr val="6B7A90"/>
+                  <a:srgbClr val="232C3A"/>
                 </a:solidFill>
                 <a:latin typeface="Calibri" pitchFamily="34" charset="0"/>
                 <a:ea typeface="Calibri" pitchFamily="34" charset="-122"/>
@@ -19870,7 +19870,7 @@
             <a:r>
               <a:rPr lang="en-US" sz="960" dirty="0">
                 <a:solidFill>
-                  <a:srgbClr val="6B7A90"/>
+                  <a:srgbClr val="232C3A"/>
                 </a:solidFill>
                 <a:latin typeface="Calibri" pitchFamily="34" charset="0"/>
                 <a:ea typeface="Calibri" pitchFamily="34" charset="-122"/>
@@ -19936,7 +19936,7 @@
             <a:r>
               <a:rPr lang="en-US" sz="960" b="1" spc="110" kern="0" dirty="0">
                 <a:solidFill>
-                  <a:srgbClr val="6B7A90"/>
+                  <a:srgbClr val="232C3A"/>
                 </a:solidFill>
                 <a:latin typeface="Calibri" pitchFamily="34" charset="0"/>
                 <a:ea typeface="Calibri" pitchFamily="34" charset="-122"/>
@@ -19969,7 +19969,7 @@
           </a:solidFill>
           <a:ln w="13970">
             <a:solidFill>
-              <a:srgbClr val="6B7A90"/>
+              <a:srgbClr val="232C3A"/>
             </a:solidFill>
             <a:prstDash val="solid"/>
           </a:ln>
@@ -20041,7 +20041,7 @@
             <a:r>
               <a:rPr lang="en-US" sz="940" dirty="0">
                 <a:solidFill>
-                  <a:srgbClr val="6B7A90"/>
+                  <a:srgbClr val="232C3A"/>
                 </a:solidFill>
                 <a:latin typeface="Calibri" pitchFamily="34" charset="0"/>
                 <a:ea typeface="Calibri" pitchFamily="34" charset="-122"/>
@@ -20146,7 +20146,7 @@
             <a:r>
               <a:rPr lang="en-US" sz="940" dirty="0">
                 <a:solidFill>
-                  <a:srgbClr val="6B7A90"/>
+                  <a:srgbClr val="232C3A"/>
                 </a:solidFill>
                 <a:latin typeface="Calibri" pitchFamily="34" charset="0"/>
                 <a:ea typeface="Calibri" pitchFamily="34" charset="-122"/>
@@ -20251,7 +20251,7 @@
             <a:r>
               <a:rPr lang="en-US" sz="940" dirty="0">
                 <a:solidFill>
-                  <a:srgbClr val="6B7A90"/>
+                  <a:srgbClr val="232C3A"/>
                 </a:solidFill>
                 <a:latin typeface="Calibri" pitchFamily="34" charset="0"/>
                 <a:ea typeface="Calibri" pitchFamily="34" charset="-122"/>
@@ -20280,7 +20280,7 @@
           <a:noFill/>
           <a:ln w="19050">
             <a:solidFill>
-              <a:srgbClr val="6B7A90"/>
+              <a:srgbClr val="232C3A"/>
             </a:solidFill>
             <a:prstDash val="dash"/>
             <a:tailEnd type="triangle"/>
@@ -20362,7 +20362,7 @@
             <a:r>
               <a:rPr lang="en-US" sz="960" i="1" dirty="0">
                 <a:solidFill>
-                  <a:srgbClr val="6B7A90"/>
+                  <a:srgbClr val="232C3A"/>
                 </a:solidFill>
                 <a:latin typeface="Calibri" pitchFamily="34" charset="0"/>
                 <a:ea typeface="Calibri" pitchFamily="34" charset="-122"/>
@@ -20401,7 +20401,7 @@
             <a:r>
               <a:rPr lang="en-US" sz="950" dirty="0">
                 <a:solidFill>
-                  <a:srgbClr val="6B7A90"/>
+                  <a:srgbClr val="232C3A"/>
                 </a:solidFill>
                 <a:latin typeface="Calibri" pitchFamily="34" charset="0"/>
                 <a:ea typeface="Calibri" pitchFamily="34" charset="-122"/>
@@ -21622,7 +21622,7 @@
             <a:r>
               <a:rPr lang="en-US" sz="1300" b="1" dirty="0">
                 <a:solidFill>
-                  <a:srgbClr val="FFFFFF"/>
+                  <a:srgbClr val="12235B"/>
                 </a:solidFill>
                 <a:latin typeface="Calibri" pitchFamily="34" charset="0"/>
                 <a:ea typeface="Calibri" pitchFamily="34" charset="-122"/>
@@ -21947,7 +21947,7 @@
             <a:r>
               <a:rPr lang="en-US" sz="950" dirty="0">
                 <a:solidFill>
-                  <a:srgbClr val="6B7A90"/>
+                  <a:srgbClr val="232C3A"/>
                 </a:solidFill>
                 <a:latin typeface="Calibri" pitchFamily="34" charset="0"/>
                 <a:ea typeface="Calibri" pitchFamily="34" charset="-122"/>
@@ -22185,7 +22185,7 @@
             <a:r>
               <a:rPr lang="en-US" sz="1020" i="1" dirty="0">
                 <a:solidFill>
-                  <a:srgbClr val="6B7A90"/>
+                  <a:srgbClr val="232C3A"/>
                 </a:solidFill>
                 <a:latin typeface="Calibri" pitchFamily="34" charset="0"/>
                 <a:ea typeface="Calibri" pitchFamily="34" charset="-122"/>
@@ -22293,7 +22293,7 @@
             <a:r>
               <a:rPr lang="en-US" sz="980" dirty="0">
                 <a:solidFill>
-                  <a:srgbClr val="6B7A90"/>
+                  <a:srgbClr val="232C3A"/>
                 </a:solidFill>
                 <a:latin typeface="Calibri" pitchFamily="34" charset="0"/>
                 <a:ea typeface="Calibri" pitchFamily="34" charset="-122"/>
@@ -22401,7 +22401,7 @@
             <a:r>
               <a:rPr lang="en-US" sz="980" dirty="0">
                 <a:solidFill>
-                  <a:srgbClr val="6B7A90"/>
+                  <a:srgbClr val="232C3A"/>
                 </a:solidFill>
                 <a:latin typeface="Calibri" pitchFamily="34" charset="0"/>
                 <a:ea typeface="Calibri" pitchFamily="34" charset="-122"/>
@@ -22509,7 +22509,7 @@
             <a:r>
               <a:rPr lang="en-US" sz="980" dirty="0">
                 <a:solidFill>
-                  <a:srgbClr val="6B7A90"/>
+                  <a:srgbClr val="232C3A"/>
                 </a:solidFill>
                 <a:latin typeface="Calibri" pitchFamily="34" charset="0"/>
                 <a:ea typeface="Calibri" pitchFamily="34" charset="-122"/>
@@ -22617,7 +22617,7 @@
             <a:r>
               <a:rPr lang="en-US" sz="980" dirty="0">
                 <a:solidFill>
-                  <a:srgbClr val="6B7A90"/>
+                  <a:srgbClr val="232C3A"/>
                 </a:solidFill>
                 <a:latin typeface="Calibri" pitchFamily="34" charset="0"/>
                 <a:ea typeface="Calibri" pitchFamily="34" charset="-122"/>
@@ -22857,7 +22857,7 @@
             <a:r>
               <a:rPr lang="en-US" sz="950" dirty="0">
                 <a:solidFill>
-                  <a:srgbClr val="6B7A90"/>
+                  <a:srgbClr val="232C3A"/>
                 </a:solidFill>
                 <a:latin typeface="Calibri" pitchFamily="34" charset="0"/>
                 <a:ea typeface="Calibri" pitchFamily="34" charset="-122"/>
